--- a/DATARADAR_Strategic_Overview.pptx
+++ b/DATARADAR_Strategic_Overview.pptx
@@ -17,6 +17,8 @@
     <p:sldId id="265" r:id="rId16"/>
     <p:sldId id="266" r:id="rId17"/>
     <p:sldId id="267" r:id="rId18"/>
+    <p:sldId id="268" r:id="rId19"/>
+    <p:sldId id="269" r:id="rId20"/>
   </p:sldIdLst>
   <p:sldSz cx="12191695" cy="6858000" type="screen4x3"/>
   <p:notesSz cx="6858000" cy="9144000"/>
@@ -3275,7 +3277,50 @@
       </p:sp>
       <p:sp>
         <p:nvSpPr>
-          <p:cNvPr id="6" name="TextBox 5"/>
+          <p:cNvPr id="6" name="Right Triangle 5"/>
+          <p:cNvSpPr/>
+          <p:nvPr/>
+        </p:nvSpPr>
+        <p:spPr>
+          <a:xfrm>
+            <a:off x="731520" y="5074920"/>
+            <a:ext cx="320040" cy="320040"/>
+          </a:xfrm>
+          <a:prstGeom prst="rtTriangle">
+            <a:avLst/>
+          </a:prstGeom>
+          <a:solidFill>
+            <a:srgbClr val="30D158"/>
+          </a:solidFill>
+          <a:ln>
+            <a:noFill/>
+          </a:ln>
+        </p:spPr>
+        <p:style>
+          <a:lnRef idx="1">
+            <a:schemeClr val="accent1"/>
+          </a:lnRef>
+          <a:fillRef idx="3">
+            <a:schemeClr val="accent1"/>
+          </a:fillRef>
+          <a:effectRef idx="2">
+            <a:schemeClr val="accent1"/>
+          </a:effectRef>
+          <a:fontRef idx="minor">
+            <a:schemeClr val="lt1"/>
+          </a:fontRef>
+        </p:style>
+        <p:txBody>
+          <a:bodyPr rtlCol="0" anchor="ctr"/>
+          <a:lstStyle/>
+          <a:p>
+            <a:pPr algn="ctr"/>
+          </a:p>
+        </p:txBody>
+      </p:sp>
+      <p:sp>
+        <p:nvSpPr>
+          <p:cNvPr id="7" name="TextBox 6"/>
           <p:cNvSpPr txBox="1"/>
           <p:nvPr/>
         </p:nvSpPr>
@@ -3310,7 +3355,7 @@
       </p:sp>
       <p:sp>
         <p:nvSpPr>
-          <p:cNvPr id="7" name="TextBox 6"/>
+          <p:cNvPr id="8" name="TextBox 7"/>
           <p:cNvSpPr txBox="1"/>
           <p:nvPr/>
         </p:nvSpPr>
@@ -3345,7 +3390,7 @@
       </p:sp>
       <p:sp>
         <p:nvSpPr>
-          <p:cNvPr id="8" name="TextBox 7"/>
+          <p:cNvPr id="9" name="TextBox 8"/>
           <p:cNvSpPr txBox="1"/>
           <p:nvPr/>
         </p:nvSpPr>
@@ -3380,7 +3425,7 @@
       </p:sp>
       <p:sp>
         <p:nvSpPr>
-          <p:cNvPr id="9" name="TextBox 8"/>
+          <p:cNvPr id="10" name="TextBox 9"/>
           <p:cNvSpPr txBox="1"/>
           <p:nvPr/>
         </p:nvSpPr>
@@ -3415,7 +3460,7 @@
       </p:sp>
       <p:sp>
         <p:nvSpPr>
-          <p:cNvPr id="10" name="TextBox 9"/>
+          <p:cNvPr id="11" name="TextBox 10"/>
           <p:cNvSpPr txBox="1"/>
           <p:nvPr/>
         </p:nvSpPr>
@@ -3525,7 +3570,7 @@
             <a:avLst/>
           </a:prstGeom>
           <a:solidFill>
-            <a:srgbClr val="4A9EFF"/>
+            <a:srgbClr val="C8A355"/>
           </a:solidFill>
           <a:ln>
             <a:noFill/>
@@ -3583,21 +3628,238 @@
                 </a:solidFill>
                 <a:latin typeface="Calibri"/>
               </a:rPr>
-              <a:t>What's next</a:t>
-            </a:r>
-          </a:p>
-        </p:txBody>
-      </p:sp>
-      <p:sp>
-        <p:nvSpPr>
-          <p:cNvPr id="5" name="Rounded Rectangle 4"/>
+              <a:t>DATARADAR gets smarter with every swipe</a:t>
+            </a:r>
+          </a:p>
+        </p:txBody>
+      </p:sp>
+      <p:sp>
+        <p:nvSpPr>
+          <p:cNvPr id="5" name="TextBox 4"/>
+          <p:cNvSpPr txBox="1"/>
+          <p:nvPr/>
+        </p:nvSpPr>
+        <p:spPr>
+          <a:xfrm>
+            <a:off x="822960" y="1691640"/>
+            <a:ext cx="10972800" cy="3474720"/>
+          </a:xfrm>
+          <a:prstGeom prst="rect">
+            <a:avLst/>
+          </a:prstGeom>
+          <a:noFill/>
+        </p:spPr>
+        <p:txBody>
+          <a:bodyPr wrap="square" lIns="0" rIns="0" tIns="0" bIns="0" anchor="t">
+            <a:spAutoFit/>
+          </a:bodyPr>
+          <a:lstStyle/>
+          <a:p>
+            <a:pPr algn="l">
+              <a:lnSpc>
+                <a:spcPct val="150000"/>
+              </a:lnSpc>
+            </a:pPr>
+            <a:r>
+              <a:rPr sz="1700" b="0">
+                <a:solidFill>
+                  <a:srgbClr val="F0F3F7"/>
+                </a:solidFill>
+                <a:latin typeface="Calibri"/>
+              </a:rPr>
+              <a:t>•  Individual comps surface in a swipe stack — reject noise, approve relevant</a:t>
+            </a:r>
+          </a:p>
+          <a:p>
+            <a:pPr algn="l">
+              <a:lnSpc>
+                <a:spcPct val="150000"/>
+              </a:lnSpc>
+            </a:pPr>
+            <a:r>
+              <a:rPr sz="1700" b="0">
+                <a:solidFill>
+                  <a:srgbClr val="F0F3F7"/>
+                </a:solidFill>
+                <a:latin typeface="Calibri"/>
+              </a:rPr>
+              <a:t>•  Rejections persist to comp_curation_rejections.json, keyed by sha1(name|price|date)</a:t>
+            </a:r>
+          </a:p>
+          <a:p>
+            <a:pPr algn="l">
+              <a:lnSpc>
+                <a:spcPct val="150000"/>
+              </a:lnSpc>
+            </a:pPr>
+            <a:r>
+              <a:rPr sz="1700" b="0">
+                <a:solidFill>
+                  <a:srgbClr val="F0F3F7"/>
+                </a:solidFill>
+                <a:latin typeface="Calibri"/>
+              </a:rPr>
+              <a:t>•  lookup_historical_prices auto-filters rejected comps → cleaner median / p75</a:t>
+            </a:r>
+          </a:p>
+          <a:p>
+            <a:pPr algn="l">
+              <a:lnSpc>
+                <a:spcPct val="150000"/>
+              </a:lnSpc>
+            </a:pPr>
+            <a:r>
+              <a:rPr sz="1700" b="0">
+                <a:solidFill>
+                  <a:srgbClr val="F0F3F7"/>
+                </a:solidFill>
+                <a:latin typeface="Calibri"/>
+              </a:rPr>
+              <a:t>•  Training data is the operator's expert eye, not labels at scale</a:t>
+            </a:r>
+          </a:p>
+          <a:p>
+            <a:pPr algn="l">
+              <a:lnSpc>
+                <a:spcPct val="150000"/>
+              </a:lnSpc>
+            </a:pPr>
+            <a:r>
+              <a:rPr sz="1700" b="0">
+                <a:solidFill>
+                  <a:srgbClr val="F0F3F7"/>
+                </a:solidFill>
+                <a:latin typeface="Calibri"/>
+              </a:rPr>
+              <a:t>•  Every rejection permanently tightens the model</a:t>
+            </a:r>
+          </a:p>
+        </p:txBody>
+      </p:sp>
+      <p:sp>
+        <p:nvSpPr>
+          <p:cNvPr id="6" name="Rounded Rectangle 5"/>
           <p:cNvSpPr/>
           <p:nvPr/>
         </p:nvSpPr>
         <p:spPr>
           <a:xfrm>
-            <a:off x="472287" y="1737360"/>
-            <a:ext cx="3566160" cy="4480560"/>
+            <a:off x="1188720" y="5074920"/>
+            <a:ext cx="4572000" cy="1280160"/>
+          </a:xfrm>
+          <a:prstGeom prst="roundRect">
+            <a:avLst/>
+          </a:prstGeom>
+          <a:solidFill>
+            <a:srgbClr val="121E2F"/>
+          </a:solidFill>
+          <a:ln w="12700">
+            <a:solidFill>
+              <a:srgbClr val="7A8494"/>
+            </a:solidFill>
+          </a:ln>
+          <a:effectLst/>
+        </p:spPr>
+        <p:style>
+          <a:lnRef idx="1">
+            <a:schemeClr val="accent1"/>
+          </a:lnRef>
+          <a:fillRef idx="3">
+            <a:schemeClr val="accent1"/>
+          </a:fillRef>
+          <a:effectRef idx="2">
+            <a:schemeClr val="accent1"/>
+          </a:effectRef>
+          <a:fontRef idx="minor">
+            <a:schemeClr val="lt1"/>
+          </a:fontRef>
+        </p:style>
+        <p:txBody>
+          <a:bodyPr rtlCol="0" anchor="ctr"/>
+          <a:lstStyle/>
+          <a:p/>
+        </p:txBody>
+      </p:sp>
+      <p:sp>
+        <p:nvSpPr>
+          <p:cNvPr id="7" name="TextBox 6"/>
+          <p:cNvSpPr txBox="1"/>
+          <p:nvPr/>
+        </p:nvSpPr>
+        <p:spPr>
+          <a:xfrm>
+            <a:off x="1188720" y="5166360"/>
+            <a:ext cx="4572000" cy="365760"/>
+          </a:xfrm>
+          <a:prstGeom prst="rect">
+            <a:avLst/>
+          </a:prstGeom>
+          <a:noFill/>
+        </p:spPr>
+        <p:txBody>
+          <a:bodyPr wrap="square" lIns="0" rIns="0" tIns="0" bIns="0" anchor="t">
+            <a:spAutoFit/>
+          </a:bodyPr>
+          <a:lstStyle/>
+          <a:p>
+            <a:pPr algn="ctr"/>
+            <a:r>
+              <a:rPr sz="1200" b="1">
+                <a:solidFill>
+                  <a:srgbClr val="7A8494"/>
+                </a:solidFill>
+                <a:latin typeface="Calibri"/>
+              </a:rPr>
+              <a:t>BEFORE CURATION</a:t>
+            </a:r>
+          </a:p>
+        </p:txBody>
+      </p:sp>
+      <p:sp>
+        <p:nvSpPr>
+          <p:cNvPr id="8" name="TextBox 7"/>
+          <p:cNvSpPr txBox="1"/>
+          <p:nvPr/>
+        </p:nvSpPr>
+        <p:spPr>
+          <a:xfrm>
+            <a:off x="1188720" y="5532120"/>
+            <a:ext cx="4572000" cy="822960"/>
+          </a:xfrm>
+          <a:prstGeom prst="rect">
+            <a:avLst/>
+          </a:prstGeom>
+          <a:noFill/>
+        </p:spPr>
+        <p:txBody>
+          <a:bodyPr wrap="square" lIns="0" rIns="0" tIns="0" bIns="0" anchor="ctr">
+            <a:spAutoFit/>
+          </a:bodyPr>
+          <a:lstStyle/>
+          <a:p>
+            <a:pPr algn="ctr"/>
+            <a:r>
+              <a:rPr sz="1700" b="1">
+                <a:solidFill>
+                  <a:srgbClr val="7A8494"/>
+                </a:solidFill>
+                <a:latin typeface="Consolas"/>
+              </a:rPr>
+              <a:t>noisy comps  →  p75 wobble ±$40</a:t>
+            </a:r>
+          </a:p>
+        </p:txBody>
+      </p:sp>
+      <p:sp>
+        <p:nvSpPr>
+          <p:cNvPr id="9" name="Rounded Rectangle 8"/>
+          <p:cNvSpPr/>
+          <p:nvPr/>
+        </p:nvSpPr>
+        <p:spPr>
+          <a:xfrm>
+            <a:off x="6492240" y="5074920"/>
+            <a:ext cx="4572000" cy="1280160"/>
           </a:xfrm>
           <a:prstGeom prst="roundRect">
             <a:avLst/>
@@ -3634,14 +3896,14 @@
       </p:sp>
       <p:sp>
         <p:nvSpPr>
-          <p:cNvPr id="6" name="TextBox 5"/>
+          <p:cNvPr id="10" name="TextBox 9"/>
           <p:cNvSpPr txBox="1"/>
           <p:nvPr/>
         </p:nvSpPr>
         <p:spPr>
           <a:xfrm>
-            <a:off x="746607" y="1965960"/>
-            <a:ext cx="3017520" cy="548640"/>
+            <a:off x="6492240" y="5166360"/>
+            <a:ext cx="4572000" cy="365760"/>
           </a:xfrm>
           <a:prstGeom prst="rect">
             <a:avLst/>
@@ -3654,29 +3916,29 @@
           </a:bodyPr>
           <a:lstStyle/>
           <a:p>
-            <a:pPr algn="l"/>
-            <a:r>
-              <a:rPr sz="2400" b="1">
+            <a:pPr algn="ctr"/>
+            <a:r>
+              <a:rPr sz="1200" b="1">
                 <a:solidFill>
                   <a:srgbClr val="30D158"/>
                 </a:solidFill>
                 <a:latin typeface="Calibri"/>
               </a:rPr>
-              <a:t>NOW</a:t>
-            </a:r>
-          </a:p>
-        </p:txBody>
-      </p:sp>
-      <p:sp>
-        <p:nvSpPr>
-          <p:cNvPr id="7" name="TextBox 6"/>
+              <a:t>AFTER CURATION</a:t>
+            </a:r>
+          </a:p>
+        </p:txBody>
+      </p:sp>
+      <p:sp>
+        <p:nvSpPr>
+          <p:cNvPr id="11" name="TextBox 10"/>
           <p:cNvSpPr txBox="1"/>
           <p:nvPr/>
         </p:nvSpPr>
         <p:spPr>
           <a:xfrm>
-            <a:off x="746607" y="2514600"/>
-            <a:ext cx="3017520" cy="365760"/>
+            <a:off x="6492240" y="5532120"/>
+            <a:ext cx="4572000" cy="822960"/>
           </a:xfrm>
           <a:prstGeom prst="rect">
             <a:avLst/>
@@ -3684,118 +3946,44 @@
           <a:noFill/>
         </p:spPr>
         <p:txBody>
-          <a:bodyPr wrap="square" lIns="0" rIns="0" tIns="0" bIns="0" anchor="t">
+          <a:bodyPr wrap="square" lIns="0" rIns="0" tIns="0" bIns="0" anchor="ctr">
             <a:spAutoFit/>
           </a:bodyPr>
           <a:lstStyle/>
           <a:p>
-            <a:pPr algn="l"/>
-            <a:r>
-              <a:rPr sz="1200" b="0">
-                <a:solidFill>
-                  <a:srgbClr val="7A8494"/>
-                </a:solidFill>
-                <a:latin typeface="Calibri"/>
-              </a:rPr>
-              <a:t>Next 2 weeks</a:t>
-            </a:r>
-          </a:p>
-        </p:txBody>
-      </p:sp>
-      <p:sp>
-        <p:nvSpPr>
-          <p:cNvPr id="8" name="TextBox 7"/>
-          <p:cNvSpPr txBox="1"/>
-          <p:nvPr/>
-        </p:nvSpPr>
-        <p:spPr>
-          <a:xfrm>
-            <a:off x="746607" y="3063240"/>
-            <a:ext cx="3017520" cy="3017520"/>
-          </a:xfrm>
-          <a:prstGeom prst="rect">
-            <a:avLst/>
-          </a:prstGeom>
-          <a:noFill/>
-        </p:spPr>
-        <p:txBody>
-          <a:bodyPr wrap="square" lIns="0" rIns="0" tIns="0" bIns="0" anchor="t">
-            <a:spAutoFit/>
-          </a:bodyPr>
-          <a:lstStyle/>
-          <a:p>
-            <a:pPr algn="l">
-              <a:lnSpc>
-                <a:spcPct val="140000"/>
-              </a:lnSpc>
-            </a:pPr>
-            <a:r>
-              <a:rPr sz="1400" b="0">
-                <a:solidFill>
-                  <a:srgbClr val="F0F3F7"/>
-                </a:solidFill>
-                <a:latin typeface="Calibri"/>
-              </a:rPr>
-              <a:t>•  OpenAI + Gemini quota top-up</a:t>
-            </a:r>
-          </a:p>
-          <a:p>
-            <a:pPr algn="l">
-              <a:lnSpc>
-                <a:spcPct val="140000"/>
-              </a:lnSpc>
-            </a:pPr>
-            <a:r>
-              <a:rPr sz="1400" b="0">
-                <a:solidFill>
-                  <a:srgbClr val="F0F3F7"/>
-                </a:solidFill>
-                <a:latin typeface="Calibri"/>
-              </a:rPr>
-              <a:t>•  Bulk batch repricing approval UI</a:t>
-            </a:r>
-          </a:p>
-          <a:p>
-            <a:pPr algn="l">
-              <a:lnSpc>
-                <a:spcPct val="140000"/>
-              </a:lnSpc>
-            </a:pPr>
-            <a:r>
-              <a:rPr sz="1400" b="0">
-                <a:solidFill>
-                  <a:srgbClr val="F0F3F7"/>
-                </a:solidFill>
-                <a:latin typeface="Calibri"/>
-              </a:rPr>
-              <a:t>•  Nightly comp re-index</a:t>
-            </a:r>
-          </a:p>
-        </p:txBody>
-      </p:sp>
-      <p:sp>
-        <p:nvSpPr>
-          <p:cNvPr id="9" name="Rounded Rectangle 8"/>
+            <a:pPr algn="ctr"/>
+            <a:r>
+              <a:rPr sz="1700" b="1">
+                <a:solidFill>
+                  <a:srgbClr val="30D158"/>
+                </a:solidFill>
+                <a:latin typeface="Consolas"/>
+              </a:rPr>
+              <a:t>clean comps  →  p75 tight ±$8</a:t>
+            </a:r>
+          </a:p>
+        </p:txBody>
+      </p:sp>
+      <p:sp>
+        <p:nvSpPr>
+          <p:cNvPr id="12" name="Right Arrow 11"/>
           <p:cNvSpPr/>
           <p:nvPr/>
         </p:nvSpPr>
         <p:spPr>
           <a:xfrm>
-            <a:off x="4312767" y="1737360"/>
-            <a:ext cx="3566160" cy="4480560"/>
-          </a:xfrm>
-          <a:prstGeom prst="roundRect">
+            <a:off x="5806440" y="5577840"/>
+            <a:ext cx="594360" cy="274320"/>
+          </a:xfrm>
+          <a:prstGeom prst="rightArrow">
             <a:avLst/>
           </a:prstGeom>
           <a:solidFill>
-            <a:srgbClr val="121E2F"/>
+            <a:srgbClr val="C8A355"/>
           </a:solidFill>
-          <a:ln w="12700">
-            <a:solidFill>
-              <a:srgbClr val="4A9EFF"/>
-            </a:solidFill>
+          <a:ln>
+            <a:noFill/>
           </a:ln>
-          <a:effectLst/>
         </p:spPr>
         <p:style>
           <a:lnRef idx="1">
@@ -3814,340 +4002,14 @@
         <p:txBody>
           <a:bodyPr rtlCol="0" anchor="ctr"/>
           <a:lstStyle/>
-          <a:p/>
-        </p:txBody>
-      </p:sp>
-      <p:sp>
-        <p:nvSpPr>
-          <p:cNvPr id="10" name="TextBox 9"/>
-          <p:cNvSpPr txBox="1"/>
-          <p:nvPr/>
-        </p:nvSpPr>
-        <p:spPr>
-          <a:xfrm>
-            <a:off x="4587087" y="1965960"/>
-            <a:ext cx="3017520" cy="548640"/>
-          </a:xfrm>
-          <a:prstGeom prst="rect">
-            <a:avLst/>
-          </a:prstGeom>
-          <a:noFill/>
-        </p:spPr>
-        <p:txBody>
-          <a:bodyPr wrap="square" lIns="0" rIns="0" tIns="0" bIns="0" anchor="t">
-            <a:spAutoFit/>
-          </a:bodyPr>
-          <a:lstStyle/>
-          <a:p>
-            <a:pPr algn="l"/>
-            <a:r>
-              <a:rPr sz="2400" b="1">
-                <a:solidFill>
-                  <a:srgbClr val="4A9EFF"/>
-                </a:solidFill>
-                <a:latin typeface="Calibri"/>
-              </a:rPr>
-              <a:t>NEXT</a:t>
-            </a:r>
-          </a:p>
-        </p:txBody>
-      </p:sp>
-      <p:sp>
-        <p:nvSpPr>
-          <p:cNvPr id="11" name="TextBox 10"/>
-          <p:cNvSpPr txBox="1"/>
-          <p:nvPr/>
-        </p:nvSpPr>
-        <p:spPr>
-          <a:xfrm>
-            <a:off x="4587087" y="2514600"/>
-            <a:ext cx="3017520" cy="365760"/>
-          </a:xfrm>
-          <a:prstGeom prst="rect">
-            <a:avLst/>
-          </a:prstGeom>
-          <a:noFill/>
-        </p:spPr>
-        <p:txBody>
-          <a:bodyPr wrap="square" lIns="0" rIns="0" tIns="0" bIns="0" anchor="t">
-            <a:spAutoFit/>
-          </a:bodyPr>
-          <a:lstStyle/>
-          <a:p>
-            <a:pPr algn="l"/>
-            <a:r>
-              <a:rPr sz="1200" b="0">
-                <a:solidFill>
-                  <a:srgbClr val="7A8494"/>
-                </a:solidFill>
-                <a:latin typeface="Calibri"/>
-              </a:rPr>
-              <a:t>Q3 2026</a:t>
-            </a:r>
-          </a:p>
-        </p:txBody>
-      </p:sp>
-      <p:sp>
-        <p:nvSpPr>
-          <p:cNvPr id="12" name="TextBox 11"/>
-          <p:cNvSpPr txBox="1"/>
-          <p:nvPr/>
-        </p:nvSpPr>
-        <p:spPr>
-          <a:xfrm>
-            <a:off x="4587087" y="3063240"/>
-            <a:ext cx="3017520" cy="3017520"/>
-          </a:xfrm>
-          <a:prstGeom prst="rect">
-            <a:avLst/>
-          </a:prstGeom>
-          <a:noFill/>
-        </p:spPr>
-        <p:txBody>
-          <a:bodyPr wrap="square" lIns="0" rIns="0" tIns="0" bIns="0" anchor="t">
-            <a:spAutoFit/>
-          </a:bodyPr>
-          <a:lstStyle/>
-          <a:p>
-            <a:pPr algn="l">
-              <a:lnSpc>
-                <a:spcPct val="140000"/>
-              </a:lnSpc>
-            </a:pPr>
-            <a:r>
-              <a:rPr sz="1400" b="0">
-                <a:solidFill>
-                  <a:srgbClr val="F0F3F7"/>
-                </a:solidFill>
-                <a:latin typeface="Calibri"/>
-              </a:rPr>
-              <a:t>•  More data sources
-(Heritage, Christie's)</a:t>
-            </a:r>
-          </a:p>
-          <a:p>
-            <a:pPr algn="l">
-              <a:lnSpc>
-                <a:spcPct val="140000"/>
-              </a:lnSpc>
-            </a:pPr>
-            <a:r>
-              <a:rPr sz="1400" b="0">
-                <a:solidFill>
-                  <a:srgbClr val="F0F3F7"/>
-                </a:solidFill>
-                <a:latin typeface="Calibri"/>
-              </a:rPr>
-              <a:t>•  Artist-specific LLM fine-tuning</a:t>
-            </a:r>
-          </a:p>
-          <a:p>
-            <a:pPr algn="l">
-              <a:lnSpc>
-                <a:spcPct val="140000"/>
-              </a:lnSpc>
-            </a:pPr>
-            <a:r>
-              <a:rPr sz="1400" b="0">
-                <a:solidFill>
-                  <a:srgbClr val="F0F3F7"/>
-                </a:solidFill>
-                <a:latin typeface="Calibri"/>
-              </a:rPr>
-              <a:t>•  Mobile PWA</a:t>
-            </a:r>
-          </a:p>
-        </p:txBody>
-      </p:sp>
-      <p:sp>
-        <p:nvSpPr>
-          <p:cNvPr id="13" name="Rounded Rectangle 12"/>
-          <p:cNvSpPr/>
-          <p:nvPr/>
-        </p:nvSpPr>
-        <p:spPr>
-          <a:xfrm>
-            <a:off x="8153247" y="1737360"/>
-            <a:ext cx="3566160" cy="4480560"/>
-          </a:xfrm>
-          <a:prstGeom prst="roundRect">
-            <a:avLst/>
-          </a:prstGeom>
-          <a:solidFill>
-            <a:srgbClr val="121E2F"/>
-          </a:solidFill>
-          <a:ln w="12700">
-            <a:solidFill>
-              <a:srgbClr val="C8A355"/>
-            </a:solidFill>
-          </a:ln>
-          <a:effectLst/>
-        </p:spPr>
-        <p:style>
-          <a:lnRef idx="1">
-            <a:schemeClr val="accent1"/>
-          </a:lnRef>
-          <a:fillRef idx="3">
-            <a:schemeClr val="accent1"/>
-          </a:fillRef>
-          <a:effectRef idx="2">
-            <a:schemeClr val="accent1"/>
-          </a:effectRef>
-          <a:fontRef idx="minor">
-            <a:schemeClr val="lt1"/>
-          </a:fontRef>
-        </p:style>
-        <p:txBody>
-          <a:bodyPr rtlCol="0" anchor="ctr"/>
-          <a:lstStyle/>
-          <a:p/>
-        </p:txBody>
-      </p:sp>
-      <p:sp>
-        <p:nvSpPr>
-          <p:cNvPr id="14" name="TextBox 13"/>
-          <p:cNvSpPr txBox="1"/>
-          <p:nvPr/>
-        </p:nvSpPr>
-        <p:spPr>
-          <a:xfrm>
-            <a:off x="8427567" y="1965960"/>
-            <a:ext cx="3017520" cy="548640"/>
-          </a:xfrm>
-          <a:prstGeom prst="rect">
-            <a:avLst/>
-          </a:prstGeom>
-          <a:noFill/>
-        </p:spPr>
-        <p:txBody>
-          <a:bodyPr wrap="square" lIns="0" rIns="0" tIns="0" bIns="0" anchor="t">
-            <a:spAutoFit/>
-          </a:bodyPr>
-          <a:lstStyle/>
-          <a:p>
-            <a:pPr algn="l"/>
-            <a:r>
-              <a:rPr sz="2400" b="1">
-                <a:solidFill>
-                  <a:srgbClr val="C8A355"/>
-                </a:solidFill>
-                <a:latin typeface="Calibri"/>
-              </a:rPr>
-              <a:t>LATER</a:t>
-            </a:r>
-          </a:p>
-        </p:txBody>
-      </p:sp>
-      <p:sp>
-        <p:nvSpPr>
-          <p:cNvPr id="15" name="TextBox 14"/>
-          <p:cNvSpPr txBox="1"/>
-          <p:nvPr/>
-        </p:nvSpPr>
-        <p:spPr>
-          <a:xfrm>
-            <a:off x="8427567" y="2514600"/>
-            <a:ext cx="3017520" cy="365760"/>
-          </a:xfrm>
-          <a:prstGeom prst="rect">
-            <a:avLst/>
-          </a:prstGeom>
-          <a:noFill/>
-        </p:spPr>
-        <p:txBody>
-          <a:bodyPr wrap="square" lIns="0" rIns="0" tIns="0" bIns="0" anchor="t">
-            <a:spAutoFit/>
-          </a:bodyPr>
-          <a:lstStyle/>
-          <a:p>
-            <a:pPr algn="l"/>
-            <a:r>
-              <a:rPr sz="1200" b="0">
-                <a:solidFill>
-                  <a:srgbClr val="7A8494"/>
-                </a:solidFill>
-                <a:latin typeface="Calibri"/>
-              </a:rPr>
-              <a:t>Horizon</a:t>
-            </a:r>
-          </a:p>
-        </p:txBody>
-      </p:sp>
-      <p:sp>
-        <p:nvSpPr>
-          <p:cNvPr id="16" name="TextBox 15"/>
-          <p:cNvSpPr txBox="1"/>
-          <p:nvPr/>
-        </p:nvSpPr>
-        <p:spPr>
-          <a:xfrm>
-            <a:off x="8427567" y="3063240"/>
-            <a:ext cx="3017520" cy="3017520"/>
-          </a:xfrm>
-          <a:prstGeom prst="rect">
-            <a:avLst/>
-          </a:prstGeom>
-          <a:noFill/>
-        </p:spPr>
-        <p:txBody>
-          <a:bodyPr wrap="square" lIns="0" rIns="0" tIns="0" bIns="0" anchor="t">
-            <a:spAutoFit/>
-          </a:bodyPr>
-          <a:lstStyle/>
-          <a:p>
-            <a:pPr algn="l">
-              <a:lnSpc>
-                <a:spcPct val="140000"/>
-              </a:lnSpc>
-            </a:pPr>
-            <a:r>
-              <a:rPr sz="1400" b="0">
-                <a:solidFill>
-                  <a:srgbClr val="F0F3F7"/>
-                </a:solidFill>
-                <a:latin typeface="Calibri"/>
-              </a:rPr>
-              <a:t>•  Open comp DB as paid API</a:t>
-            </a:r>
-          </a:p>
-          <a:p>
-            <a:pPr algn="l">
-              <a:lnSpc>
-                <a:spcPct val="140000"/>
-              </a:lnSpc>
-            </a:pPr>
-            <a:r>
-              <a:rPr sz="1400" b="0">
-                <a:solidFill>
-                  <a:srgbClr val="F0F3F7"/>
-                </a:solidFill>
-                <a:latin typeface="Calibri"/>
-              </a:rPr>
-              <a:t>•  Multi-marketplace
-(Mercari, Poshmark)</a:t>
-            </a:r>
-          </a:p>
-          <a:p>
-            <a:pPr algn="l">
-              <a:lnSpc>
-                <a:spcPct val="140000"/>
-              </a:lnSpc>
-            </a:pPr>
-            <a:r>
-              <a:rPr sz="1400" b="0">
-                <a:solidFill>
-                  <a:srgbClr val="F0F3F7"/>
-                </a:solidFill>
-                <a:latin typeface="Calibri"/>
-              </a:rPr>
-              <a:t>•  AI-authenticated COA verification</a:t>
-            </a:r>
-          </a:p>
-        </p:txBody>
-      </p:sp>
-      <p:sp>
-        <p:nvSpPr>
-          <p:cNvPr id="17" name="TextBox 16"/>
+          <a:p>
+            <a:pPr algn="ctr"/>
+          </a:p>
+        </p:txBody>
+      </p:sp>
+      <p:sp>
+        <p:nvSpPr>
+          <p:cNvPr id="13" name="TextBox 12"/>
           <p:cNvSpPr txBox="1"/>
           <p:nvPr/>
         </p:nvSpPr>
@@ -4315,7 +4177,7 @@
                 </a:solidFill>
                 <a:latin typeface="Calibri"/>
               </a:rPr>
-              <a:t>Why this matters</a:t>
+              <a:t>Under the hood</a:t>
             </a:r>
           </a:p>
         </p:txBody>
@@ -4328,8 +4190,501 @@
         </p:nvSpPr>
         <p:spPr>
           <a:xfrm>
-            <a:off x="609447" y="1691640"/>
-            <a:ext cx="10972800" cy="1188720"/>
+            <a:off x="4587087" y="3017520"/>
+            <a:ext cx="3017520" cy="1371600"/>
+          </a:xfrm>
+          <a:prstGeom prst="roundRect">
+            <a:avLst/>
+          </a:prstGeom>
+          <a:solidFill>
+            <a:srgbClr val="121E2F"/>
+          </a:solidFill>
+          <a:ln w="12700">
+            <a:solidFill>
+              <a:srgbClr val="4A9EFF"/>
+            </a:solidFill>
+          </a:ln>
+          <a:effectLst/>
+        </p:spPr>
+        <p:style>
+          <a:lnRef idx="1">
+            <a:schemeClr val="accent1"/>
+          </a:lnRef>
+          <a:fillRef idx="3">
+            <a:schemeClr val="accent1"/>
+          </a:fillRef>
+          <a:effectRef idx="2">
+            <a:schemeClr val="accent1"/>
+          </a:effectRef>
+          <a:fontRef idx="minor">
+            <a:schemeClr val="lt1"/>
+          </a:fontRef>
+        </p:style>
+        <p:txBody>
+          <a:bodyPr rtlCol="0" anchor="ctr"/>
+          <a:lstStyle/>
+          <a:p/>
+        </p:txBody>
+      </p:sp>
+      <p:sp>
+        <p:nvSpPr>
+          <p:cNvPr id="6" name="TextBox 5"/>
+          <p:cNvSpPr txBox="1"/>
+          <p:nvPr/>
+        </p:nvSpPr>
+        <p:spPr>
+          <a:xfrm>
+            <a:off x="4587087" y="3017520"/>
+            <a:ext cx="3017520" cy="1371600"/>
+          </a:xfrm>
+          <a:prstGeom prst="rect">
+            <a:avLst/>
+          </a:prstGeom>
+          <a:noFill/>
+        </p:spPr>
+        <p:txBody>
+          <a:bodyPr wrap="square" lIns="0" rIns="0" tIns="0" bIns="0" anchor="ctr">
+            <a:spAutoFit/>
+          </a:bodyPr>
+          <a:lstStyle/>
+          <a:p>
+            <a:pPr algn="ctr"/>
+            <a:r>
+              <a:rPr sz="1500" b="1">
+                <a:solidFill>
+                  <a:srgbClr val="F0F3F7"/>
+                </a:solidFill>
+                <a:latin typeface="Calibri"/>
+              </a:rPr>
+              <a:t>Flask app</a:t>
+            </a:r>
+          </a:p>
+          <a:p>
+            <a:pPr algn="ctr"/>
+            <a:r>
+              <a:rPr sz="1500" b="1">
+                <a:solidFill>
+                  <a:srgbClr val="F0F3F7"/>
+                </a:solidFill>
+                <a:latin typeface="Calibri"/>
+              </a:rPr>
+              <a:t>app.py · 15,500 lines</a:t>
+            </a:r>
+          </a:p>
+        </p:txBody>
+      </p:sp>
+      <p:sp>
+        <p:nvSpPr>
+          <p:cNvPr id="7" name="Rounded Rectangle 6"/>
+          <p:cNvSpPr/>
+          <p:nvPr/>
+        </p:nvSpPr>
+        <p:spPr>
+          <a:xfrm>
+            <a:off x="457200" y="1508760"/>
+            <a:ext cx="2286000" cy="1005840"/>
+          </a:xfrm>
+          <a:prstGeom prst="roundRect">
+            <a:avLst/>
+          </a:prstGeom>
+          <a:solidFill>
+            <a:srgbClr val="121E2F"/>
+          </a:solidFill>
+          <a:ln w="12700">
+            <a:solidFill>
+              <a:srgbClr val="C8A355"/>
+            </a:solidFill>
+          </a:ln>
+          <a:effectLst/>
+        </p:spPr>
+        <p:style>
+          <a:lnRef idx="1">
+            <a:schemeClr val="accent1"/>
+          </a:lnRef>
+          <a:fillRef idx="3">
+            <a:schemeClr val="accent1"/>
+          </a:fillRef>
+          <a:effectRef idx="2">
+            <a:schemeClr val="accent1"/>
+          </a:effectRef>
+          <a:fontRef idx="minor">
+            <a:schemeClr val="lt1"/>
+          </a:fontRef>
+        </p:style>
+        <p:txBody>
+          <a:bodyPr rtlCol="0" anchor="ctr"/>
+          <a:lstStyle/>
+          <a:p/>
+        </p:txBody>
+      </p:sp>
+      <p:sp>
+        <p:nvSpPr>
+          <p:cNvPr id="8" name="TextBox 7"/>
+          <p:cNvSpPr txBox="1"/>
+          <p:nvPr/>
+        </p:nvSpPr>
+        <p:spPr>
+          <a:xfrm>
+            <a:off x="457200" y="1508760"/>
+            <a:ext cx="2286000" cy="1005840"/>
+          </a:xfrm>
+          <a:prstGeom prst="rect">
+            <a:avLst/>
+          </a:prstGeom>
+          <a:noFill/>
+        </p:spPr>
+        <p:txBody>
+          <a:bodyPr wrap="square" lIns="0" rIns="0" tIns="0" bIns="0" anchor="ctr">
+            <a:spAutoFit/>
+          </a:bodyPr>
+          <a:lstStyle/>
+          <a:p>
+            <a:pPr algn="ctr"/>
+            <a:r>
+              <a:rPr sz="1200" b="1">
+                <a:solidFill>
+                  <a:srgbClr val="F0F3F7"/>
+                </a:solidFill>
+                <a:latin typeface="Calibri"/>
+              </a:rPr>
+              <a:t>eBay Trading /</a:t>
+            </a:r>
+          </a:p>
+          <a:p>
+            <a:pPr algn="ctr"/>
+            <a:r>
+              <a:rPr sz="1200" b="1">
+                <a:solidFill>
+                  <a:srgbClr val="F0F3F7"/>
+                </a:solidFill>
+                <a:latin typeface="Calibri"/>
+              </a:rPr>
+              <a:t>Browse API</a:t>
+            </a:r>
+          </a:p>
+        </p:txBody>
+      </p:sp>
+      <p:sp>
+        <p:nvSpPr>
+          <p:cNvPr id="9" name="Right Arrow 8"/>
+          <p:cNvSpPr/>
+          <p:nvPr/>
+        </p:nvSpPr>
+        <p:spPr>
+          <a:xfrm>
+            <a:off x="2788920" y="1920240"/>
+            <a:ext cx="1768167" cy="201168"/>
+          </a:xfrm>
+          <a:prstGeom prst="rightArrow">
+            <a:avLst/>
+          </a:prstGeom>
+          <a:solidFill>
+            <a:srgbClr val="C8A355"/>
+          </a:solidFill>
+          <a:ln>
+            <a:noFill/>
+          </a:ln>
+        </p:spPr>
+        <p:style>
+          <a:lnRef idx="1">
+            <a:schemeClr val="accent1"/>
+          </a:lnRef>
+          <a:fillRef idx="3">
+            <a:schemeClr val="accent1"/>
+          </a:fillRef>
+          <a:effectRef idx="2">
+            <a:schemeClr val="accent1"/>
+          </a:effectRef>
+          <a:fontRef idx="minor">
+            <a:schemeClr val="lt1"/>
+          </a:fontRef>
+        </p:style>
+        <p:txBody>
+          <a:bodyPr rtlCol="0" anchor="ctr"/>
+          <a:lstStyle/>
+          <a:p>
+            <a:pPr algn="ctr"/>
+          </a:p>
+        </p:txBody>
+      </p:sp>
+      <p:sp>
+        <p:nvSpPr>
+          <p:cNvPr id="10" name="Rounded Rectangle 9"/>
+          <p:cNvSpPr/>
+          <p:nvPr/>
+        </p:nvSpPr>
+        <p:spPr>
+          <a:xfrm>
+            <a:off x="457200" y="2880360"/>
+            <a:ext cx="2286000" cy="1005840"/>
+          </a:xfrm>
+          <a:prstGeom prst="roundRect">
+            <a:avLst/>
+          </a:prstGeom>
+          <a:solidFill>
+            <a:srgbClr val="121E2F"/>
+          </a:solidFill>
+          <a:ln w="12700">
+            <a:solidFill>
+              <a:srgbClr val="C8A355"/>
+            </a:solidFill>
+          </a:ln>
+          <a:effectLst/>
+        </p:spPr>
+        <p:style>
+          <a:lnRef idx="1">
+            <a:schemeClr val="accent1"/>
+          </a:lnRef>
+          <a:fillRef idx="3">
+            <a:schemeClr val="accent1"/>
+          </a:fillRef>
+          <a:effectRef idx="2">
+            <a:schemeClr val="accent1"/>
+          </a:effectRef>
+          <a:fontRef idx="minor">
+            <a:schemeClr val="lt1"/>
+          </a:fontRef>
+        </p:style>
+        <p:txBody>
+          <a:bodyPr rtlCol="0" anchor="ctr"/>
+          <a:lstStyle/>
+          <a:p/>
+        </p:txBody>
+      </p:sp>
+      <p:sp>
+        <p:nvSpPr>
+          <p:cNvPr id="11" name="TextBox 10"/>
+          <p:cNvSpPr txBox="1"/>
+          <p:nvPr/>
+        </p:nvSpPr>
+        <p:spPr>
+          <a:xfrm>
+            <a:off x="457200" y="2880360"/>
+            <a:ext cx="2286000" cy="1005840"/>
+          </a:xfrm>
+          <a:prstGeom prst="rect">
+            <a:avLst/>
+          </a:prstGeom>
+          <a:noFill/>
+        </p:spPr>
+        <p:txBody>
+          <a:bodyPr wrap="square" lIns="0" rIns="0" tIns="0" bIns="0" anchor="ctr">
+            <a:spAutoFit/>
+          </a:bodyPr>
+          <a:lstStyle/>
+          <a:p>
+            <a:pPr algn="ctr"/>
+            <a:r>
+              <a:rPr sz="1200" b="1">
+                <a:solidFill>
+                  <a:srgbClr val="F0F3F7"/>
+                </a:solidFill>
+                <a:latin typeface="Calibri"/>
+              </a:rPr>
+              <a:t>Google Sheets</a:t>
+            </a:r>
+          </a:p>
+          <a:p>
+            <a:pPr algn="ctr"/>
+            <a:r>
+              <a:rPr sz="1200" b="1">
+                <a:solidFill>
+                  <a:srgbClr val="F0F3F7"/>
+                </a:solidFill>
+                <a:latin typeface="Calibri"/>
+              </a:rPr>
+              <a:t>(pricing rules)</a:t>
+            </a:r>
+          </a:p>
+        </p:txBody>
+      </p:sp>
+      <p:sp>
+        <p:nvSpPr>
+          <p:cNvPr id="12" name="Right Arrow 11"/>
+          <p:cNvSpPr/>
+          <p:nvPr/>
+        </p:nvSpPr>
+        <p:spPr>
+          <a:xfrm>
+            <a:off x="2788920" y="3291840"/>
+            <a:ext cx="1768167" cy="201168"/>
+          </a:xfrm>
+          <a:prstGeom prst="rightArrow">
+            <a:avLst/>
+          </a:prstGeom>
+          <a:solidFill>
+            <a:srgbClr val="C8A355"/>
+          </a:solidFill>
+          <a:ln>
+            <a:noFill/>
+          </a:ln>
+        </p:spPr>
+        <p:style>
+          <a:lnRef idx="1">
+            <a:schemeClr val="accent1"/>
+          </a:lnRef>
+          <a:fillRef idx="3">
+            <a:schemeClr val="accent1"/>
+          </a:fillRef>
+          <a:effectRef idx="2">
+            <a:schemeClr val="accent1"/>
+          </a:effectRef>
+          <a:fontRef idx="minor">
+            <a:schemeClr val="lt1"/>
+          </a:fontRef>
+        </p:style>
+        <p:txBody>
+          <a:bodyPr rtlCol="0" anchor="ctr"/>
+          <a:lstStyle/>
+          <a:p>
+            <a:pPr algn="ctr"/>
+          </a:p>
+        </p:txBody>
+      </p:sp>
+      <p:sp>
+        <p:nvSpPr>
+          <p:cNvPr id="13" name="Rounded Rectangle 12"/>
+          <p:cNvSpPr/>
+          <p:nvPr/>
+        </p:nvSpPr>
+        <p:spPr>
+          <a:xfrm>
+            <a:off x="457200" y="4251960"/>
+            <a:ext cx="2286000" cy="1005840"/>
+          </a:xfrm>
+          <a:prstGeom prst="roundRect">
+            <a:avLst/>
+          </a:prstGeom>
+          <a:solidFill>
+            <a:srgbClr val="121E2F"/>
+          </a:solidFill>
+          <a:ln w="12700">
+            <a:solidFill>
+              <a:srgbClr val="C8A355"/>
+            </a:solidFill>
+          </a:ln>
+          <a:effectLst/>
+        </p:spPr>
+        <p:style>
+          <a:lnRef idx="1">
+            <a:schemeClr val="accent1"/>
+          </a:lnRef>
+          <a:fillRef idx="3">
+            <a:schemeClr val="accent1"/>
+          </a:fillRef>
+          <a:effectRef idx="2">
+            <a:schemeClr val="accent1"/>
+          </a:effectRef>
+          <a:fontRef idx="minor">
+            <a:schemeClr val="lt1"/>
+          </a:fontRef>
+        </p:style>
+        <p:txBody>
+          <a:bodyPr rtlCol="0" anchor="ctr"/>
+          <a:lstStyle/>
+          <a:p/>
+        </p:txBody>
+      </p:sp>
+      <p:sp>
+        <p:nvSpPr>
+          <p:cNvPr id="14" name="TextBox 13"/>
+          <p:cNvSpPr txBox="1"/>
+          <p:nvPr/>
+        </p:nvSpPr>
+        <p:spPr>
+          <a:xfrm>
+            <a:off x="457200" y="4251960"/>
+            <a:ext cx="2286000" cy="1005840"/>
+          </a:xfrm>
+          <a:prstGeom prst="rect">
+            <a:avLst/>
+          </a:prstGeom>
+          <a:noFill/>
+        </p:spPr>
+        <p:txBody>
+          <a:bodyPr wrap="square" lIns="0" rIns="0" tIns="0" bIns="0" anchor="ctr">
+            <a:spAutoFit/>
+          </a:bodyPr>
+          <a:lstStyle/>
+          <a:p>
+            <a:pPr algn="ctr"/>
+            <a:r>
+              <a:rPr sz="1200" b="1">
+                <a:solidFill>
+                  <a:srgbClr val="F0F3F7"/>
+                </a:solidFill>
+                <a:latin typeface="Calibri"/>
+              </a:rPr>
+              <a:t>54k comp DB</a:t>
+            </a:r>
+          </a:p>
+          <a:p>
+            <a:pPr algn="ctr"/>
+            <a:r>
+              <a:rPr sz="1200" b="1">
+                <a:solidFill>
+                  <a:srgbClr val="F0F3F7"/>
+                </a:solidFill>
+                <a:latin typeface="Calibri"/>
+              </a:rPr>
+              <a:t>(data/*.json)</a:t>
+            </a:r>
+          </a:p>
+        </p:txBody>
+      </p:sp>
+      <p:sp>
+        <p:nvSpPr>
+          <p:cNvPr id="15" name="Right Arrow 14"/>
+          <p:cNvSpPr/>
+          <p:nvPr/>
+        </p:nvSpPr>
+        <p:spPr>
+          <a:xfrm>
+            <a:off x="2788920" y="4663440"/>
+            <a:ext cx="1768167" cy="201168"/>
+          </a:xfrm>
+          <a:prstGeom prst="rightArrow">
+            <a:avLst/>
+          </a:prstGeom>
+          <a:solidFill>
+            <a:srgbClr val="C8A355"/>
+          </a:solidFill>
+          <a:ln>
+            <a:noFill/>
+          </a:ln>
+        </p:spPr>
+        <p:style>
+          <a:lnRef idx="1">
+            <a:schemeClr val="accent1"/>
+          </a:lnRef>
+          <a:fillRef idx="3">
+            <a:schemeClr val="accent1"/>
+          </a:fillRef>
+          <a:effectRef idx="2">
+            <a:schemeClr val="accent1"/>
+          </a:effectRef>
+          <a:fontRef idx="minor">
+            <a:schemeClr val="lt1"/>
+          </a:fontRef>
+        </p:style>
+        <p:txBody>
+          <a:bodyPr rtlCol="0" anchor="ctr"/>
+          <a:lstStyle/>
+          <a:p>
+            <a:pPr algn="ctr"/>
+          </a:p>
+        </p:txBody>
+      </p:sp>
+      <p:sp>
+        <p:nvSpPr>
+          <p:cNvPr id="16" name="Rounded Rectangle 15"/>
+          <p:cNvSpPr/>
+          <p:nvPr/>
+        </p:nvSpPr>
+        <p:spPr>
+          <a:xfrm>
+            <a:off x="9418320" y="1280160"/>
+            <a:ext cx="2286000" cy="777240"/>
           </a:xfrm>
           <a:prstGeom prst="roundRect">
             <a:avLst/>
@@ -4366,14 +4721,14 @@
       </p:sp>
       <p:sp>
         <p:nvSpPr>
-          <p:cNvPr id="6" name="TextBox 5"/>
+          <p:cNvPr id="17" name="TextBox 16"/>
           <p:cNvSpPr txBox="1"/>
           <p:nvPr/>
         </p:nvSpPr>
         <p:spPr>
           <a:xfrm>
-            <a:off x="975207" y="1691640"/>
-            <a:ext cx="2377440" cy="1188720"/>
+            <a:off x="9418320" y="1280160"/>
+            <a:ext cx="2286000" cy="777240"/>
           </a:xfrm>
           <a:prstGeom prst="rect">
             <a:avLst/>
@@ -4386,31 +4741,31 @@
           </a:bodyPr>
           <a:lstStyle/>
           <a:p>
-            <a:pPr algn="l"/>
-            <a:r>
-              <a:rPr sz="2200" b="1">
-                <a:solidFill>
-                  <a:srgbClr val="30D158"/>
-                </a:solidFill>
-                <a:latin typeface="Calibri"/>
-              </a:rPr>
-              <a:t>Own it</a:t>
-            </a:r>
-          </a:p>
-        </p:txBody>
-      </p:sp>
-      <p:sp>
-        <p:nvSpPr>
-          <p:cNvPr id="7" name="Rectangle 6"/>
+            <a:pPr algn="ctr"/>
+            <a:r>
+              <a:rPr sz="1200" b="1">
+                <a:solidFill>
+                  <a:srgbClr val="F0F3F7"/>
+                </a:solidFill>
+                <a:latin typeface="Calibri"/>
+              </a:rPr>
+              <a:t>Claude API</a:t>
+            </a:r>
+          </a:p>
+        </p:txBody>
+      </p:sp>
+      <p:sp>
+        <p:nvSpPr>
+          <p:cNvPr id="18" name="Right Arrow 17"/>
           <p:cNvSpPr/>
           <p:nvPr/>
         </p:nvSpPr>
         <p:spPr>
           <a:xfrm>
-            <a:off x="3398367" y="1920240"/>
-            <a:ext cx="27432" cy="731520"/>
-          </a:xfrm>
-          <a:prstGeom prst="rect">
+            <a:off x="7634607" y="1572768"/>
+            <a:ext cx="1753712" cy="201168"/>
+          </a:xfrm>
+          <a:prstGeom prst="rightArrow">
             <a:avLst/>
           </a:prstGeom>
           <a:solidFill>
@@ -4444,49 +4799,14 @@
       </p:sp>
       <p:sp>
         <p:nvSpPr>
-          <p:cNvPr id="8" name="TextBox 7"/>
-          <p:cNvSpPr txBox="1"/>
-          <p:nvPr/>
-        </p:nvSpPr>
-        <p:spPr>
-          <a:xfrm>
-            <a:off x="3626967" y="1691640"/>
-            <a:ext cx="7680960" cy="1188720"/>
-          </a:xfrm>
-          <a:prstGeom prst="rect">
-            <a:avLst/>
-          </a:prstGeom>
-          <a:noFill/>
-        </p:spPr>
-        <p:txBody>
-          <a:bodyPr wrap="square" lIns="0" rIns="0" tIns="0" bIns="0" anchor="ctr">
-            <a:spAutoFit/>
-          </a:bodyPr>
-          <a:lstStyle/>
-          <a:p>
-            <a:pPr algn="l"/>
-            <a:r>
-              <a:rPr sz="1500" b="0">
-                <a:solidFill>
-                  <a:srgbClr val="F0F3F7"/>
-                </a:solidFill>
-                <a:latin typeface="Calibri"/>
-              </a:rPr>
-              <a:t>Gauntlet Gallery owns a pricing stack worth $50k+ in engineering with $0 ongoing (free-tier APIs fit this scale).</a:t>
-            </a:r>
-          </a:p>
-        </p:txBody>
-      </p:sp>
-      <p:sp>
-        <p:nvSpPr>
-          <p:cNvPr id="9" name="Rounded Rectangle 8"/>
+          <p:cNvPr id="19" name="Rounded Rectangle 18"/>
           <p:cNvSpPr/>
           <p:nvPr/>
         </p:nvSpPr>
         <p:spPr>
           <a:xfrm>
-            <a:off x="609447" y="3108960"/>
-            <a:ext cx="10972800" cy="1188720"/>
+            <a:off x="9418320" y="2423160"/>
+            <a:ext cx="2286000" cy="777240"/>
           </a:xfrm>
           <a:prstGeom prst="roundRect">
             <a:avLst/>
@@ -4496,7 +4816,7 @@
           </a:solidFill>
           <a:ln w="12700">
             <a:solidFill>
-              <a:srgbClr val="4A9EFF"/>
+              <a:srgbClr val="30D158"/>
             </a:solidFill>
           </a:ln>
           <a:effectLst/>
@@ -4523,14 +4843,14 @@
       </p:sp>
       <p:sp>
         <p:nvSpPr>
-          <p:cNvPr id="10" name="TextBox 9"/>
+          <p:cNvPr id="20" name="TextBox 19"/>
           <p:cNvSpPr txBox="1"/>
           <p:nvPr/>
         </p:nvSpPr>
         <p:spPr>
           <a:xfrm>
-            <a:off x="975207" y="3108960"/>
-            <a:ext cx="2377440" cy="1188720"/>
+            <a:off x="9418320" y="2423160"/>
+            <a:ext cx="2286000" cy="777240"/>
           </a:xfrm>
           <a:prstGeom prst="rect">
             <a:avLst/>
@@ -4543,35 +4863,35 @@
           </a:bodyPr>
           <a:lstStyle/>
           <a:p>
-            <a:pPr algn="l"/>
-            <a:r>
-              <a:rPr sz="2200" b="1">
-                <a:solidFill>
-                  <a:srgbClr val="4A9EFF"/>
-                </a:solidFill>
-                <a:latin typeface="Calibri"/>
-              </a:rPr>
-              <a:t>License it</a:t>
-            </a:r>
-          </a:p>
-        </p:txBody>
-      </p:sp>
-      <p:sp>
-        <p:nvSpPr>
-          <p:cNvPr id="11" name="Rectangle 10"/>
+            <a:pPr algn="ctr"/>
+            <a:r>
+              <a:rPr sz="1200" b="1">
+                <a:solidFill>
+                  <a:srgbClr val="F0F3F7"/>
+                </a:solidFill>
+                <a:latin typeface="Calibri"/>
+              </a:rPr>
+              <a:t>OpenAI API</a:t>
+            </a:r>
+          </a:p>
+        </p:txBody>
+      </p:sp>
+      <p:sp>
+        <p:nvSpPr>
+          <p:cNvPr id="21" name="Right Arrow 20"/>
           <p:cNvSpPr/>
           <p:nvPr/>
         </p:nvSpPr>
         <p:spPr>
           <a:xfrm>
-            <a:off x="3398367" y="3337560"/>
-            <a:ext cx="27432" cy="731520"/>
-          </a:xfrm>
-          <a:prstGeom prst="rect">
+            <a:off x="7634607" y="2715768"/>
+            <a:ext cx="1753712" cy="201168"/>
+          </a:xfrm>
+          <a:prstGeom prst="rightArrow">
             <a:avLst/>
           </a:prstGeom>
           <a:solidFill>
-            <a:srgbClr val="4A9EFF"/>
+            <a:srgbClr val="30D158"/>
           </a:solidFill>
           <a:ln>
             <a:noFill/>
@@ -4601,49 +4921,14 @@
       </p:sp>
       <p:sp>
         <p:nvSpPr>
-          <p:cNvPr id="12" name="TextBox 11"/>
-          <p:cNvSpPr txBox="1"/>
-          <p:nvPr/>
-        </p:nvSpPr>
-        <p:spPr>
-          <a:xfrm>
-            <a:off x="3626967" y="3108960"/>
-            <a:ext cx="7680960" cy="1188720"/>
-          </a:xfrm>
-          <a:prstGeom prst="rect">
-            <a:avLst/>
-          </a:prstGeom>
-          <a:noFill/>
-        </p:spPr>
-        <p:txBody>
-          <a:bodyPr wrap="square" lIns="0" rIns="0" tIns="0" bIns="0" anchor="ctr">
-            <a:spAutoFit/>
-          </a:bodyPr>
-          <a:lstStyle/>
-          <a:p>
-            <a:pPr algn="l"/>
-            <a:r>
-              <a:rPr sz="1500" b="0">
-                <a:solidFill>
-                  <a:srgbClr val="F0F3F7"/>
-                </a:solidFill>
-                <a:latin typeface="Calibri"/>
-              </a:rPr>
-              <a:t>Other art and collectibles resellers pay $50–200/mo for access.</a:t>
-            </a:r>
-          </a:p>
-        </p:txBody>
-      </p:sp>
-      <p:sp>
-        <p:nvSpPr>
-          <p:cNvPr id="13" name="Rounded Rectangle 12"/>
+          <p:cNvPr id="22" name="Rounded Rectangle 21"/>
           <p:cNvSpPr/>
           <p:nvPr/>
         </p:nvSpPr>
         <p:spPr>
           <a:xfrm>
-            <a:off x="609447" y="4526280"/>
-            <a:ext cx="10972800" cy="1188720"/>
+            <a:off x="9418320" y="3566160"/>
+            <a:ext cx="2286000" cy="777240"/>
           </a:xfrm>
           <a:prstGeom prst="roundRect">
             <a:avLst/>
@@ -4653,7 +4938,7 @@
           </a:solidFill>
           <a:ln w="12700">
             <a:solidFill>
-              <a:srgbClr val="C8A355"/>
+              <a:srgbClr val="30D158"/>
             </a:solidFill>
           </a:ln>
           <a:effectLst/>
@@ -4680,14 +4965,14 @@
       </p:sp>
       <p:sp>
         <p:nvSpPr>
-          <p:cNvPr id="14" name="TextBox 13"/>
+          <p:cNvPr id="23" name="TextBox 22"/>
           <p:cNvSpPr txBox="1"/>
           <p:nvPr/>
         </p:nvSpPr>
         <p:spPr>
           <a:xfrm>
-            <a:off x="975207" y="4526280"/>
-            <a:ext cx="2377440" cy="1188720"/>
+            <a:off x="9418320" y="3566160"/>
+            <a:ext cx="2286000" cy="777240"/>
           </a:xfrm>
           <a:prstGeom prst="rect">
             <a:avLst/>
@@ -4700,35 +4985,35 @@
           </a:bodyPr>
           <a:lstStyle/>
           <a:p>
-            <a:pPr algn="l"/>
-            <a:r>
-              <a:rPr sz="2200" b="1">
-                <a:solidFill>
-                  <a:srgbClr val="C8A355"/>
-                </a:solidFill>
-                <a:latin typeface="Calibri"/>
-              </a:rPr>
-              <a:t>Sell it</a:t>
-            </a:r>
-          </a:p>
-        </p:txBody>
-      </p:sp>
-      <p:sp>
-        <p:nvSpPr>
-          <p:cNvPr id="15" name="Rectangle 14"/>
+            <a:pPr algn="ctr"/>
+            <a:r>
+              <a:rPr sz="1200" b="1">
+                <a:solidFill>
+                  <a:srgbClr val="F0F3F7"/>
+                </a:solidFill>
+                <a:latin typeface="Calibri"/>
+              </a:rPr>
+              <a:t>Gemini API</a:t>
+            </a:r>
+          </a:p>
+        </p:txBody>
+      </p:sp>
+      <p:sp>
+        <p:nvSpPr>
+          <p:cNvPr id="24" name="Right Arrow 23"/>
           <p:cNvSpPr/>
           <p:nvPr/>
         </p:nvSpPr>
         <p:spPr>
           <a:xfrm>
-            <a:off x="3398367" y="4754880"/>
-            <a:ext cx="27432" cy="731520"/>
-          </a:xfrm>
-          <a:prstGeom prst="rect">
+            <a:off x="7634607" y="3858768"/>
+            <a:ext cx="1753712" cy="201168"/>
+          </a:xfrm>
+          <a:prstGeom prst="rightArrow">
             <a:avLst/>
           </a:prstGeom>
           <a:solidFill>
-            <a:srgbClr val="C8A355"/>
+            <a:srgbClr val="30D158"/>
           </a:solidFill>
           <a:ln>
             <a:noFill/>
@@ -4758,14 +5043,58 @@
       </p:sp>
       <p:sp>
         <p:nvSpPr>
-          <p:cNvPr id="16" name="TextBox 15"/>
+          <p:cNvPr id="25" name="Rounded Rectangle 24"/>
+          <p:cNvSpPr/>
+          <p:nvPr/>
+        </p:nvSpPr>
+        <p:spPr>
+          <a:xfrm>
+            <a:off x="9418320" y="4709160"/>
+            <a:ext cx="2286000" cy="777240"/>
+          </a:xfrm>
+          <a:prstGeom prst="roundRect">
+            <a:avLst/>
+          </a:prstGeom>
+          <a:solidFill>
+            <a:srgbClr val="121E2F"/>
+          </a:solidFill>
+          <a:ln w="12700">
+            <a:solidFill>
+              <a:srgbClr val="30D158"/>
+            </a:solidFill>
+          </a:ln>
+          <a:effectLst/>
+        </p:spPr>
+        <p:style>
+          <a:lnRef idx="1">
+            <a:schemeClr val="accent1"/>
+          </a:lnRef>
+          <a:fillRef idx="3">
+            <a:schemeClr val="accent1"/>
+          </a:fillRef>
+          <a:effectRef idx="2">
+            <a:schemeClr val="accent1"/>
+          </a:effectRef>
+          <a:fontRef idx="minor">
+            <a:schemeClr val="lt1"/>
+          </a:fontRef>
+        </p:style>
+        <p:txBody>
+          <a:bodyPr rtlCol="0" anchor="ctr"/>
+          <a:lstStyle/>
+          <a:p/>
+        </p:txBody>
+      </p:sp>
+      <p:sp>
+        <p:nvSpPr>
+          <p:cNvPr id="26" name="TextBox 25"/>
           <p:cNvSpPr txBox="1"/>
           <p:nvPr/>
         </p:nvSpPr>
         <p:spPr>
           <a:xfrm>
-            <a:off x="3626967" y="4526280"/>
-            <a:ext cx="7680960" cy="1188720"/>
+            <a:off x="9418320" y="4709160"/>
+            <a:ext cx="2286000" cy="777240"/>
           </a:xfrm>
           <a:prstGeom prst="rect">
             <a:avLst/>
@@ -4778,29 +5107,72 @@
           </a:bodyPr>
           <a:lstStyle/>
           <a:p>
-            <a:pPr algn="l"/>
-            <a:r>
-              <a:rPr sz="1500" b="0">
+            <a:pPr algn="ctr"/>
+            <a:r>
+              <a:rPr sz="1200" b="1">
                 <a:solidFill>
                   <a:srgbClr val="F0F3F7"/>
                 </a:solidFill>
                 <a:latin typeface="Calibri"/>
               </a:rPr>
-              <a:t>A marketplace (Heritage, StockX, 1stDibs) acquires the comp DB + engine as an upgrade to their seller tools.</a:t>
-            </a:r>
-          </a:p>
-        </p:txBody>
-      </p:sp>
-      <p:sp>
-        <p:nvSpPr>
-          <p:cNvPr id="17" name="TextBox 16"/>
+              <a:t>Grok API</a:t>
+            </a:r>
+          </a:p>
+        </p:txBody>
+      </p:sp>
+      <p:sp>
+        <p:nvSpPr>
+          <p:cNvPr id="27" name="Right Arrow 26"/>
+          <p:cNvSpPr/>
+          <p:nvPr/>
+        </p:nvSpPr>
+        <p:spPr>
+          <a:xfrm>
+            <a:off x="7634607" y="5001768"/>
+            <a:ext cx="1753712" cy="201168"/>
+          </a:xfrm>
+          <a:prstGeom prst="rightArrow">
+            <a:avLst/>
+          </a:prstGeom>
+          <a:solidFill>
+            <a:srgbClr val="30D158"/>
+          </a:solidFill>
+          <a:ln>
+            <a:noFill/>
+          </a:ln>
+        </p:spPr>
+        <p:style>
+          <a:lnRef idx="1">
+            <a:schemeClr val="accent1"/>
+          </a:lnRef>
+          <a:fillRef idx="3">
+            <a:schemeClr val="accent1"/>
+          </a:fillRef>
+          <a:effectRef idx="2">
+            <a:schemeClr val="accent1"/>
+          </a:effectRef>
+          <a:fontRef idx="minor">
+            <a:schemeClr val="lt1"/>
+          </a:fontRef>
+        </p:style>
+        <p:txBody>
+          <a:bodyPr rtlCol="0" anchor="ctr"/>
+          <a:lstStyle/>
+          <a:p>
+            <a:pPr algn="ctr"/>
+          </a:p>
+        </p:txBody>
+      </p:sp>
+      <p:sp>
+        <p:nvSpPr>
+          <p:cNvPr id="28" name="TextBox 27"/>
           <p:cNvSpPr txBox="1"/>
           <p:nvPr/>
         </p:nvSpPr>
         <p:spPr>
           <a:xfrm>
-            <a:off x="822960" y="6035040"/>
-            <a:ext cx="10515600" cy="411480"/>
+            <a:off x="4389120" y="4663440"/>
+            <a:ext cx="3383280" cy="365760"/>
           </a:xfrm>
           <a:prstGeom prst="rect">
             <a:avLst/>
@@ -4815,20 +5187,55 @@
           <a:p>
             <a:pPr algn="ctr"/>
             <a:r>
-              <a:rPr sz="1300" b="0">
+              <a:rPr sz="1100" b="0">
                 <a:solidFill>
                   <a:srgbClr val="7A8494"/>
                 </a:solidFill>
                 <a:latin typeface="Calibri"/>
               </a:rPr>
-              <a:t>TAM for collectibles software: ~$400M · growing 12% YoY</a:t>
-            </a:r>
-          </a:p>
-        </p:txBody>
-      </p:sp>
-      <p:sp>
-        <p:nvSpPr>
-          <p:cNvPr id="18" name="TextBox 17"/>
+              <a:t>parallel fan-out · ThreadPoolExecutor</a:t>
+            </a:r>
+          </a:p>
+        </p:txBody>
+      </p:sp>
+      <p:sp>
+        <p:nvSpPr>
+          <p:cNvPr id="29" name="TextBox 28"/>
+          <p:cNvSpPr txBox="1"/>
+          <p:nvPr/>
+        </p:nvSpPr>
+        <p:spPr>
+          <a:xfrm>
+            <a:off x="822960" y="6035040"/>
+            <a:ext cx="10515600" cy="365760"/>
+          </a:xfrm>
+          <a:prstGeom prst="rect">
+            <a:avLst/>
+          </a:prstGeom>
+          <a:noFill/>
+        </p:spPr>
+        <p:txBody>
+          <a:bodyPr wrap="square" lIns="0" rIns="0" tIns="0" bIns="0" anchor="t">
+            <a:spAutoFit/>
+          </a:bodyPr>
+          <a:lstStyle/>
+          <a:p>
+            <a:pPr algn="ctr"/>
+            <a:r>
+              <a:rPr sz="1200" b="0">
+                <a:solidFill>
+                  <a:srgbClr val="7A8494"/>
+                </a:solidFill>
+                <a:latin typeface="Calibri"/>
+              </a:rPr>
+              <a:t>Deployment: Railway + Cron (nightly reindex)  ·  Persistence: JSON + Google Sheets + Railway env vars</a:t>
+            </a:r>
+          </a:p>
+        </p:txBody>
+      </p:sp>
+      <p:sp>
+        <p:nvSpPr>
+          <p:cNvPr id="30" name="TextBox 29"/>
           <p:cNvSpPr txBox="1"/>
           <p:nvPr/>
         </p:nvSpPr>
@@ -4931,8 +5338,1071 @@
         </p:nvSpPr>
         <p:spPr>
           <a:xfrm>
-            <a:off x="5029200" y="1371600"/>
-            <a:ext cx="2103120" cy="73152"/>
+            <a:off x="548640" y="502920"/>
+            <a:ext cx="128016" cy="731520"/>
+          </a:xfrm>
+          <a:prstGeom prst="rect">
+            <a:avLst/>
+          </a:prstGeom>
+          <a:solidFill>
+            <a:srgbClr val="30D158"/>
+          </a:solidFill>
+          <a:ln>
+            <a:noFill/>
+          </a:ln>
+        </p:spPr>
+        <p:style>
+          <a:lnRef idx="1">
+            <a:schemeClr val="accent1"/>
+          </a:lnRef>
+          <a:fillRef idx="3">
+            <a:schemeClr val="accent1"/>
+          </a:fillRef>
+          <a:effectRef idx="2">
+            <a:schemeClr val="accent1"/>
+          </a:effectRef>
+          <a:fontRef idx="minor">
+            <a:schemeClr val="lt1"/>
+          </a:fontRef>
+        </p:style>
+        <p:txBody>
+          <a:bodyPr rtlCol="0" anchor="ctr"/>
+          <a:lstStyle/>
+          <a:p>
+            <a:pPr algn="ctr"/>
+          </a:p>
+        </p:txBody>
+      </p:sp>
+      <p:sp>
+        <p:nvSpPr>
+          <p:cNvPr id="4" name="TextBox 3"/>
+          <p:cNvSpPr txBox="1"/>
+          <p:nvPr/>
+        </p:nvSpPr>
+        <p:spPr>
+          <a:xfrm>
+            <a:off x="822960" y="502920"/>
+            <a:ext cx="10972800" cy="822960"/>
+          </a:xfrm>
+          <a:prstGeom prst="rect">
+            <a:avLst/>
+          </a:prstGeom>
+          <a:noFill/>
+        </p:spPr>
+        <p:txBody>
+          <a:bodyPr wrap="square" lIns="0" rIns="0" tIns="0" bIns="0" anchor="t">
+            <a:spAutoFit/>
+          </a:bodyPr>
+          <a:lstStyle/>
+          <a:p>
+            <a:pPr algn="l"/>
+            <a:r>
+              <a:rPr sz="3600" b="1">
+                <a:solidFill>
+                  <a:srgbClr val="F0F3F7"/>
+                </a:solidFill>
+                <a:latin typeface="Calibri"/>
+              </a:rPr>
+              <a:t>Where we are</a:t>
+            </a:r>
+          </a:p>
+        </p:txBody>
+      </p:sp>
+      <p:sp>
+        <p:nvSpPr>
+          <p:cNvPr id="5" name="Rounded Rectangle 4"/>
+          <p:cNvSpPr/>
+          <p:nvPr/>
+        </p:nvSpPr>
+        <p:spPr>
+          <a:xfrm>
+            <a:off x="472287" y="1828800"/>
+            <a:ext cx="2606040" cy="2926080"/>
+          </a:xfrm>
+          <a:prstGeom prst="roundRect">
+            <a:avLst/>
+          </a:prstGeom>
+          <a:solidFill>
+            <a:srgbClr val="121E2F"/>
+          </a:solidFill>
+          <a:ln w="12700">
+            <a:solidFill>
+              <a:srgbClr val="C8A355"/>
+            </a:solidFill>
+          </a:ln>
+          <a:effectLst/>
+        </p:spPr>
+        <p:style>
+          <a:lnRef idx="1">
+            <a:schemeClr val="accent1"/>
+          </a:lnRef>
+          <a:fillRef idx="3">
+            <a:schemeClr val="accent1"/>
+          </a:fillRef>
+          <a:effectRef idx="2">
+            <a:schemeClr val="accent1"/>
+          </a:effectRef>
+          <a:fontRef idx="minor">
+            <a:schemeClr val="lt1"/>
+          </a:fontRef>
+        </p:style>
+        <p:txBody>
+          <a:bodyPr rtlCol="0" anchor="ctr"/>
+          <a:lstStyle/>
+          <a:p/>
+        </p:txBody>
+      </p:sp>
+      <p:sp>
+        <p:nvSpPr>
+          <p:cNvPr id="6" name="TextBox 5"/>
+          <p:cNvSpPr txBox="1"/>
+          <p:nvPr/>
+        </p:nvSpPr>
+        <p:spPr>
+          <a:xfrm>
+            <a:off x="472287" y="2148840"/>
+            <a:ext cx="2606040" cy="1280160"/>
+          </a:xfrm>
+          <a:prstGeom prst="rect">
+            <a:avLst/>
+          </a:prstGeom>
+          <a:noFill/>
+        </p:spPr>
+        <p:txBody>
+          <a:bodyPr wrap="square" lIns="0" rIns="0" tIns="0" bIns="0" anchor="ctr">
+            <a:spAutoFit/>
+          </a:bodyPr>
+          <a:lstStyle/>
+          <a:p>
+            <a:pPr algn="ctr"/>
+            <a:r>
+              <a:rPr sz="5000" b="1">
+                <a:solidFill>
+                  <a:srgbClr val="C8A355"/>
+                </a:solidFill>
+                <a:latin typeface="Calibri"/>
+              </a:rPr>
+              <a:t>54,000+</a:t>
+            </a:r>
+          </a:p>
+        </p:txBody>
+      </p:sp>
+      <p:sp>
+        <p:nvSpPr>
+          <p:cNvPr id="7" name="TextBox 6"/>
+          <p:cNvSpPr txBox="1"/>
+          <p:nvPr/>
+        </p:nvSpPr>
+        <p:spPr>
+          <a:xfrm>
+            <a:off x="655167" y="3520440"/>
+            <a:ext cx="2240280" cy="1188720"/>
+          </a:xfrm>
+          <a:prstGeom prst="rect">
+            <a:avLst/>
+          </a:prstGeom>
+          <a:noFill/>
+        </p:spPr>
+        <p:txBody>
+          <a:bodyPr wrap="square" lIns="0" rIns="0" tIns="0" bIns="0" anchor="t">
+            <a:spAutoFit/>
+          </a:bodyPr>
+          <a:lstStyle/>
+          <a:p>
+            <a:pPr algn="ctr"/>
+            <a:r>
+              <a:rPr sz="1300" b="0">
+                <a:solidFill>
+                  <a:srgbClr val="F0F3F7"/>
+                </a:solidFill>
+                <a:latin typeface="Calibri"/>
+              </a:rPr>
+              <a:t>records in comp DB</a:t>
+            </a:r>
+          </a:p>
+        </p:txBody>
+      </p:sp>
+      <p:sp>
+        <p:nvSpPr>
+          <p:cNvPr id="8" name="Rounded Rectangle 7"/>
+          <p:cNvSpPr/>
+          <p:nvPr/>
+        </p:nvSpPr>
+        <p:spPr>
+          <a:xfrm>
+            <a:off x="3352647" y="1828800"/>
+            <a:ext cx="2606040" cy="2926080"/>
+          </a:xfrm>
+          <a:prstGeom prst="roundRect">
+            <a:avLst/>
+          </a:prstGeom>
+          <a:solidFill>
+            <a:srgbClr val="121E2F"/>
+          </a:solidFill>
+          <a:ln w="12700">
+            <a:solidFill>
+              <a:srgbClr val="4A9EFF"/>
+            </a:solidFill>
+          </a:ln>
+          <a:effectLst/>
+        </p:spPr>
+        <p:style>
+          <a:lnRef idx="1">
+            <a:schemeClr val="accent1"/>
+          </a:lnRef>
+          <a:fillRef idx="3">
+            <a:schemeClr val="accent1"/>
+          </a:fillRef>
+          <a:effectRef idx="2">
+            <a:schemeClr val="accent1"/>
+          </a:effectRef>
+          <a:fontRef idx="minor">
+            <a:schemeClr val="lt1"/>
+          </a:fontRef>
+        </p:style>
+        <p:txBody>
+          <a:bodyPr rtlCol="0" anchor="ctr"/>
+          <a:lstStyle/>
+          <a:p/>
+        </p:txBody>
+      </p:sp>
+      <p:sp>
+        <p:nvSpPr>
+          <p:cNvPr id="9" name="TextBox 8"/>
+          <p:cNvSpPr txBox="1"/>
+          <p:nvPr/>
+        </p:nvSpPr>
+        <p:spPr>
+          <a:xfrm>
+            <a:off x="3352647" y="2148840"/>
+            <a:ext cx="2606040" cy="1280160"/>
+          </a:xfrm>
+          <a:prstGeom prst="rect">
+            <a:avLst/>
+          </a:prstGeom>
+          <a:noFill/>
+        </p:spPr>
+        <p:txBody>
+          <a:bodyPr wrap="square" lIns="0" rIns="0" tIns="0" bIns="0" anchor="ctr">
+            <a:spAutoFit/>
+          </a:bodyPr>
+          <a:lstStyle/>
+          <a:p>
+            <a:pPr algn="ctr"/>
+            <a:r>
+              <a:rPr sz="5000" b="1">
+                <a:solidFill>
+                  <a:srgbClr val="4A9EFF"/>
+                </a:solidFill>
+                <a:latin typeface="Calibri"/>
+              </a:rPr>
+              <a:t>~200</a:t>
+            </a:r>
+          </a:p>
+        </p:txBody>
+      </p:sp>
+      <p:sp>
+        <p:nvSpPr>
+          <p:cNvPr id="10" name="TextBox 9"/>
+          <p:cNvSpPr txBox="1"/>
+          <p:nvPr/>
+        </p:nvSpPr>
+        <p:spPr>
+          <a:xfrm>
+            <a:off x="3535527" y="3520440"/>
+            <a:ext cx="2240280" cy="1188720"/>
+          </a:xfrm>
+          <a:prstGeom prst="rect">
+            <a:avLst/>
+          </a:prstGeom>
+          <a:noFill/>
+        </p:spPr>
+        <p:txBody>
+          <a:bodyPr wrap="square" lIns="0" rIns="0" tIns="0" bIns="0" anchor="t">
+            <a:spAutoFit/>
+          </a:bodyPr>
+          <a:lstStyle/>
+          <a:p>
+            <a:pPr algn="ctr"/>
+            <a:r>
+              <a:rPr sz="1300" b="0">
+                <a:solidFill>
+                  <a:srgbClr val="F0F3F7"/>
+                </a:solidFill>
+                <a:latin typeface="Calibri"/>
+              </a:rPr>
+              <a:t>active eBay listings</a:t>
+            </a:r>
+          </a:p>
+          <a:p>
+            <a:pPr algn="ctr"/>
+            <a:r>
+              <a:rPr sz="1300" b="0">
+                <a:solidFill>
+                  <a:srgbClr val="F0F3F7"/>
+                </a:solidFill>
+                <a:latin typeface="Calibri"/>
+              </a:rPr>
+              <a:t>under management</a:t>
+            </a:r>
+          </a:p>
+        </p:txBody>
+      </p:sp>
+      <p:sp>
+        <p:nvSpPr>
+          <p:cNvPr id="11" name="Rounded Rectangle 10"/>
+          <p:cNvSpPr/>
+          <p:nvPr/>
+        </p:nvSpPr>
+        <p:spPr>
+          <a:xfrm>
+            <a:off x="6233007" y="1828800"/>
+            <a:ext cx="2606040" cy="2926080"/>
+          </a:xfrm>
+          <a:prstGeom prst="roundRect">
+            <a:avLst/>
+          </a:prstGeom>
+          <a:solidFill>
+            <a:srgbClr val="121E2F"/>
+          </a:solidFill>
+          <a:ln w="12700">
+            <a:solidFill>
+              <a:srgbClr val="30D158"/>
+            </a:solidFill>
+          </a:ln>
+          <a:effectLst/>
+        </p:spPr>
+        <p:style>
+          <a:lnRef idx="1">
+            <a:schemeClr val="accent1"/>
+          </a:lnRef>
+          <a:fillRef idx="3">
+            <a:schemeClr val="accent1"/>
+          </a:fillRef>
+          <a:effectRef idx="2">
+            <a:schemeClr val="accent1"/>
+          </a:effectRef>
+          <a:fontRef idx="minor">
+            <a:schemeClr val="lt1"/>
+          </a:fontRef>
+        </p:style>
+        <p:txBody>
+          <a:bodyPr rtlCol="0" anchor="ctr"/>
+          <a:lstStyle/>
+          <a:p/>
+        </p:txBody>
+      </p:sp>
+      <p:sp>
+        <p:nvSpPr>
+          <p:cNvPr id="12" name="TextBox 11"/>
+          <p:cNvSpPr txBox="1"/>
+          <p:nvPr/>
+        </p:nvSpPr>
+        <p:spPr>
+          <a:xfrm>
+            <a:off x="6233007" y="2148840"/>
+            <a:ext cx="2606040" cy="1280160"/>
+          </a:xfrm>
+          <a:prstGeom prst="rect">
+            <a:avLst/>
+          </a:prstGeom>
+          <a:noFill/>
+        </p:spPr>
+        <p:txBody>
+          <a:bodyPr wrap="square" lIns="0" rIns="0" tIns="0" bIns="0" anchor="ctr">
+            <a:spAutoFit/>
+          </a:bodyPr>
+          <a:lstStyle/>
+          <a:p>
+            <a:pPr algn="ctr"/>
+            <a:r>
+              <a:rPr sz="5000" b="1">
+                <a:solidFill>
+                  <a:srgbClr val="30D158"/>
+                </a:solidFill>
+                <a:latin typeface="Calibri"/>
+              </a:rPr>
+              <a:t>3 of 4</a:t>
+            </a:r>
+          </a:p>
+        </p:txBody>
+      </p:sp>
+      <p:sp>
+        <p:nvSpPr>
+          <p:cNvPr id="13" name="TextBox 12"/>
+          <p:cNvSpPr txBox="1"/>
+          <p:nvPr/>
+        </p:nvSpPr>
+        <p:spPr>
+          <a:xfrm>
+            <a:off x="6415887" y="3520440"/>
+            <a:ext cx="2240280" cy="1188720"/>
+          </a:xfrm>
+          <a:prstGeom prst="rect">
+            <a:avLst/>
+          </a:prstGeom>
+          <a:noFill/>
+        </p:spPr>
+        <p:txBody>
+          <a:bodyPr wrap="square" lIns="0" rIns="0" tIns="0" bIns="0" anchor="t">
+            <a:spAutoFit/>
+          </a:bodyPr>
+          <a:lstStyle/>
+          <a:p>
+            <a:pPr algn="ctr"/>
+            <a:r>
+              <a:rPr sz="1300" b="0">
+                <a:solidFill>
+                  <a:srgbClr val="F0F3F7"/>
+                </a:solidFill>
+                <a:latin typeface="Calibri"/>
+              </a:rPr>
+              <a:t>LLMs live</a:t>
+            </a:r>
+          </a:p>
+          <a:p>
+            <a:pPr algn="ctr"/>
+            <a:r>
+              <a:rPr sz="1300" b="0">
+                <a:solidFill>
+                  <a:srgbClr val="F0F3F7"/>
+                </a:solidFill>
+                <a:latin typeface="Calibri"/>
+              </a:rPr>
+              <a:t>Claude · GPT-4o · Gemini</a:t>
+            </a:r>
+          </a:p>
+          <a:p>
+            <a:pPr algn="ctr"/>
+            <a:r>
+              <a:rPr sz="1300" b="0">
+                <a:solidFill>
+                  <a:srgbClr val="F0F3F7"/>
+                </a:solidFill>
+                <a:latin typeface="Calibri"/>
+              </a:rPr>
+              <a:t>Grok pending env var</a:t>
+            </a:r>
+          </a:p>
+        </p:txBody>
+      </p:sp>
+      <p:sp>
+        <p:nvSpPr>
+          <p:cNvPr id="14" name="Rounded Rectangle 13"/>
+          <p:cNvSpPr/>
+          <p:nvPr/>
+        </p:nvSpPr>
+        <p:spPr>
+          <a:xfrm>
+            <a:off x="9113367" y="1828800"/>
+            <a:ext cx="2606040" cy="2926080"/>
+          </a:xfrm>
+          <a:prstGeom prst="roundRect">
+            <a:avLst/>
+          </a:prstGeom>
+          <a:solidFill>
+            <a:srgbClr val="121E2F"/>
+          </a:solidFill>
+          <a:ln w="12700">
+            <a:solidFill>
+              <a:srgbClr val="4A9EFF"/>
+            </a:solidFill>
+          </a:ln>
+          <a:effectLst/>
+        </p:spPr>
+        <p:style>
+          <a:lnRef idx="1">
+            <a:schemeClr val="accent1"/>
+          </a:lnRef>
+          <a:fillRef idx="3">
+            <a:schemeClr val="accent1"/>
+          </a:fillRef>
+          <a:effectRef idx="2">
+            <a:schemeClr val="accent1"/>
+          </a:effectRef>
+          <a:fontRef idx="minor">
+            <a:schemeClr val="lt1"/>
+          </a:fontRef>
+        </p:style>
+        <p:txBody>
+          <a:bodyPr rtlCol="0" anchor="ctr"/>
+          <a:lstStyle/>
+          <a:p/>
+        </p:txBody>
+      </p:sp>
+      <p:sp>
+        <p:nvSpPr>
+          <p:cNvPr id="15" name="TextBox 14"/>
+          <p:cNvSpPr txBox="1"/>
+          <p:nvPr/>
+        </p:nvSpPr>
+        <p:spPr>
+          <a:xfrm>
+            <a:off x="9113367" y="2148840"/>
+            <a:ext cx="2606040" cy="1280160"/>
+          </a:xfrm>
+          <a:prstGeom prst="rect">
+            <a:avLst/>
+          </a:prstGeom>
+          <a:noFill/>
+        </p:spPr>
+        <p:txBody>
+          <a:bodyPr wrap="square" lIns="0" rIns="0" tIns="0" bIns="0" anchor="ctr">
+            <a:spAutoFit/>
+          </a:bodyPr>
+          <a:lstStyle/>
+          <a:p>
+            <a:pPr algn="ctr"/>
+            <a:r>
+              <a:rPr sz="5000" b="1">
+                <a:solidFill>
+                  <a:srgbClr val="4A9EFF"/>
+                </a:solidFill>
+                <a:latin typeface="Calibri"/>
+              </a:rPr>
+              <a:t>&lt;2s</a:t>
+            </a:r>
+          </a:p>
+        </p:txBody>
+      </p:sp>
+      <p:sp>
+        <p:nvSpPr>
+          <p:cNvPr id="16" name="TextBox 15"/>
+          <p:cNvSpPr txBox="1"/>
+          <p:nvPr/>
+        </p:nvSpPr>
+        <p:spPr>
+          <a:xfrm>
+            <a:off x="9296247" y="3520440"/>
+            <a:ext cx="2240280" cy="1188720"/>
+          </a:xfrm>
+          <a:prstGeom prst="rect">
+            <a:avLst/>
+          </a:prstGeom>
+          <a:noFill/>
+        </p:spPr>
+        <p:txBody>
+          <a:bodyPr wrap="square" lIns="0" rIns="0" tIns="0" bIns="0" anchor="t">
+            <a:spAutoFit/>
+          </a:bodyPr>
+          <a:lstStyle/>
+          <a:p>
+            <a:pPr algn="ctr"/>
+            <a:r>
+              <a:rPr sz="1300" b="0">
+                <a:solidFill>
+                  <a:srgbClr val="F0F3F7"/>
+                </a:solidFill>
+                <a:latin typeface="Calibri"/>
+              </a:rPr>
+              <a:t>wall clock</a:t>
+            </a:r>
+          </a:p>
+          <a:p>
+            <a:pPr algn="ctr"/>
+            <a:r>
+              <a:rPr sz="1300" b="0">
+                <a:solidFill>
+                  <a:srgbClr val="F0F3F7"/>
+                </a:solidFill>
+                <a:latin typeface="Calibri"/>
+              </a:rPr>
+              <a:t>3-LLM fan-out</a:t>
+            </a:r>
+          </a:p>
+        </p:txBody>
+      </p:sp>
+      <p:sp>
+        <p:nvSpPr>
+          <p:cNvPr id="17" name="TextBox 16"/>
+          <p:cNvSpPr txBox="1"/>
+          <p:nvPr/>
+        </p:nvSpPr>
+        <p:spPr>
+          <a:xfrm>
+            <a:off x="822960" y="5257800"/>
+            <a:ext cx="10515600" cy="411480"/>
+          </a:xfrm>
+          <a:prstGeom prst="rect">
+            <a:avLst/>
+          </a:prstGeom>
+          <a:noFill/>
+        </p:spPr>
+        <p:txBody>
+          <a:bodyPr wrap="square" lIns="0" rIns="0" tIns="0" bIns="0" anchor="t">
+            <a:spAutoFit/>
+          </a:bodyPr>
+          <a:lstStyle/>
+          <a:p>
+            <a:pPr algn="ctr"/>
+            <a:r>
+              <a:rPr sz="1600" b="1">
+                <a:solidFill>
+                  <a:srgbClr val="C8A355"/>
+                </a:solidFill>
+                <a:latin typeface="Calibri"/>
+              </a:rPr>
+              <a:t>Deployed live at web-production-15df7.up.railway.app</a:t>
+            </a:r>
+          </a:p>
+        </p:txBody>
+      </p:sp>
+      <p:sp>
+        <p:nvSpPr>
+          <p:cNvPr id="18" name="TextBox 17"/>
+          <p:cNvSpPr txBox="1"/>
+          <p:nvPr/>
+        </p:nvSpPr>
+        <p:spPr>
+          <a:xfrm>
+            <a:off x="822960" y="5715000"/>
+            <a:ext cx="10515600" cy="365760"/>
+          </a:xfrm>
+          <a:prstGeom prst="rect">
+            <a:avLst/>
+          </a:prstGeom>
+          <a:noFill/>
+        </p:spPr>
+        <p:txBody>
+          <a:bodyPr wrap="square" lIns="0" rIns="0" tIns="0" bIns="0" anchor="t">
+            <a:spAutoFit/>
+          </a:bodyPr>
+          <a:lstStyle/>
+          <a:p>
+            <a:pPr algn="ctr"/>
+            <a:r>
+              <a:rPr sz="1300" b="0">
+                <a:solidFill>
+                  <a:srgbClr val="7A8494"/>
+                </a:solidFill>
+                <a:latin typeface="Calibri"/>
+              </a:rPr>
+              <a:t>Railway auto-deploy  ·  Nightly comp re-index cron</a:t>
+            </a:r>
+          </a:p>
+        </p:txBody>
+      </p:sp>
+      <p:sp>
+        <p:nvSpPr>
+          <p:cNvPr id="19" name="TextBox 18"/>
+          <p:cNvSpPr txBox="1"/>
+          <p:nvPr/>
+        </p:nvSpPr>
+        <p:spPr>
+          <a:xfrm>
+            <a:off x="10698480" y="6537960"/>
+            <a:ext cx="1371600" cy="274320"/>
+          </a:xfrm>
+          <a:prstGeom prst="rect">
+            <a:avLst/>
+          </a:prstGeom>
+          <a:noFill/>
+        </p:spPr>
+        <p:txBody>
+          <a:bodyPr wrap="square" lIns="0" rIns="0" tIns="0" bIns="0" anchor="t">
+            <a:spAutoFit/>
+          </a:bodyPr>
+          <a:lstStyle/>
+          <a:p>
+            <a:pPr algn="r"/>
+            <a:r>
+              <a:rPr sz="900" b="0">
+                <a:solidFill>
+                  <a:srgbClr val="505A6A"/>
+                </a:solidFill>
+                <a:latin typeface="Calibri"/>
+              </a:rPr>
+              <a:t>DATARADAR</a:t>
+            </a:r>
+          </a:p>
+        </p:txBody>
+      </p:sp>
+    </p:spTree>
+  </p:cSld>
+  <p:clrMapOvr>
+    <a:masterClrMapping/>
+  </p:clrMapOvr>
+</p:sld>
+</file>
+
+<file path=ppt/slides/slide13.xml><?xml version="1.0" encoding="utf-8"?>
+<p:sld xmlns:a="http://schemas.openxmlformats.org/drawingml/2006/main" xmlns:p="http://schemas.openxmlformats.org/presentationml/2006/main" xmlns:r="http://schemas.openxmlformats.org/officeDocument/2006/relationships">
+  <p:cSld>
+    <p:spTree>
+      <p:nvGrpSpPr>
+        <p:cNvPr id="1" name=""/>
+        <p:cNvGrpSpPr/>
+        <p:nvPr/>
+      </p:nvGrpSpPr>
+      <p:grpSpPr/>
+      <p:sp>
+        <p:nvSpPr>
+          <p:cNvPr id="2" name="Rectangle 1"/>
+          <p:cNvSpPr/>
+          <p:nvPr/>
+        </p:nvSpPr>
+        <p:spPr>
+          <a:xfrm>
+            <a:off x="0" y="0"/>
+            <a:ext cx="12191695" cy="6858000"/>
+          </a:xfrm>
+          <a:prstGeom prst="rect">
+            <a:avLst/>
+          </a:prstGeom>
+          <a:solidFill>
+            <a:srgbClr val="0B1420"/>
+          </a:solidFill>
+          <a:ln>
+            <a:noFill/>
+          </a:ln>
+          <a:effectLst/>
+        </p:spPr>
+        <p:style>
+          <a:lnRef idx="1">
+            <a:schemeClr val="accent1"/>
+          </a:lnRef>
+          <a:fillRef idx="3">
+            <a:schemeClr val="accent1"/>
+          </a:fillRef>
+          <a:effectRef idx="2">
+            <a:schemeClr val="accent1"/>
+          </a:effectRef>
+          <a:fontRef idx="minor">
+            <a:schemeClr val="lt1"/>
+          </a:fontRef>
+        </p:style>
+        <p:txBody>
+          <a:bodyPr rtlCol="0" anchor="ctr"/>
+          <a:lstStyle/>
+          <a:p>
+            <a:pPr algn="ctr"/>
+          </a:p>
+        </p:txBody>
+      </p:sp>
+      <p:sp>
+        <p:nvSpPr>
+          <p:cNvPr id="3" name="Rectangle 2"/>
+          <p:cNvSpPr/>
+          <p:nvPr/>
+        </p:nvSpPr>
+        <p:spPr>
+          <a:xfrm>
+            <a:off x="548640" y="502920"/>
+            <a:ext cx="128016" cy="731520"/>
+          </a:xfrm>
+          <a:prstGeom prst="rect">
+            <a:avLst/>
+          </a:prstGeom>
+          <a:solidFill>
+            <a:srgbClr val="C8A355"/>
+          </a:solidFill>
+          <a:ln>
+            <a:noFill/>
+          </a:ln>
+        </p:spPr>
+        <p:style>
+          <a:lnRef idx="1">
+            <a:schemeClr val="accent1"/>
+          </a:lnRef>
+          <a:fillRef idx="3">
+            <a:schemeClr val="accent1"/>
+          </a:fillRef>
+          <a:effectRef idx="2">
+            <a:schemeClr val="accent1"/>
+          </a:effectRef>
+          <a:fontRef idx="minor">
+            <a:schemeClr val="lt1"/>
+          </a:fontRef>
+        </p:style>
+        <p:txBody>
+          <a:bodyPr rtlCol="0" anchor="ctr"/>
+          <a:lstStyle/>
+          <a:p>
+            <a:pPr algn="ctr"/>
+          </a:p>
+        </p:txBody>
+      </p:sp>
+      <p:sp>
+        <p:nvSpPr>
+          <p:cNvPr id="4" name="TextBox 3"/>
+          <p:cNvSpPr txBox="1"/>
+          <p:nvPr/>
+        </p:nvSpPr>
+        <p:spPr>
+          <a:xfrm>
+            <a:off x="822960" y="502920"/>
+            <a:ext cx="10972800" cy="822960"/>
+          </a:xfrm>
+          <a:prstGeom prst="rect">
+            <a:avLst/>
+          </a:prstGeom>
+          <a:noFill/>
+        </p:spPr>
+        <p:txBody>
+          <a:bodyPr wrap="square" lIns="0" rIns="0" tIns="0" bIns="0" anchor="t">
+            <a:spAutoFit/>
+          </a:bodyPr>
+          <a:lstStyle/>
+          <a:p>
+            <a:pPr algn="l"/>
+            <a:r>
+              <a:rPr sz="3600" b="1">
+                <a:solidFill>
+                  <a:srgbClr val="F0F3F7"/>
+                </a:solidFill>
+                <a:latin typeface="Calibri"/>
+              </a:rPr>
+              <a:t>Strategic options</a:t>
+            </a:r>
+          </a:p>
+        </p:txBody>
+      </p:sp>
+      <p:sp>
+        <p:nvSpPr>
+          <p:cNvPr id="5" name="Rounded Rectangle 4"/>
+          <p:cNvSpPr/>
+          <p:nvPr/>
+        </p:nvSpPr>
+        <p:spPr>
+          <a:xfrm>
+            <a:off x="609447" y="1691640"/>
+            <a:ext cx="10972800" cy="1188720"/>
+          </a:xfrm>
+          <a:prstGeom prst="roundRect">
+            <a:avLst/>
+          </a:prstGeom>
+          <a:solidFill>
+            <a:srgbClr val="121E2F"/>
+          </a:solidFill>
+          <a:ln w="12700">
+            <a:solidFill>
+              <a:srgbClr val="30D158"/>
+            </a:solidFill>
+          </a:ln>
+          <a:effectLst/>
+        </p:spPr>
+        <p:style>
+          <a:lnRef idx="1">
+            <a:schemeClr val="accent1"/>
+          </a:lnRef>
+          <a:fillRef idx="3">
+            <a:schemeClr val="accent1"/>
+          </a:fillRef>
+          <a:effectRef idx="2">
+            <a:schemeClr val="accent1"/>
+          </a:effectRef>
+          <a:fontRef idx="minor">
+            <a:schemeClr val="lt1"/>
+          </a:fontRef>
+        </p:style>
+        <p:txBody>
+          <a:bodyPr rtlCol="0" anchor="ctr"/>
+          <a:lstStyle/>
+          <a:p/>
+        </p:txBody>
+      </p:sp>
+      <p:sp>
+        <p:nvSpPr>
+          <p:cNvPr id="6" name="TextBox 5"/>
+          <p:cNvSpPr txBox="1"/>
+          <p:nvPr/>
+        </p:nvSpPr>
+        <p:spPr>
+          <a:xfrm>
+            <a:off x="975207" y="1691640"/>
+            <a:ext cx="2377440" cy="1188720"/>
+          </a:xfrm>
+          <a:prstGeom prst="rect">
+            <a:avLst/>
+          </a:prstGeom>
+          <a:noFill/>
+        </p:spPr>
+        <p:txBody>
+          <a:bodyPr wrap="square" lIns="0" rIns="0" tIns="0" bIns="0" anchor="ctr">
+            <a:spAutoFit/>
+          </a:bodyPr>
+          <a:lstStyle/>
+          <a:p>
+            <a:pPr algn="l"/>
+            <a:r>
+              <a:rPr sz="2400" b="1">
+                <a:solidFill>
+                  <a:srgbClr val="30D158"/>
+                </a:solidFill>
+                <a:latin typeface="Calibri"/>
+              </a:rPr>
+              <a:t>OWN</a:t>
+            </a:r>
+          </a:p>
+        </p:txBody>
+      </p:sp>
+      <p:sp>
+        <p:nvSpPr>
+          <p:cNvPr id="7" name="Rectangle 6"/>
+          <p:cNvSpPr/>
+          <p:nvPr/>
+        </p:nvSpPr>
+        <p:spPr>
+          <a:xfrm>
+            <a:off x="3398367" y="1920240"/>
+            <a:ext cx="27432" cy="731520"/>
+          </a:xfrm>
+          <a:prstGeom prst="rect">
+            <a:avLst/>
+          </a:prstGeom>
+          <a:solidFill>
+            <a:srgbClr val="30D158"/>
+          </a:solidFill>
+          <a:ln>
+            <a:noFill/>
+          </a:ln>
+        </p:spPr>
+        <p:style>
+          <a:lnRef idx="1">
+            <a:schemeClr val="accent1"/>
+          </a:lnRef>
+          <a:fillRef idx="3">
+            <a:schemeClr val="accent1"/>
+          </a:fillRef>
+          <a:effectRef idx="2">
+            <a:schemeClr val="accent1"/>
+          </a:effectRef>
+          <a:fontRef idx="minor">
+            <a:schemeClr val="lt1"/>
+          </a:fontRef>
+        </p:style>
+        <p:txBody>
+          <a:bodyPr rtlCol="0" anchor="ctr"/>
+          <a:lstStyle/>
+          <a:p>
+            <a:pPr algn="ctr"/>
+          </a:p>
+        </p:txBody>
+      </p:sp>
+      <p:sp>
+        <p:nvSpPr>
+          <p:cNvPr id="8" name="TextBox 7"/>
+          <p:cNvSpPr txBox="1"/>
+          <p:nvPr/>
+        </p:nvSpPr>
+        <p:spPr>
+          <a:xfrm>
+            <a:off x="3626967" y="1691640"/>
+            <a:ext cx="7680960" cy="1188720"/>
+          </a:xfrm>
+          <a:prstGeom prst="rect">
+            <a:avLst/>
+          </a:prstGeom>
+          <a:noFill/>
+        </p:spPr>
+        <p:txBody>
+          <a:bodyPr wrap="square" lIns="0" rIns="0" tIns="0" bIns="0" anchor="ctr">
+            <a:spAutoFit/>
+          </a:bodyPr>
+          <a:lstStyle/>
+          <a:p>
+            <a:pPr algn="l"/>
+            <a:r>
+              <a:rPr sz="1500" b="0">
+                <a:solidFill>
+                  <a:srgbClr val="F0F3F7"/>
+                </a:solidFill>
+                <a:latin typeface="Calibri"/>
+              </a:rPr>
+              <a:t>Private moat driving Gauntlet Gallery margin — no one else has this pricing stack.</a:t>
+            </a:r>
+          </a:p>
+        </p:txBody>
+      </p:sp>
+      <p:sp>
+        <p:nvSpPr>
+          <p:cNvPr id="9" name="Rounded Rectangle 8"/>
+          <p:cNvSpPr/>
+          <p:nvPr/>
+        </p:nvSpPr>
+        <p:spPr>
+          <a:xfrm>
+            <a:off x="609447" y="3108960"/>
+            <a:ext cx="10972800" cy="1188720"/>
+          </a:xfrm>
+          <a:prstGeom prst="roundRect">
+            <a:avLst/>
+          </a:prstGeom>
+          <a:solidFill>
+            <a:srgbClr val="121E2F"/>
+          </a:solidFill>
+          <a:ln w="12700">
+            <a:solidFill>
+              <a:srgbClr val="4A9EFF"/>
+            </a:solidFill>
+          </a:ln>
+          <a:effectLst/>
+        </p:spPr>
+        <p:style>
+          <a:lnRef idx="1">
+            <a:schemeClr val="accent1"/>
+          </a:lnRef>
+          <a:fillRef idx="3">
+            <a:schemeClr val="accent1"/>
+          </a:fillRef>
+          <a:effectRef idx="2">
+            <a:schemeClr val="accent1"/>
+          </a:effectRef>
+          <a:fontRef idx="minor">
+            <a:schemeClr val="lt1"/>
+          </a:fontRef>
+        </p:style>
+        <p:txBody>
+          <a:bodyPr rtlCol="0" anchor="ctr"/>
+          <a:lstStyle/>
+          <a:p/>
+        </p:txBody>
+      </p:sp>
+      <p:sp>
+        <p:nvSpPr>
+          <p:cNvPr id="10" name="TextBox 9"/>
+          <p:cNvSpPr txBox="1"/>
+          <p:nvPr/>
+        </p:nvSpPr>
+        <p:spPr>
+          <a:xfrm>
+            <a:off x="975207" y="3108960"/>
+            <a:ext cx="2377440" cy="1188720"/>
+          </a:xfrm>
+          <a:prstGeom prst="rect">
+            <a:avLst/>
+          </a:prstGeom>
+          <a:noFill/>
+        </p:spPr>
+        <p:txBody>
+          <a:bodyPr wrap="square" lIns="0" rIns="0" tIns="0" bIns="0" anchor="ctr">
+            <a:spAutoFit/>
+          </a:bodyPr>
+          <a:lstStyle/>
+          <a:p>
+            <a:pPr algn="l"/>
+            <a:r>
+              <a:rPr sz="2400" b="1">
+                <a:solidFill>
+                  <a:srgbClr val="4A9EFF"/>
+                </a:solidFill>
+                <a:latin typeface="Calibri"/>
+              </a:rPr>
+              <a:t>LICENSE</a:t>
+            </a:r>
+          </a:p>
+        </p:txBody>
+      </p:sp>
+      <p:sp>
+        <p:nvSpPr>
+          <p:cNvPr id="11" name="Rectangle 10"/>
+          <p:cNvSpPr/>
+          <p:nvPr/>
+        </p:nvSpPr>
+        <p:spPr>
+          <a:xfrm>
+            <a:off x="3398367" y="3337560"/>
+            <a:ext cx="27432" cy="731520"/>
           </a:xfrm>
           <a:prstGeom prst="rect">
             <a:avLst/>
@@ -4968,6 +6438,373 @@
       </p:sp>
       <p:sp>
         <p:nvSpPr>
+          <p:cNvPr id="12" name="TextBox 11"/>
+          <p:cNvSpPr txBox="1"/>
+          <p:nvPr/>
+        </p:nvSpPr>
+        <p:spPr>
+          <a:xfrm>
+            <a:off x="3626967" y="3108960"/>
+            <a:ext cx="7680960" cy="1188720"/>
+          </a:xfrm>
+          <a:prstGeom prst="rect">
+            <a:avLst/>
+          </a:prstGeom>
+          <a:noFill/>
+        </p:spPr>
+        <p:txBody>
+          <a:bodyPr wrap="square" lIns="0" rIns="0" tIns="0" bIns="0" anchor="ctr">
+            <a:spAutoFit/>
+          </a:bodyPr>
+          <a:lstStyle/>
+          <a:p>
+            <a:pPr algn="l"/>
+            <a:r>
+              <a:rPr sz="1500" b="0">
+                <a:solidFill>
+                  <a:srgbClr val="F0F3F7"/>
+                </a:solidFill>
+                <a:latin typeface="Calibri"/>
+              </a:rPr>
+              <a:t>$99–299/mo SaaS for other high-volume art resellers  ·  100 subs × $99 ≈ $119k ARR.</a:t>
+            </a:r>
+          </a:p>
+        </p:txBody>
+      </p:sp>
+      <p:sp>
+        <p:nvSpPr>
+          <p:cNvPr id="13" name="Rounded Rectangle 12"/>
+          <p:cNvSpPr/>
+          <p:nvPr/>
+        </p:nvSpPr>
+        <p:spPr>
+          <a:xfrm>
+            <a:off x="609447" y="4526280"/>
+            <a:ext cx="10972800" cy="1188720"/>
+          </a:xfrm>
+          <a:prstGeom prst="roundRect">
+            <a:avLst/>
+          </a:prstGeom>
+          <a:solidFill>
+            <a:srgbClr val="121E2F"/>
+          </a:solidFill>
+          <a:ln w="12700">
+            <a:solidFill>
+              <a:srgbClr val="C8A355"/>
+            </a:solidFill>
+          </a:ln>
+          <a:effectLst/>
+        </p:spPr>
+        <p:style>
+          <a:lnRef idx="1">
+            <a:schemeClr val="accent1"/>
+          </a:lnRef>
+          <a:fillRef idx="3">
+            <a:schemeClr val="accent1"/>
+          </a:fillRef>
+          <a:effectRef idx="2">
+            <a:schemeClr val="accent1"/>
+          </a:effectRef>
+          <a:fontRef idx="minor">
+            <a:schemeClr val="lt1"/>
+          </a:fontRef>
+        </p:style>
+        <p:txBody>
+          <a:bodyPr rtlCol="0" anchor="ctr"/>
+          <a:lstStyle/>
+          <a:p/>
+        </p:txBody>
+      </p:sp>
+      <p:sp>
+        <p:nvSpPr>
+          <p:cNvPr id="14" name="TextBox 13"/>
+          <p:cNvSpPr txBox="1"/>
+          <p:nvPr/>
+        </p:nvSpPr>
+        <p:spPr>
+          <a:xfrm>
+            <a:off x="975207" y="4526280"/>
+            <a:ext cx="2377440" cy="1188720"/>
+          </a:xfrm>
+          <a:prstGeom prst="rect">
+            <a:avLst/>
+          </a:prstGeom>
+          <a:noFill/>
+        </p:spPr>
+        <p:txBody>
+          <a:bodyPr wrap="square" lIns="0" rIns="0" tIns="0" bIns="0" anchor="ctr">
+            <a:spAutoFit/>
+          </a:bodyPr>
+          <a:lstStyle/>
+          <a:p>
+            <a:pPr algn="l"/>
+            <a:r>
+              <a:rPr sz="2400" b="1">
+                <a:solidFill>
+                  <a:srgbClr val="C8A355"/>
+                </a:solidFill>
+                <a:latin typeface="Calibri"/>
+              </a:rPr>
+              <a:t>SELL</a:t>
+            </a:r>
+          </a:p>
+        </p:txBody>
+      </p:sp>
+      <p:sp>
+        <p:nvSpPr>
+          <p:cNvPr id="15" name="Rectangle 14"/>
+          <p:cNvSpPr/>
+          <p:nvPr/>
+        </p:nvSpPr>
+        <p:spPr>
+          <a:xfrm>
+            <a:off x="3398367" y="4754880"/>
+            <a:ext cx="27432" cy="731520"/>
+          </a:xfrm>
+          <a:prstGeom prst="rect">
+            <a:avLst/>
+          </a:prstGeom>
+          <a:solidFill>
+            <a:srgbClr val="C8A355"/>
+          </a:solidFill>
+          <a:ln>
+            <a:noFill/>
+          </a:ln>
+        </p:spPr>
+        <p:style>
+          <a:lnRef idx="1">
+            <a:schemeClr val="accent1"/>
+          </a:lnRef>
+          <a:fillRef idx="3">
+            <a:schemeClr val="accent1"/>
+          </a:fillRef>
+          <a:effectRef idx="2">
+            <a:schemeClr val="accent1"/>
+          </a:effectRef>
+          <a:fontRef idx="minor">
+            <a:schemeClr val="lt1"/>
+          </a:fontRef>
+        </p:style>
+        <p:txBody>
+          <a:bodyPr rtlCol="0" anchor="ctr"/>
+          <a:lstStyle/>
+          <a:p>
+            <a:pPr algn="ctr"/>
+          </a:p>
+        </p:txBody>
+      </p:sp>
+      <p:sp>
+        <p:nvSpPr>
+          <p:cNvPr id="16" name="TextBox 15"/>
+          <p:cNvSpPr txBox="1"/>
+          <p:nvPr/>
+        </p:nvSpPr>
+        <p:spPr>
+          <a:xfrm>
+            <a:off x="3626967" y="4526280"/>
+            <a:ext cx="7680960" cy="1188720"/>
+          </a:xfrm>
+          <a:prstGeom prst="rect">
+            <a:avLst/>
+          </a:prstGeom>
+          <a:noFill/>
+        </p:spPr>
+        <p:txBody>
+          <a:bodyPr wrap="square" lIns="0" rIns="0" tIns="0" bIns="0" anchor="ctr">
+            <a:spAutoFit/>
+          </a:bodyPr>
+          <a:lstStyle/>
+          <a:p>
+            <a:pPr algn="l"/>
+            <a:r>
+              <a:rPr sz="1500" b="0">
+                <a:solidFill>
+                  <a:srgbClr val="F0F3F7"/>
+                </a:solidFill>
+                <a:latin typeface="Calibri"/>
+              </a:rPr>
+              <a:t>Acquire-hire / IP sale to Heritage, 1stDibs, StockX, Rally.Rd, or eBay analytics.</a:t>
+            </a:r>
+          </a:p>
+        </p:txBody>
+      </p:sp>
+      <p:sp>
+        <p:nvSpPr>
+          <p:cNvPr id="17" name="TextBox 16"/>
+          <p:cNvSpPr txBox="1"/>
+          <p:nvPr/>
+        </p:nvSpPr>
+        <p:spPr>
+          <a:xfrm>
+            <a:off x="822960" y="6035040"/>
+            <a:ext cx="10515600" cy="411480"/>
+          </a:xfrm>
+          <a:prstGeom prst="rect">
+            <a:avLst/>
+          </a:prstGeom>
+          <a:noFill/>
+        </p:spPr>
+        <p:txBody>
+          <a:bodyPr wrap="square" lIns="0" rIns="0" tIns="0" bIns="0" anchor="t">
+            <a:spAutoFit/>
+          </a:bodyPr>
+          <a:lstStyle/>
+          <a:p>
+            <a:pPr algn="ctr"/>
+            <a:r>
+              <a:rPr sz="1300" b="0">
+                <a:solidFill>
+                  <a:srgbClr val="7A8494"/>
+                </a:solidFill>
+                <a:latin typeface="Calibri"/>
+              </a:rPr>
+              <a:t>Collectibles software TAM ≈ $400M  ·  growing 12% YoY</a:t>
+            </a:r>
+          </a:p>
+        </p:txBody>
+      </p:sp>
+      <p:sp>
+        <p:nvSpPr>
+          <p:cNvPr id="18" name="TextBox 17"/>
+          <p:cNvSpPr txBox="1"/>
+          <p:nvPr/>
+        </p:nvSpPr>
+        <p:spPr>
+          <a:xfrm>
+            <a:off x="10698480" y="6537960"/>
+            <a:ext cx="1371600" cy="274320"/>
+          </a:xfrm>
+          <a:prstGeom prst="rect">
+            <a:avLst/>
+          </a:prstGeom>
+          <a:noFill/>
+        </p:spPr>
+        <p:txBody>
+          <a:bodyPr wrap="square" lIns="0" rIns="0" tIns="0" bIns="0" anchor="t">
+            <a:spAutoFit/>
+          </a:bodyPr>
+          <a:lstStyle/>
+          <a:p>
+            <a:pPr algn="r"/>
+            <a:r>
+              <a:rPr sz="900" b="0">
+                <a:solidFill>
+                  <a:srgbClr val="505A6A"/>
+                </a:solidFill>
+                <a:latin typeface="Calibri"/>
+              </a:rPr>
+              <a:t>DATARADAR</a:t>
+            </a:r>
+          </a:p>
+        </p:txBody>
+      </p:sp>
+    </p:spTree>
+  </p:cSld>
+  <p:clrMapOvr>
+    <a:masterClrMapping/>
+  </p:clrMapOvr>
+</p:sld>
+</file>
+
+<file path=ppt/slides/slide14.xml><?xml version="1.0" encoding="utf-8"?>
+<p:sld xmlns:a="http://schemas.openxmlformats.org/drawingml/2006/main" xmlns:p="http://schemas.openxmlformats.org/presentationml/2006/main" xmlns:r="http://schemas.openxmlformats.org/officeDocument/2006/relationships">
+  <p:cSld>
+    <p:spTree>
+      <p:nvGrpSpPr>
+        <p:cNvPr id="1" name=""/>
+        <p:cNvGrpSpPr/>
+        <p:nvPr/>
+      </p:nvGrpSpPr>
+      <p:grpSpPr/>
+      <p:sp>
+        <p:nvSpPr>
+          <p:cNvPr id="2" name="Rectangle 1"/>
+          <p:cNvSpPr/>
+          <p:nvPr/>
+        </p:nvSpPr>
+        <p:spPr>
+          <a:xfrm>
+            <a:off x="0" y="0"/>
+            <a:ext cx="12191695" cy="6858000"/>
+          </a:xfrm>
+          <a:prstGeom prst="rect">
+            <a:avLst/>
+          </a:prstGeom>
+          <a:solidFill>
+            <a:srgbClr val="0B1420"/>
+          </a:solidFill>
+          <a:ln>
+            <a:noFill/>
+          </a:ln>
+          <a:effectLst/>
+        </p:spPr>
+        <p:style>
+          <a:lnRef idx="1">
+            <a:schemeClr val="accent1"/>
+          </a:lnRef>
+          <a:fillRef idx="3">
+            <a:schemeClr val="accent1"/>
+          </a:fillRef>
+          <a:effectRef idx="2">
+            <a:schemeClr val="accent1"/>
+          </a:effectRef>
+          <a:fontRef idx="minor">
+            <a:schemeClr val="lt1"/>
+          </a:fontRef>
+        </p:style>
+        <p:txBody>
+          <a:bodyPr rtlCol="0" anchor="ctr"/>
+          <a:lstStyle/>
+          <a:p>
+            <a:pPr algn="ctr"/>
+          </a:p>
+        </p:txBody>
+      </p:sp>
+      <p:sp>
+        <p:nvSpPr>
+          <p:cNvPr id="3" name="Rectangle 2"/>
+          <p:cNvSpPr/>
+          <p:nvPr/>
+        </p:nvSpPr>
+        <p:spPr>
+          <a:xfrm>
+            <a:off x="5029200" y="1371600"/>
+            <a:ext cx="2103120" cy="73152"/>
+          </a:xfrm>
+          <a:prstGeom prst="rect">
+            <a:avLst/>
+          </a:prstGeom>
+          <a:solidFill>
+            <a:srgbClr val="4A9EFF"/>
+          </a:solidFill>
+          <a:ln>
+            <a:noFill/>
+          </a:ln>
+        </p:spPr>
+        <p:style>
+          <a:lnRef idx="1">
+            <a:schemeClr val="accent1"/>
+          </a:lnRef>
+          <a:fillRef idx="3">
+            <a:schemeClr val="accent1"/>
+          </a:fillRef>
+          <a:effectRef idx="2">
+            <a:schemeClr val="accent1"/>
+          </a:effectRef>
+          <a:fontRef idx="minor">
+            <a:schemeClr val="lt1"/>
+          </a:fontRef>
+        </p:style>
+        <p:txBody>
+          <a:bodyPr rtlCol="0" anchor="ctr"/>
+          <a:lstStyle/>
+          <a:p>
+            <a:pPr algn="ctr"/>
+          </a:p>
+        </p:txBody>
+      </p:sp>
+      <p:sp>
+        <p:nvSpPr>
           <p:cNvPr id="4" name="TextBox 3"/>
           <p:cNvSpPr txBox="1"/>
           <p:nvPr/>
@@ -5102,7 +6939,7 @@
                 </a:solidFill>
                 <a:latin typeface="Calibri"/>
               </a:rPr>
-              <a:t>Thanks for your time.</a:t>
+              <a:t>Thanks.</a:t>
             </a:r>
           </a:p>
         </p:txBody>
@@ -5316,7 +7153,7 @@
                 </a:solidFill>
                 <a:latin typeface="Calibri"/>
               </a:rPr>
-              <a:t>•  54k+ comparable sales exist on the web — fragmented, unindexed</a:t>
+              <a:t>•  54,000+ comparable sales exist on the web — fragmented, unindexed</a:t>
             </a:r>
           </a:p>
           <a:p>
@@ -5364,7 +7201,7 @@
                 </a:solidFill>
                 <a:latin typeface="Calibri"/>
               </a:rPr>
-              <a:t>•  Key-date events (artist deaths, anniversaries) move prices 5–35% — most sellers miss the window</a:t>
+              <a:t>•  Key-date events move prices 5–35% — most sellers miss the window</a:t>
             </a:r>
           </a:p>
         </p:txBody>
@@ -5441,7 +7278,7 @@
                 </a:solidFill>
                 <a:latin typeface="Calibri"/>
               </a:rPr>
-              <a:t>Price accuracy drives 60%+ of margin</a:t>
+              <a:t>Price accuracy = 60%+ of net margin</a:t>
             </a:r>
           </a:p>
         </p:txBody>
@@ -5629,7 +7466,7 @@
         </p:nvSpPr>
         <p:spPr>
           <a:xfrm>
-            <a:off x="822960" y="1920240"/>
+            <a:off x="822960" y="1828800"/>
             <a:ext cx="10515600" cy="1463040"/>
           </a:xfrm>
           <a:prstGeom prst="rect">
@@ -5645,19 +7482,19 @@
           <a:p>
             <a:pPr algn="ctr"/>
             <a:r>
-              <a:rPr sz="3400" b="1">
+              <a:rPr sz="3200" b="1">
                 <a:solidFill>
                   <a:srgbClr val="F0F3F7"/>
                 </a:solidFill>
                 <a:latin typeface="Calibri"/>
               </a:rPr>
-              <a:t>Every listing, priced by 54,000 comps</a:t>
+              <a:t>Every eBay listing, priced by 54,000 comps</a:t>
             </a:r>
           </a:p>
           <a:p>
             <a:pPr algn="ctr"/>
             <a:r>
-              <a:rPr sz="3400" b="1">
+              <a:rPr sz="3200" b="1">
                 <a:solidFill>
                   <a:srgbClr val="F0F3F7"/>
                 </a:solidFill>
@@ -5712,7 +7549,7 @@
           <a:p>
             <a:pPr algn="ctr"/>
             <a:r>
-              <a:rPr sz="1400" b="1">
+              <a:rPr sz="1300" b="1">
                 <a:solidFill>
                   <a:srgbClr val="F0F3F7"/>
                 </a:solidFill>
@@ -5768,7 +7605,7 @@
           <a:p>
             <a:pPr algn="ctr"/>
             <a:r>
-              <a:rPr sz="1400" b="1">
+              <a:rPr sz="1300" b="1">
                 <a:solidFill>
                   <a:srgbClr val="F0F3F7"/>
                 </a:solidFill>
@@ -5824,7 +7661,7 @@
           <a:p>
             <a:pPr algn="ctr"/>
             <a:r>
-              <a:rPr sz="1400" b="1">
+              <a:rPr sz="1300" b="1">
                 <a:solidFill>
                   <a:srgbClr val="F0F3F7"/>
                 </a:solidFill>
@@ -5880,7 +7717,7 @@
           <a:p>
             <a:pPr algn="ctr"/>
             <a:r>
-              <a:rPr sz="1400" b="1">
+              <a:rPr sz="1300" b="1">
                 <a:solidFill>
                   <a:srgbClr val="F0F3F7"/>
                 </a:solidFill>
@@ -5936,14 +7773,14 @@
           <a:p>
             <a:pPr algn="ctr"/>
             <a:r>
-              <a:rPr sz="1400" b="1">
+              <a:rPr sz="1300" b="1">
                 <a:solidFill>
                   <a:srgbClr val="F0F3F7"/>
                 </a:solidFill>
                 <a:latin typeface="Calibri"/>
               </a:rPr>
-              <a:t>Match
-Consensus</a:t>
+              <a:t>Consensus
+Range</a:t>
             </a:r>
           </a:p>
         </p:txBody>
@@ -5992,13 +7829,14 @@
           <a:p>
             <a:pPr algn="ctr"/>
             <a:r>
-              <a:rPr sz="1400" b="1">
+              <a:rPr sz="1300" b="1">
                 <a:solidFill>
                   <a:srgbClr val="F0F3F7"/>
                 </a:solidFill>
                 <a:latin typeface="Calibri"/>
               </a:rPr>
-              <a:t>Re-price</a:t>
+              <a:t>One-Click
+Reprice</a:t>
             </a:r>
           </a:p>
         </p:txBody>
@@ -6388,7 +8226,7 @@
                 </a:solidFill>
                 <a:latin typeface="Calibri"/>
               </a:rPr>
-              <a:t>The 54k-record comp database</a:t>
+              <a:t>The 54,000-record comp database</a:t>
             </a:r>
           </a:p>
         </p:txBody>
@@ -6401,8 +8239,8 @@
         </p:nvSpPr>
         <p:spPr>
           <a:xfrm>
-            <a:off x="822960" y="1737360"/>
-            <a:ext cx="6858000" cy="3657600"/>
+            <a:off x="822960" y="1691640"/>
+            <a:ext cx="7315200" cy="3291840"/>
           </a:xfrm>
           <a:prstGeom prst="rect">
             <a:avLst/>
@@ -6417,65 +8255,65 @@
           <a:p>
             <a:pPr algn="l">
               <a:lnSpc>
-                <a:spcPct val="160000"/>
+                <a:spcPct val="150000"/>
               </a:lnSpc>
             </a:pPr>
             <a:r>
-              <a:rPr sz="1800" b="0">
+              <a:rPr sz="1700" b="0">
                 <a:solidFill>
                   <a:srgbClr val="F0F3F7"/>
                 </a:solidFill>
                 <a:latin typeface="Calibri"/>
               </a:rPr>
-              <a:t>•  54,000+ deduplicated past sales across Shepard Fairey, KAWS, Banksy, Death NYC, Mr. Brainwash, and more</a:t>
+              <a:t>•  Deduplicated across Shepard Fairey, Death NYC, KAWS, Banksy, Mr. Brainwash, Bearbrick</a:t>
             </a:r>
           </a:p>
           <a:p>
             <a:pPr algn="l">
               <a:lnSpc>
-                <a:spcPct val="160000"/>
+                <a:spcPct val="150000"/>
               </a:lnSpc>
             </a:pPr>
             <a:r>
-              <a:rPr sz="1800" b="0">
+              <a:rPr sz="1700" b="0">
                 <a:solidFill>
                   <a:srgbClr val="F0F3F7"/>
                 </a:solidFill>
                 <a:latin typeface="Calibri"/>
               </a:rPr>
-              <a:t>•  Cleaned and indexed by artist, work_id, colorway, signed flag, medium, edition size</a:t>
+              <a:t>•  Indexed: artist, work_id, colorway, medium, edition size, signed/numbered status</a:t>
             </a:r>
           </a:p>
           <a:p>
             <a:pPr algn="l">
               <a:lnSpc>
-                <a:spcPct val="160000"/>
+                <a:spcPct val="150000"/>
               </a:lnSpc>
             </a:pPr>
             <a:r>
-              <a:rPr sz="1800" b="0">
+              <a:rPr sz="1700" b="0">
                 <a:solidFill>
                   <a:srgbClr val="F0F3F7"/>
                 </a:solidFill>
                 <a:latin typeface="Calibri"/>
               </a:rPr>
-              <a:t>•  Weekly updates via scraper pipeline</a:t>
+              <a:t>•  Weekly scraper pipeline + manual curation loop (operator swipes L=reject R=approve)</a:t>
             </a:r>
           </a:p>
           <a:p>
             <a:pPr algn="l">
               <a:lnSpc>
-                <a:spcPct val="160000"/>
+                <a:spcPct val="150000"/>
               </a:lnSpc>
             </a:pPr>
             <a:r>
-              <a:rPr sz="1800" b="0">
+              <a:rPr sz="1700" b="0">
                 <a:solidFill>
                   <a:srgbClr val="F0F3F7"/>
                 </a:solidFill>
                 <a:latin typeface="Calibri"/>
               </a:rPr>
-              <a:t>•  Powers /prices mobile UI for on-the-go lookup</a:t>
+              <a:t>•  Powers /prices mobile UI for on-the-go lookups</a:t>
             </a:r>
           </a:p>
         </p:txBody>
@@ -6488,8 +8326,8 @@
         </p:nvSpPr>
         <p:spPr>
           <a:xfrm>
-            <a:off x="8229600" y="1737360"/>
-            <a:ext cx="3383280" cy="3657600"/>
+            <a:off x="792327" y="5029200"/>
+            <a:ext cx="3383280" cy="1371600"/>
           </a:xfrm>
           <a:prstGeom prst="roundRect">
             <a:avLst/>
@@ -6532,8 +8370,43 @@
         </p:nvSpPr>
         <p:spPr>
           <a:xfrm>
-            <a:off x="8229600" y="1920240"/>
-            <a:ext cx="3383280" cy="1097280"/>
+            <a:off x="792327" y="5166360"/>
+            <a:ext cx="3383280" cy="822960"/>
+          </a:xfrm>
+          <a:prstGeom prst="rect">
+            <a:avLst/>
+          </a:prstGeom>
+          <a:noFill/>
+        </p:spPr>
+        <p:txBody>
+          <a:bodyPr wrap="square" lIns="0" rIns="0" tIns="0" bIns="0" anchor="ctr">
+            <a:spAutoFit/>
+          </a:bodyPr>
+          <a:lstStyle/>
+          <a:p>
+            <a:pPr algn="ctr"/>
+            <a:r>
+              <a:rPr sz="4000" b="1">
+                <a:solidFill>
+                  <a:srgbClr val="C8A355"/>
+                </a:solidFill>
+                <a:latin typeface="Calibri"/>
+              </a:rPr>
+              <a:t>54,000+</a:t>
+            </a:r>
+          </a:p>
+        </p:txBody>
+      </p:sp>
+      <p:sp>
+        <p:nvSpPr>
+          <p:cNvPr id="8" name="TextBox 7"/>
+          <p:cNvSpPr txBox="1"/>
+          <p:nvPr/>
+        </p:nvSpPr>
+        <p:spPr>
+          <a:xfrm>
+            <a:off x="792327" y="5989320"/>
+            <a:ext cx="3383280" cy="365760"/>
           </a:xfrm>
           <a:prstGeom prst="rect">
             <a:avLst/>
@@ -6548,27 +8421,106 @@
           <a:p>
             <a:pPr algn="ctr"/>
             <a:r>
-              <a:rPr sz="6400" b="1">
-                <a:solidFill>
-                  <a:srgbClr val="C8A355"/>
-                </a:solidFill>
-                <a:latin typeface="Calibri"/>
-              </a:rPr>
-              <a:t>54,000+</a:t>
-            </a:r>
-          </a:p>
-        </p:txBody>
-      </p:sp>
-      <p:sp>
-        <p:nvSpPr>
-          <p:cNvPr id="8" name="TextBox 7"/>
+              <a:rPr sz="1300" b="0">
+                <a:solidFill>
+                  <a:srgbClr val="7A8494"/>
+                </a:solidFill>
+                <a:latin typeface="Calibri"/>
+              </a:rPr>
+              <a:t>comps in DB</a:t>
+            </a:r>
+          </a:p>
+        </p:txBody>
+      </p:sp>
+      <p:sp>
+        <p:nvSpPr>
+          <p:cNvPr id="9" name="Rounded Rectangle 8"/>
+          <p:cNvSpPr/>
+          <p:nvPr/>
+        </p:nvSpPr>
+        <p:spPr>
+          <a:xfrm>
+            <a:off x="4404207" y="5029200"/>
+            <a:ext cx="3383280" cy="1371600"/>
+          </a:xfrm>
+          <a:prstGeom prst="roundRect">
+            <a:avLst/>
+          </a:prstGeom>
+          <a:solidFill>
+            <a:srgbClr val="121E2F"/>
+          </a:solidFill>
+          <a:ln w="12700">
+            <a:solidFill>
+              <a:srgbClr val="4A9EFF"/>
+            </a:solidFill>
+          </a:ln>
+          <a:effectLst/>
+        </p:spPr>
+        <p:style>
+          <a:lnRef idx="1">
+            <a:schemeClr val="accent1"/>
+          </a:lnRef>
+          <a:fillRef idx="3">
+            <a:schemeClr val="accent1"/>
+          </a:fillRef>
+          <a:effectRef idx="2">
+            <a:schemeClr val="accent1"/>
+          </a:effectRef>
+          <a:fontRef idx="minor">
+            <a:schemeClr val="lt1"/>
+          </a:fontRef>
+        </p:style>
+        <p:txBody>
+          <a:bodyPr rtlCol="0" anchor="ctr"/>
+          <a:lstStyle/>
+          <a:p/>
+        </p:txBody>
+      </p:sp>
+      <p:sp>
+        <p:nvSpPr>
+          <p:cNvPr id="10" name="TextBox 9"/>
           <p:cNvSpPr txBox="1"/>
           <p:nvPr/>
         </p:nvSpPr>
         <p:spPr>
           <a:xfrm>
-            <a:off x="8229600" y="3017520"/>
-            <a:ext cx="3383280" cy="457200"/>
+            <a:off x="4404207" y="5166360"/>
+            <a:ext cx="3383280" cy="822960"/>
+          </a:xfrm>
+          <a:prstGeom prst="rect">
+            <a:avLst/>
+          </a:prstGeom>
+          <a:noFill/>
+        </p:spPr>
+        <p:txBody>
+          <a:bodyPr wrap="square" lIns="0" rIns="0" tIns="0" bIns="0" anchor="ctr">
+            <a:spAutoFit/>
+          </a:bodyPr>
+          <a:lstStyle/>
+          <a:p>
+            <a:pPr algn="ctr"/>
+            <a:r>
+              <a:rPr sz="4000" b="1">
+                <a:solidFill>
+                  <a:srgbClr val="4A9EFF"/>
+                </a:solidFill>
+                <a:latin typeface="Calibri"/>
+              </a:rPr>
+              <a:t>&lt;200ms</a:t>
+            </a:r>
+          </a:p>
+        </p:txBody>
+      </p:sp>
+      <p:sp>
+        <p:nvSpPr>
+          <p:cNvPr id="11" name="TextBox 10"/>
+          <p:cNvSpPr txBox="1"/>
+          <p:nvPr/>
+        </p:nvSpPr>
+        <p:spPr>
+          <a:xfrm>
+            <a:off x="4404207" y="5989320"/>
+            <a:ext cx="3383280" cy="365760"/>
           </a:xfrm>
           <a:prstGeom prst="rect">
             <a:avLst/>
@@ -6583,27 +8535,106 @@
           <a:p>
             <a:pPr algn="ctr"/>
             <a:r>
-              <a:rPr sz="1400" b="0">
+              <a:rPr sz="1300" b="0">
                 <a:solidFill>
                   <a:srgbClr val="7A8494"/>
                 </a:solidFill>
                 <a:latin typeface="Calibri"/>
               </a:rPr>
-              <a:t>comps in DB</a:t>
-            </a:r>
-          </a:p>
-        </p:txBody>
-      </p:sp>
-      <p:sp>
-        <p:nvSpPr>
-          <p:cNvPr id="9" name="TextBox 8"/>
+              <a:t>median search</a:t>
+            </a:r>
+          </a:p>
+        </p:txBody>
+      </p:sp>
+      <p:sp>
+        <p:nvSpPr>
+          <p:cNvPr id="12" name="Rounded Rectangle 11"/>
+          <p:cNvSpPr/>
+          <p:nvPr/>
+        </p:nvSpPr>
+        <p:spPr>
+          <a:xfrm>
+            <a:off x="8016087" y="5029200"/>
+            <a:ext cx="3383280" cy="1371600"/>
+          </a:xfrm>
+          <a:prstGeom prst="roundRect">
+            <a:avLst/>
+          </a:prstGeom>
+          <a:solidFill>
+            <a:srgbClr val="121E2F"/>
+          </a:solidFill>
+          <a:ln w="12700">
+            <a:solidFill>
+              <a:srgbClr val="30D158"/>
+            </a:solidFill>
+          </a:ln>
+          <a:effectLst/>
+        </p:spPr>
+        <p:style>
+          <a:lnRef idx="1">
+            <a:schemeClr val="accent1"/>
+          </a:lnRef>
+          <a:fillRef idx="3">
+            <a:schemeClr val="accent1"/>
+          </a:fillRef>
+          <a:effectRef idx="2">
+            <a:schemeClr val="accent1"/>
+          </a:effectRef>
+          <a:fontRef idx="minor">
+            <a:schemeClr val="lt1"/>
+          </a:fontRef>
+        </p:style>
+        <p:txBody>
+          <a:bodyPr rtlCol="0" anchor="ctr"/>
+          <a:lstStyle/>
+          <a:p/>
+        </p:txBody>
+      </p:sp>
+      <p:sp>
+        <p:nvSpPr>
+          <p:cNvPr id="13" name="TextBox 12"/>
           <p:cNvSpPr txBox="1"/>
           <p:nvPr/>
         </p:nvSpPr>
         <p:spPr>
           <a:xfrm>
-            <a:off x="8229600" y="3749039"/>
+            <a:off x="8016087" y="5166360"/>
             <a:ext cx="3383280" cy="822960"/>
+          </a:xfrm>
+          <a:prstGeom prst="rect">
+            <a:avLst/>
+          </a:prstGeom>
+          <a:noFill/>
+        </p:spPr>
+        <p:txBody>
+          <a:bodyPr wrap="square" lIns="0" rIns="0" tIns="0" bIns="0" anchor="ctr">
+            <a:spAutoFit/>
+          </a:bodyPr>
+          <a:lstStyle/>
+          <a:p>
+            <a:pPr algn="ctr"/>
+            <a:r>
+              <a:rPr sz="4000" b="1">
+                <a:solidFill>
+                  <a:srgbClr val="30D158"/>
+                </a:solidFill>
+                <a:latin typeface="Calibri"/>
+              </a:rPr>
+              <a:t>99%</a:t>
+            </a:r>
+          </a:p>
+        </p:txBody>
+      </p:sp>
+      <p:sp>
+        <p:nvSpPr>
+          <p:cNvPr id="14" name="TextBox 13"/>
+          <p:cNvSpPr txBox="1"/>
+          <p:nvPr/>
+        </p:nvSpPr>
+        <p:spPr>
+          <a:xfrm>
+            <a:off x="8016087" y="5989320"/>
+            <a:ext cx="3383280" cy="365760"/>
           </a:xfrm>
           <a:prstGeom prst="rect">
             <a:avLst/>
@@ -6618,55 +8649,20 @@
           <a:p>
             <a:pPr algn="ctr"/>
             <a:r>
-              <a:rPr sz="4400" b="1">
-                <a:solidFill>
-                  <a:srgbClr val="4A9EFF"/>
-                </a:solidFill>
-                <a:latin typeface="Calibri"/>
-              </a:rPr>
-              <a:t>&lt;200ms</a:t>
-            </a:r>
-          </a:p>
-        </p:txBody>
-      </p:sp>
-      <p:sp>
-        <p:nvSpPr>
-          <p:cNvPr id="10" name="TextBox 9"/>
-          <p:cNvSpPr txBox="1"/>
-          <p:nvPr/>
-        </p:nvSpPr>
-        <p:spPr>
-          <a:xfrm>
-            <a:off x="8229600" y="4572000"/>
-            <a:ext cx="3383280" cy="457200"/>
-          </a:xfrm>
-          <a:prstGeom prst="rect">
-            <a:avLst/>
-          </a:prstGeom>
-          <a:noFill/>
-        </p:spPr>
-        <p:txBody>
-          <a:bodyPr wrap="square" lIns="0" rIns="0" tIns="0" bIns="0" anchor="t">
-            <a:spAutoFit/>
-          </a:bodyPr>
-          <a:lstStyle/>
-          <a:p>
-            <a:pPr algn="ctr"/>
-            <a:r>
-              <a:rPr sz="1400" b="0">
+              <a:rPr sz="1300" b="0">
                 <a:solidFill>
                   <a:srgbClr val="7A8494"/>
                 </a:solidFill>
                 <a:latin typeface="Calibri"/>
               </a:rPr>
-              <a:t>median search latency</a:t>
-            </a:r>
-          </a:p>
-        </p:txBody>
-      </p:sp>
-      <p:sp>
-        <p:nvSpPr>
-          <p:cNvPr id="11" name="TextBox 10"/>
+              <a:t>dedup rate</a:t>
+            </a:r>
+          </a:p>
+        </p:txBody>
+      </p:sp>
+      <p:sp>
+        <p:nvSpPr>
+          <p:cNvPr id="15" name="TextBox 14"/>
           <p:cNvSpPr txBox="1"/>
           <p:nvPr/>
         </p:nvSpPr>
@@ -6776,7 +8772,7 @@
             <a:avLst/>
           </a:prstGeom>
           <a:solidFill>
-            <a:srgbClr val="4A9EFF"/>
+            <a:srgbClr val="30D158"/>
           </a:solidFill>
           <a:ln>
             <a:noFill/>
@@ -6834,7 +8830,7 @@
                 </a:solidFill>
                 <a:latin typeface="Calibri"/>
               </a:rPr>
-              <a:t>From gut feel to comp-grounded math</a:t>
+              <a:t>Four models. One range.</a:t>
             </a:r>
           </a:p>
         </p:txBody>
@@ -6847,18 +8843,18 @@
         </p:nvSpPr>
         <p:spPr>
           <a:xfrm>
-            <a:off x="822960" y="1737360"/>
-            <a:ext cx="5303520" cy="2377440"/>
+            <a:off x="822960" y="1508760"/>
+            <a:ext cx="5303520" cy="1005840"/>
           </a:xfrm>
           <a:prstGeom prst="roundRect">
             <a:avLst/>
           </a:prstGeom>
           <a:solidFill>
-            <a:srgbClr val="151D2A"/>
+            <a:srgbClr val="121E2F"/>
           </a:solidFill>
           <a:ln w="12700">
             <a:solidFill>
-              <a:srgbClr val="7A8494"/>
+              <a:srgbClr val="4A9EFF"/>
             </a:solidFill>
           </a:ln>
           <a:effectLst/>
@@ -6891,8 +8887,8 @@
         </p:nvSpPr>
         <p:spPr>
           <a:xfrm>
-            <a:off x="1005840" y="2011680"/>
-            <a:ext cx="5303520" cy="365760"/>
+            <a:off x="1097280" y="1664208"/>
+            <a:ext cx="4754880" cy="457200"/>
           </a:xfrm>
           <a:prstGeom prst="rect">
             <a:avLst/>
@@ -6907,13 +8903,13 @@
           <a:p>
             <a:pPr algn="l"/>
             <a:r>
-              <a:rPr sz="1300" b="1">
-                <a:solidFill>
-                  <a:srgbClr val="7A8494"/>
-                </a:solidFill>
-                <a:latin typeface="Calibri"/>
-              </a:rPr>
-              <a:t>BEFORE</a:t>
+              <a:rPr sz="2000" b="1">
+                <a:solidFill>
+                  <a:srgbClr val="F0F3F7"/>
+                </a:solidFill>
+                <a:latin typeface="Calibri"/>
+              </a:rPr>
+              <a:t>CLAUDE</a:t>
             </a:r>
           </a:p>
         </p:txBody>
@@ -6926,8 +8922,8 @@
         </p:nvSpPr>
         <p:spPr>
           <a:xfrm>
-            <a:off x="1005840" y="2514600"/>
-            <a:ext cx="4937760" cy="1371600"/>
+            <a:off x="1097280" y="2103120"/>
+            <a:ext cx="4754880" cy="365760"/>
           </a:xfrm>
           <a:prstGeom prst="rect">
             <a:avLst/>
@@ -6942,13 +8938,13 @@
           <a:p>
             <a:pPr algn="l"/>
             <a:r>
-              <a:rPr sz="2200" b="1">
+              <a:rPr sz="1100" b="0">
                 <a:solidFill>
                   <a:srgbClr val="7A8494"/>
                 </a:solidFill>
-                <a:latin typeface="Consolas"/>
-              </a:rPr>
-              <a:t>base_price  ×  event_boost</a:t>
+                <a:latin typeface="Calibri"/>
+              </a:rPr>
+              <a:t>Anthropic  ·  claude-sonnet-4-6</a:t>
             </a:r>
           </a:p>
         </p:txBody>
@@ -6961,8 +8957,8 @@
         </p:nvSpPr>
         <p:spPr>
           <a:xfrm>
-            <a:off x="6355080" y="1737360"/>
-            <a:ext cx="5303520" cy="2377440"/>
+            <a:off x="6400800" y="1508760"/>
+            <a:ext cx="5303520" cy="1005840"/>
           </a:xfrm>
           <a:prstGeom prst="roundRect">
             <a:avLst/>
@@ -7005,8 +9001,8 @@
         </p:nvSpPr>
         <p:spPr>
           <a:xfrm>
-            <a:off x="6537960" y="2011680"/>
-            <a:ext cx="5303520" cy="365760"/>
+            <a:off x="6675120" y="1664208"/>
+            <a:ext cx="4754880" cy="457200"/>
           </a:xfrm>
           <a:prstGeom prst="rect">
             <a:avLst/>
@@ -7021,13 +9017,13 @@
           <a:p>
             <a:pPr algn="l"/>
             <a:r>
-              <a:rPr sz="1300" b="1">
-                <a:solidFill>
-                  <a:srgbClr val="30D158"/>
-                </a:solidFill>
-                <a:latin typeface="Calibri"/>
-              </a:rPr>
-              <a:t>NOW</a:t>
+              <a:rPr sz="2000" b="1">
+                <a:solidFill>
+                  <a:srgbClr val="F0F3F7"/>
+                </a:solidFill>
+                <a:latin typeface="Calibri"/>
+              </a:rPr>
+              <a:t>GPT-4o</a:t>
             </a:r>
           </a:p>
         </p:txBody>
@@ -7040,8 +9036,8 @@
         </p:nvSpPr>
         <p:spPr>
           <a:xfrm>
-            <a:off x="6537960" y="2514600"/>
-            <a:ext cx="4937760" cy="1371600"/>
+            <a:off x="6675120" y="2103120"/>
+            <a:ext cx="4754880" cy="365760"/>
           </a:xfrm>
           <a:prstGeom prst="rect">
             <a:avLst/>
@@ -7056,39 +9052,71 @@
           <a:p>
             <a:pPr algn="l"/>
             <a:r>
-              <a:rPr sz="2200" b="1">
-                <a:solidFill>
-                  <a:srgbClr val="F0F3F7"/>
-                </a:solidFill>
-                <a:latin typeface="Consolas"/>
-              </a:rPr>
-              <a:t>comp_p75  ×  event_multiplier</a:t>
-            </a:r>
-          </a:p>
-          <a:p>
-            <a:pPr algn="l"/>
-            <a:r>
-              <a:rPr sz="2200" b="1">
-                <a:solidFill>
-                  <a:srgbClr val="F0F3F7"/>
-                </a:solidFill>
-                <a:latin typeface="Consolas"/>
-              </a:rPr>
-              <a:t>when ≥3 comps</a:t>
-            </a:r>
-          </a:p>
-        </p:txBody>
-      </p:sp>
-      <p:sp>
-        <p:nvSpPr>
-          <p:cNvPr id="11" name="TextBox 10"/>
+              <a:rPr sz="1100" b="0">
+                <a:solidFill>
+                  <a:srgbClr val="7A8494"/>
+                </a:solidFill>
+                <a:latin typeface="Calibri"/>
+              </a:rPr>
+              <a:t>OpenAI</a:t>
+            </a:r>
+          </a:p>
+        </p:txBody>
+      </p:sp>
+      <p:sp>
+        <p:nvSpPr>
+          <p:cNvPr id="11" name="Rounded Rectangle 10"/>
+          <p:cNvSpPr/>
+          <p:nvPr/>
+        </p:nvSpPr>
+        <p:spPr>
+          <a:xfrm>
+            <a:off x="822960" y="2679192"/>
+            <a:ext cx="5303520" cy="1005840"/>
+          </a:xfrm>
+          <a:prstGeom prst="roundRect">
+            <a:avLst/>
+          </a:prstGeom>
+          <a:solidFill>
+            <a:srgbClr val="121E2F"/>
+          </a:solidFill>
+          <a:ln w="12700">
+            <a:solidFill>
+              <a:srgbClr val="C8A355"/>
+            </a:solidFill>
+          </a:ln>
+          <a:effectLst/>
+        </p:spPr>
+        <p:style>
+          <a:lnRef idx="1">
+            <a:schemeClr val="accent1"/>
+          </a:lnRef>
+          <a:fillRef idx="3">
+            <a:schemeClr val="accent1"/>
+          </a:fillRef>
+          <a:effectRef idx="2">
+            <a:schemeClr val="accent1"/>
+          </a:effectRef>
+          <a:fontRef idx="minor">
+            <a:schemeClr val="lt1"/>
+          </a:fontRef>
+        </p:style>
+        <p:txBody>
+          <a:bodyPr rtlCol="0" anchor="ctr"/>
+          <a:lstStyle/>
+          <a:p/>
+        </p:txBody>
+      </p:sp>
+      <p:sp>
+        <p:nvSpPr>
+          <p:cNvPr id="12" name="TextBox 11"/>
           <p:cNvSpPr txBox="1"/>
           <p:nvPr/>
         </p:nvSpPr>
         <p:spPr>
           <a:xfrm>
-            <a:off x="822960" y="4480560"/>
-            <a:ext cx="10515600" cy="1005840"/>
+            <a:off x="1097280" y="2834640"/>
+            <a:ext cx="4754880" cy="457200"/>
           </a:xfrm>
           <a:prstGeom prst="rect">
             <a:avLst/>
@@ -7101,35 +9129,70 @@
           </a:bodyPr>
           <a:lstStyle/>
           <a:p>
-            <a:pPr algn="ctr"/>
-            <a:r>
-              <a:rPr sz="1600" b="0">
+            <a:pPr algn="l"/>
+            <a:r>
+              <a:rPr sz="2000" b="1">
                 <a:solidFill>
                   <a:srgbClr val="F0F3F7"/>
                 </a:solidFill>
                 <a:latin typeface="Calibri"/>
               </a:rPr>
-              <a:t>Signed-gate: auto-filters comps to signed-only when title qualifies. Falls back to full pool if &lt;3 signed comps exist.</a:t>
-            </a:r>
-          </a:p>
-        </p:txBody>
-      </p:sp>
-      <p:sp>
-        <p:nvSpPr>
-          <p:cNvPr id="12" name="Rounded Rectangle 11"/>
+              <a:t>GEMINI 2.5 FLASH</a:t>
+            </a:r>
+          </a:p>
+        </p:txBody>
+      </p:sp>
+      <p:sp>
+        <p:nvSpPr>
+          <p:cNvPr id="13" name="TextBox 12"/>
+          <p:cNvSpPr txBox="1"/>
+          <p:nvPr/>
+        </p:nvSpPr>
+        <p:spPr>
+          <a:xfrm>
+            <a:off x="1097280" y="3273552"/>
+            <a:ext cx="4754880" cy="365760"/>
+          </a:xfrm>
+          <a:prstGeom prst="rect">
+            <a:avLst/>
+          </a:prstGeom>
+          <a:noFill/>
+        </p:spPr>
+        <p:txBody>
+          <a:bodyPr wrap="square" lIns="0" rIns="0" tIns="0" bIns="0" anchor="t">
+            <a:spAutoFit/>
+          </a:bodyPr>
+          <a:lstStyle/>
+          <a:p>
+            <a:pPr algn="l"/>
+            <a:r>
+              <a:rPr sz="1100" b="0">
+                <a:solidFill>
+                  <a:srgbClr val="7A8494"/>
+                </a:solidFill>
+                <a:latin typeface="Calibri"/>
+              </a:rPr>
+              <a:t>Google</a:t>
+            </a:r>
+          </a:p>
+        </p:txBody>
+      </p:sp>
+      <p:sp>
+        <p:nvSpPr>
+          <p:cNvPr id="14" name="Rounded Rectangle 13"/>
           <p:cNvSpPr/>
           <p:nvPr/>
         </p:nvSpPr>
         <p:spPr>
           <a:xfrm>
-            <a:off x="2286000" y="5669280"/>
-            <a:ext cx="7589520" cy="731520"/>
+            <a:off x="6400800" y="2679192"/>
+            <a:ext cx="5303520" cy="1005840"/>
           </a:xfrm>
           <a:prstGeom prst="roundRect">
             <a:avLst/>
           </a:prstGeom>
           <a:solidFill>
-            <a:srgbClr val="060C14"/>
+            <a:srgbClr val="121E2F"/>
           </a:solidFill>
           <a:ln w="12700">
             <a:solidFill>
@@ -7160,14 +9223,128 @@
       </p:sp>
       <p:sp>
         <p:nvSpPr>
-          <p:cNvPr id="13" name="TextBox 12"/>
+          <p:cNvPr id="15" name="TextBox 14"/>
           <p:cNvSpPr txBox="1"/>
           <p:nvPr/>
         </p:nvSpPr>
         <p:spPr>
           <a:xfrm>
-            <a:off x="2286000" y="5669280"/>
-            <a:ext cx="7589520" cy="731520"/>
+            <a:off x="6675120" y="2834640"/>
+            <a:ext cx="4754880" cy="457200"/>
+          </a:xfrm>
+          <a:prstGeom prst="rect">
+            <a:avLst/>
+          </a:prstGeom>
+          <a:noFill/>
+        </p:spPr>
+        <p:txBody>
+          <a:bodyPr wrap="square" lIns="0" rIns="0" tIns="0" bIns="0" anchor="t">
+            <a:spAutoFit/>
+          </a:bodyPr>
+          <a:lstStyle/>
+          <a:p>
+            <a:pPr algn="l"/>
+            <a:r>
+              <a:rPr sz="2000" b="1">
+                <a:solidFill>
+                  <a:srgbClr val="F0F3F7"/>
+                </a:solidFill>
+                <a:latin typeface="Calibri"/>
+              </a:rPr>
+              <a:t>GROK 3</a:t>
+            </a:r>
+          </a:p>
+        </p:txBody>
+      </p:sp>
+      <p:sp>
+        <p:nvSpPr>
+          <p:cNvPr id="16" name="TextBox 15"/>
+          <p:cNvSpPr txBox="1"/>
+          <p:nvPr/>
+        </p:nvSpPr>
+        <p:spPr>
+          <a:xfrm>
+            <a:off x="6675120" y="3273552"/>
+            <a:ext cx="4754880" cy="365760"/>
+          </a:xfrm>
+          <a:prstGeom prst="rect">
+            <a:avLst/>
+          </a:prstGeom>
+          <a:noFill/>
+        </p:spPr>
+        <p:txBody>
+          <a:bodyPr wrap="square" lIns="0" rIns="0" tIns="0" bIns="0" anchor="t">
+            <a:spAutoFit/>
+          </a:bodyPr>
+          <a:lstStyle/>
+          <a:p>
+            <a:pPr algn="l"/>
+            <a:r>
+              <a:rPr sz="1100" b="0">
+                <a:solidFill>
+                  <a:srgbClr val="7A8494"/>
+                </a:solidFill>
+                <a:latin typeface="Calibri"/>
+              </a:rPr>
+              <a:t>xAI</a:t>
+            </a:r>
+          </a:p>
+        </p:txBody>
+      </p:sp>
+      <p:sp>
+        <p:nvSpPr>
+          <p:cNvPr id="17" name="Rounded Rectangle 16"/>
+          <p:cNvSpPr/>
+          <p:nvPr/>
+        </p:nvSpPr>
+        <p:spPr>
+          <a:xfrm>
+            <a:off x="822960" y="3977639"/>
+            <a:ext cx="10972800" cy="685800"/>
+          </a:xfrm>
+          <a:prstGeom prst="roundRect">
+            <a:avLst/>
+          </a:prstGeom>
+          <a:solidFill>
+            <a:srgbClr val="142C1A"/>
+          </a:solidFill>
+          <a:ln w="12700">
+            <a:solidFill>
+              <a:srgbClr val="30D158"/>
+            </a:solidFill>
+          </a:ln>
+          <a:effectLst/>
+        </p:spPr>
+        <p:style>
+          <a:lnRef idx="1">
+            <a:schemeClr val="accent1"/>
+          </a:lnRef>
+          <a:fillRef idx="3">
+            <a:schemeClr val="accent1"/>
+          </a:fillRef>
+          <a:effectRef idx="2">
+            <a:schemeClr val="accent1"/>
+          </a:effectRef>
+          <a:fontRef idx="minor">
+            <a:schemeClr val="lt1"/>
+          </a:fontRef>
+        </p:style>
+        <p:txBody>
+          <a:bodyPr rtlCol="0" anchor="ctr"/>
+          <a:lstStyle/>
+          <a:p/>
+        </p:txBody>
+      </p:sp>
+      <p:sp>
+        <p:nvSpPr>
+          <p:cNvPr id="18" name="TextBox 17"/>
+          <p:cNvSpPr txBox="1"/>
+          <p:nvPr/>
+        </p:nvSpPr>
+        <p:spPr>
+          <a:xfrm>
+            <a:off x="822960" y="3977639"/>
+            <a:ext cx="10972800" cy="685800"/>
           </a:xfrm>
           <a:prstGeom prst="rect">
             <a:avLst/>
@@ -7182,20 +9359,142 @@
           <a:p>
             <a:pPr algn="ctr"/>
             <a:r>
-              <a:rPr sz="1500" b="0">
+              <a:rPr sz="1500" b="1">
                 <a:solidFill>
                   <a:srgbClr val="30D158"/>
                 </a:solidFill>
-                <a:latin typeface="Consolas"/>
-              </a:rPr>
-              <a:t>suggested = comp_p75 × (1 + event_boost_pct / 100)</a:t>
-            </a:r>
-          </a:p>
-        </p:txBody>
-      </p:sp>
-      <p:sp>
-        <p:nvSpPr>
-          <p:cNvPr id="14" name="TextBox 13"/>
+                <a:latin typeface="Calibri"/>
+              </a:rPr>
+              <a:t>NEW · Each model returns {low, recommended, high} — a range, not a number</a:t>
+            </a:r>
+          </a:p>
+        </p:txBody>
+      </p:sp>
+      <p:sp>
+        <p:nvSpPr>
+          <p:cNvPr id="19" name="TextBox 18"/>
+          <p:cNvSpPr txBox="1"/>
+          <p:nvPr/>
+        </p:nvSpPr>
+        <p:spPr>
+          <a:xfrm>
+            <a:off x="822960" y="4846320"/>
+            <a:ext cx="10972800" cy="1371600"/>
+          </a:xfrm>
+          <a:prstGeom prst="rect">
+            <a:avLst/>
+          </a:prstGeom>
+          <a:noFill/>
+        </p:spPr>
+        <p:txBody>
+          <a:bodyPr wrap="square" lIns="0" rIns="0" tIns="0" bIns="0" anchor="t">
+            <a:spAutoFit/>
+          </a:bodyPr>
+          <a:lstStyle/>
+          <a:p>
+            <a:pPr algn="l">
+              <a:lnSpc>
+                <a:spcPct val="130000"/>
+              </a:lnSpc>
+            </a:pPr>
+            <a:r>
+              <a:rPr sz="1400" b="0">
+                <a:solidFill>
+                  <a:srgbClr val="F0F3F7"/>
+                </a:solidFill>
+                <a:latin typeface="Calibri"/>
+              </a:rPr>
+              <a:t>•  Live eBay competition fed into every prompt via Browse API</a:t>
+            </a:r>
+          </a:p>
+          <a:p>
+            <a:pPr algn="l">
+              <a:lnSpc>
+                <a:spcPct val="130000"/>
+              </a:lnSpc>
+            </a:pPr>
+            <a:r>
+              <a:rPr sz="1400" b="0">
+                <a:solidFill>
+                  <a:srgbClr val="F0F3F7"/>
+                </a:solidFill>
+                <a:latin typeface="Calibri"/>
+              </a:rPr>
+              <a:t>•  Per-artist prompt fragments (Fairey editions, Banksy Pest Control, KAWS colorway)</a:t>
+            </a:r>
+          </a:p>
+          <a:p>
+            <a:pPr algn="l">
+              <a:lnSpc>
+                <a:spcPct val="130000"/>
+              </a:lnSpc>
+            </a:pPr>
+            <a:r>
+              <a:rPr sz="1400" b="0">
+                <a:solidFill>
+                  <a:srgbClr val="F0F3F7"/>
+                </a:solidFill>
+                <a:latin typeface="Calibri"/>
+              </a:rPr>
+              <a:t>•  Parallel fan-out via ThreadPoolExecutor — 5–10s wall clock per item</a:t>
+            </a:r>
+          </a:p>
+          <a:p>
+            <a:pPr algn="l">
+              <a:lnSpc>
+                <a:spcPct val="130000"/>
+              </a:lnSpc>
+            </a:pPr>
+            <a:r>
+              <a:rPr sz="1400" b="0">
+                <a:solidFill>
+                  <a:srgbClr val="F0F3F7"/>
+                </a:solidFill>
+                <a:latin typeface="Calibri"/>
+              </a:rPr>
+              <a:t>•  Cached per (listing_id, comp_median bucket) — invalidates only when comp_median moves ≥$10</a:t>
+            </a:r>
+          </a:p>
+        </p:txBody>
+      </p:sp>
+      <p:sp>
+        <p:nvSpPr>
+          <p:cNvPr id="20" name="TextBox 19"/>
+          <p:cNvSpPr txBox="1"/>
+          <p:nvPr/>
+        </p:nvSpPr>
+        <p:spPr>
+          <a:xfrm>
+            <a:off x="822960" y="6355080"/>
+            <a:ext cx="10515600" cy="320040"/>
+          </a:xfrm>
+          <a:prstGeom prst="rect">
+            <a:avLst/>
+          </a:prstGeom>
+          <a:noFill/>
+        </p:spPr>
+        <p:txBody>
+          <a:bodyPr wrap="square" lIns="0" rIns="0" tIns="0" bIns="0" anchor="t">
+            <a:spAutoFit/>
+          </a:bodyPr>
+          <a:lstStyle/>
+          <a:p>
+            <a:pPr algn="ctr"/>
+            <a:r>
+              <a:rPr sz="1300" b="1">
+                <a:solidFill>
+                  <a:srgbClr val="C8A355"/>
+                </a:solidFill>
+                <a:latin typeface="Calibri"/>
+              </a:rPr>
+              <a:t>~$0.02 per item  ·  cached until comps shift</a:t>
+            </a:r>
+          </a:p>
+        </p:txBody>
+      </p:sp>
+      <p:sp>
+        <p:nvSpPr>
+          <p:cNvPr id="21" name="TextBox 20"/>
           <p:cNvSpPr txBox="1"/>
           <p:nvPr/>
         </p:nvSpPr>
@@ -7305,7 +9604,7 @@
             <a:avLst/>
           </a:prstGeom>
           <a:solidFill>
-            <a:srgbClr val="30D158"/>
+            <a:srgbClr val="4A9EFF"/>
           </a:solidFill>
           <a:ln>
             <a:noFill/>
@@ -7363,7 +9662,7 @@
                 </a:solidFill>
                 <a:latin typeface="Calibri"/>
               </a:rPr>
-              <a:t>Four models. One price.</a:t>
+              <a:t>Every pricing call rated 0–100</a:t>
             </a:r>
           </a:p>
         </p:txBody>
@@ -7376,8 +9675,8 @@
         </p:nvSpPr>
         <p:spPr>
           <a:xfrm>
-            <a:off x="822960" y="1554480"/>
-            <a:ext cx="5303520" cy="1143000"/>
+            <a:off x="822960" y="1691640"/>
+            <a:ext cx="5943600" cy="3931920"/>
           </a:xfrm>
           <a:prstGeom prst="roundRect">
             <a:avLst/>
@@ -7420,8 +9719,8 @@
         </p:nvSpPr>
         <p:spPr>
           <a:xfrm>
-            <a:off x="1097280" y="1737360"/>
-            <a:ext cx="4754880" cy="502920"/>
+            <a:off x="1005840" y="1828800"/>
+            <a:ext cx="5577840" cy="365760"/>
           </a:xfrm>
           <a:prstGeom prst="rect">
             <a:avLst/>
@@ -7436,27 +9735,69 @@
           <a:p>
             <a:pPr algn="l"/>
             <a:r>
-              <a:rPr sz="2200" b="1">
-                <a:solidFill>
-                  <a:srgbClr val="F0F3F7"/>
-                </a:solidFill>
-                <a:latin typeface="Calibri"/>
-              </a:rPr>
-              <a:t>CLAUDE</a:t>
-            </a:r>
-          </a:p>
-        </p:txBody>
-      </p:sp>
-      <p:sp>
-        <p:nvSpPr>
-          <p:cNvPr id="7" name="TextBox 6"/>
+              <a:rPr sz="1200" b="1">
+                <a:solidFill>
+                  <a:srgbClr val="7A8494"/>
+                </a:solidFill>
+                <a:latin typeface="Calibri"/>
+              </a:rPr>
+              <a:t>CONFIDENCE COMPONENTS</a:t>
+            </a:r>
+          </a:p>
+        </p:txBody>
+      </p:sp>
+      <p:sp>
+        <p:nvSpPr>
+          <p:cNvPr id="7" name="Rounded Rectangle 6"/>
+          <p:cNvSpPr/>
+          <p:nvPr/>
+        </p:nvSpPr>
+        <p:spPr>
+          <a:xfrm>
+            <a:off x="1005840" y="2331720"/>
+            <a:ext cx="5577840" cy="594360"/>
+          </a:xfrm>
+          <a:prstGeom prst="roundRect">
+            <a:avLst/>
+          </a:prstGeom>
+          <a:solidFill>
+            <a:srgbClr val="08101C"/>
+          </a:solidFill>
+          <a:ln>
+            <a:noFill/>
+          </a:ln>
+          <a:effectLst/>
+        </p:spPr>
+        <p:style>
+          <a:lnRef idx="1">
+            <a:schemeClr val="accent1"/>
+          </a:lnRef>
+          <a:fillRef idx="3">
+            <a:schemeClr val="accent1"/>
+          </a:fillRef>
+          <a:effectRef idx="2">
+            <a:schemeClr val="accent1"/>
+          </a:effectRef>
+          <a:fontRef idx="minor">
+            <a:schemeClr val="lt1"/>
+          </a:fontRef>
+        </p:style>
+        <p:txBody>
+          <a:bodyPr rtlCol="0" anchor="ctr"/>
+          <a:lstStyle/>
+          <a:p/>
+        </p:txBody>
+      </p:sp>
+      <p:sp>
+        <p:nvSpPr>
+          <p:cNvPr id="8" name="TextBox 7"/>
           <p:cNvSpPr txBox="1"/>
           <p:nvPr/>
         </p:nvSpPr>
         <p:spPr>
           <a:xfrm>
-            <a:off x="1097280" y="2240280"/>
-            <a:ext cx="4754880" cy="365760"/>
+            <a:off x="1188720" y="2331720"/>
+            <a:ext cx="3840480" cy="594360"/>
           </a:xfrm>
           <a:prstGeom prst="rect">
             <a:avLst/>
@@ -7464,34 +9805,405 @@
           <a:noFill/>
         </p:spPr>
         <p:txBody>
-          <a:bodyPr wrap="square" lIns="0" rIns="0" tIns="0" bIns="0" anchor="t">
+          <a:bodyPr wrap="square" lIns="0" rIns="0" tIns="0" bIns="0" anchor="ctr">
             <a:spAutoFit/>
           </a:bodyPr>
           <a:lstStyle/>
           <a:p>
             <a:pPr algn="l"/>
             <a:r>
-              <a:rPr sz="1200" b="0">
-                <a:solidFill>
-                  <a:srgbClr val="7A8494"/>
-                </a:solidFill>
-                <a:latin typeface="Calibri"/>
-              </a:rPr>
-              <a:t>Anthropic  ·  claude-sonnet-4-6</a:t>
-            </a:r>
-          </a:p>
-        </p:txBody>
-      </p:sp>
-      <p:sp>
-        <p:nvSpPr>
-          <p:cNvPr id="8" name="Rounded Rectangle 7"/>
+              <a:rPr sz="1600" b="0">
+                <a:solidFill>
+                  <a:srgbClr val="F0F3F7"/>
+                </a:solidFill>
+                <a:latin typeface="Calibri"/>
+              </a:rPr>
+              <a:t>Comp density</a:t>
+            </a:r>
+          </a:p>
+        </p:txBody>
+      </p:sp>
+      <p:sp>
+        <p:nvSpPr>
+          <p:cNvPr id="9" name="TextBox 8"/>
+          <p:cNvSpPr txBox="1"/>
+          <p:nvPr/>
+        </p:nvSpPr>
+        <p:spPr>
+          <a:xfrm>
+            <a:off x="5029200" y="2331720"/>
+            <a:ext cx="1463040" cy="594360"/>
+          </a:xfrm>
+          <a:prstGeom prst="rect">
+            <a:avLst/>
+          </a:prstGeom>
+          <a:noFill/>
+        </p:spPr>
+        <p:txBody>
+          <a:bodyPr wrap="square" lIns="0" rIns="0" tIns="0" bIns="0" anchor="ctr">
+            <a:spAutoFit/>
+          </a:bodyPr>
+          <a:lstStyle/>
+          <a:p>
+            <a:pPr algn="r"/>
+            <a:r>
+              <a:rPr sz="1600" b="1">
+                <a:solidFill>
+                  <a:srgbClr val="C8A355"/>
+                </a:solidFill>
+                <a:latin typeface="Calibri"/>
+              </a:rPr>
+              <a:t>40 pts</a:t>
+            </a:r>
+          </a:p>
+        </p:txBody>
+      </p:sp>
+      <p:sp>
+        <p:nvSpPr>
+          <p:cNvPr id="10" name="Rounded Rectangle 9"/>
           <p:cNvSpPr/>
           <p:nvPr/>
         </p:nvSpPr>
         <p:spPr>
           <a:xfrm>
-            <a:off x="6400800" y="1554480"/>
-            <a:ext cx="5303520" cy="1143000"/>
+            <a:off x="1005840" y="3063240"/>
+            <a:ext cx="5577840" cy="594360"/>
+          </a:xfrm>
+          <a:prstGeom prst="roundRect">
+            <a:avLst/>
+          </a:prstGeom>
+          <a:solidFill>
+            <a:srgbClr val="08101C"/>
+          </a:solidFill>
+          <a:ln>
+            <a:noFill/>
+          </a:ln>
+          <a:effectLst/>
+        </p:spPr>
+        <p:style>
+          <a:lnRef idx="1">
+            <a:schemeClr val="accent1"/>
+          </a:lnRef>
+          <a:fillRef idx="3">
+            <a:schemeClr val="accent1"/>
+          </a:fillRef>
+          <a:effectRef idx="2">
+            <a:schemeClr val="accent1"/>
+          </a:effectRef>
+          <a:fontRef idx="minor">
+            <a:schemeClr val="lt1"/>
+          </a:fontRef>
+        </p:style>
+        <p:txBody>
+          <a:bodyPr rtlCol="0" anchor="ctr"/>
+          <a:lstStyle/>
+          <a:p/>
+        </p:txBody>
+      </p:sp>
+      <p:sp>
+        <p:nvSpPr>
+          <p:cNvPr id="11" name="TextBox 10"/>
+          <p:cNvSpPr txBox="1"/>
+          <p:nvPr/>
+        </p:nvSpPr>
+        <p:spPr>
+          <a:xfrm>
+            <a:off x="1188720" y="3063240"/>
+            <a:ext cx="3840480" cy="594360"/>
+          </a:xfrm>
+          <a:prstGeom prst="rect">
+            <a:avLst/>
+          </a:prstGeom>
+          <a:noFill/>
+        </p:spPr>
+        <p:txBody>
+          <a:bodyPr wrap="square" lIns="0" rIns="0" tIns="0" bIns="0" anchor="ctr">
+            <a:spAutoFit/>
+          </a:bodyPr>
+          <a:lstStyle/>
+          <a:p>
+            <a:pPr algn="l"/>
+            <a:r>
+              <a:rPr sz="1600" b="0">
+                <a:solidFill>
+                  <a:srgbClr val="F0F3F7"/>
+                </a:solidFill>
+                <a:latin typeface="Calibri"/>
+              </a:rPr>
+              <a:t>LLM agreement (σ)</a:t>
+            </a:r>
+          </a:p>
+        </p:txBody>
+      </p:sp>
+      <p:sp>
+        <p:nvSpPr>
+          <p:cNvPr id="12" name="TextBox 11"/>
+          <p:cNvSpPr txBox="1"/>
+          <p:nvPr/>
+        </p:nvSpPr>
+        <p:spPr>
+          <a:xfrm>
+            <a:off x="5029200" y="3063240"/>
+            <a:ext cx="1463040" cy="594360"/>
+          </a:xfrm>
+          <a:prstGeom prst="rect">
+            <a:avLst/>
+          </a:prstGeom>
+          <a:noFill/>
+        </p:spPr>
+        <p:txBody>
+          <a:bodyPr wrap="square" lIns="0" rIns="0" tIns="0" bIns="0" anchor="ctr">
+            <a:spAutoFit/>
+          </a:bodyPr>
+          <a:lstStyle/>
+          <a:p>
+            <a:pPr algn="r"/>
+            <a:r>
+              <a:rPr sz="1600" b="1">
+                <a:solidFill>
+                  <a:srgbClr val="4A9EFF"/>
+                </a:solidFill>
+                <a:latin typeface="Calibri"/>
+              </a:rPr>
+              <a:t>30 pts</a:t>
+            </a:r>
+          </a:p>
+        </p:txBody>
+      </p:sp>
+      <p:sp>
+        <p:nvSpPr>
+          <p:cNvPr id="13" name="Rounded Rectangle 12"/>
+          <p:cNvSpPr/>
+          <p:nvPr/>
+        </p:nvSpPr>
+        <p:spPr>
+          <a:xfrm>
+            <a:off x="1005840" y="3794760"/>
+            <a:ext cx="5577840" cy="594360"/>
+          </a:xfrm>
+          <a:prstGeom prst="roundRect">
+            <a:avLst/>
+          </a:prstGeom>
+          <a:solidFill>
+            <a:srgbClr val="08101C"/>
+          </a:solidFill>
+          <a:ln>
+            <a:noFill/>
+          </a:ln>
+          <a:effectLst/>
+        </p:spPr>
+        <p:style>
+          <a:lnRef idx="1">
+            <a:schemeClr val="accent1"/>
+          </a:lnRef>
+          <a:fillRef idx="3">
+            <a:schemeClr val="accent1"/>
+          </a:fillRef>
+          <a:effectRef idx="2">
+            <a:schemeClr val="accent1"/>
+          </a:effectRef>
+          <a:fontRef idx="minor">
+            <a:schemeClr val="lt1"/>
+          </a:fontRef>
+        </p:style>
+        <p:txBody>
+          <a:bodyPr rtlCol="0" anchor="ctr"/>
+          <a:lstStyle/>
+          <a:p/>
+        </p:txBody>
+      </p:sp>
+      <p:sp>
+        <p:nvSpPr>
+          <p:cNvPr id="14" name="TextBox 13"/>
+          <p:cNvSpPr txBox="1"/>
+          <p:nvPr/>
+        </p:nvSpPr>
+        <p:spPr>
+          <a:xfrm>
+            <a:off x="1188720" y="3794760"/>
+            <a:ext cx="3840480" cy="594360"/>
+          </a:xfrm>
+          <a:prstGeom prst="rect">
+            <a:avLst/>
+          </a:prstGeom>
+          <a:noFill/>
+        </p:spPr>
+        <p:txBody>
+          <a:bodyPr wrap="square" lIns="0" rIns="0" tIns="0" bIns="0" anchor="ctr">
+            <a:spAutoFit/>
+          </a:bodyPr>
+          <a:lstStyle/>
+          <a:p>
+            <a:pPr algn="l"/>
+            <a:r>
+              <a:rPr sz="1600" b="0">
+                <a:solidFill>
+                  <a:srgbClr val="F0F3F7"/>
+                </a:solidFill>
+                <a:latin typeface="Calibri"/>
+              </a:rPr>
+              <a:t>12-mo trend stability</a:t>
+            </a:r>
+          </a:p>
+        </p:txBody>
+      </p:sp>
+      <p:sp>
+        <p:nvSpPr>
+          <p:cNvPr id="15" name="TextBox 14"/>
+          <p:cNvSpPr txBox="1"/>
+          <p:nvPr/>
+        </p:nvSpPr>
+        <p:spPr>
+          <a:xfrm>
+            <a:off x="5029200" y="3794760"/>
+            <a:ext cx="1463040" cy="594360"/>
+          </a:xfrm>
+          <a:prstGeom prst="rect">
+            <a:avLst/>
+          </a:prstGeom>
+          <a:noFill/>
+        </p:spPr>
+        <p:txBody>
+          <a:bodyPr wrap="square" lIns="0" rIns="0" tIns="0" bIns="0" anchor="ctr">
+            <a:spAutoFit/>
+          </a:bodyPr>
+          <a:lstStyle/>
+          <a:p>
+            <a:pPr algn="r"/>
+            <a:r>
+              <a:rPr sz="1600" b="1">
+                <a:solidFill>
+                  <a:srgbClr val="30D158"/>
+                </a:solidFill>
+                <a:latin typeface="Calibri"/>
+              </a:rPr>
+              <a:t>15 pts</a:t>
+            </a:r>
+          </a:p>
+        </p:txBody>
+      </p:sp>
+      <p:sp>
+        <p:nvSpPr>
+          <p:cNvPr id="16" name="Rounded Rectangle 15"/>
+          <p:cNvSpPr/>
+          <p:nvPr/>
+        </p:nvSpPr>
+        <p:spPr>
+          <a:xfrm>
+            <a:off x="1005840" y="4526280"/>
+            <a:ext cx="5577840" cy="594360"/>
+          </a:xfrm>
+          <a:prstGeom prst="roundRect">
+            <a:avLst/>
+          </a:prstGeom>
+          <a:solidFill>
+            <a:srgbClr val="08101C"/>
+          </a:solidFill>
+          <a:ln>
+            <a:noFill/>
+          </a:ln>
+          <a:effectLst/>
+        </p:spPr>
+        <p:style>
+          <a:lnRef idx="1">
+            <a:schemeClr val="accent1"/>
+          </a:lnRef>
+          <a:fillRef idx="3">
+            <a:schemeClr val="accent1"/>
+          </a:fillRef>
+          <a:effectRef idx="2">
+            <a:schemeClr val="accent1"/>
+          </a:effectRef>
+          <a:fontRef idx="minor">
+            <a:schemeClr val="lt1"/>
+          </a:fontRef>
+        </p:style>
+        <p:txBody>
+          <a:bodyPr rtlCol="0" anchor="ctr"/>
+          <a:lstStyle/>
+          <a:p/>
+        </p:txBody>
+      </p:sp>
+      <p:sp>
+        <p:nvSpPr>
+          <p:cNvPr id="17" name="TextBox 16"/>
+          <p:cNvSpPr txBox="1"/>
+          <p:nvPr/>
+        </p:nvSpPr>
+        <p:spPr>
+          <a:xfrm>
+            <a:off x="1188720" y="4526280"/>
+            <a:ext cx="3840480" cy="594360"/>
+          </a:xfrm>
+          <a:prstGeom prst="rect">
+            <a:avLst/>
+          </a:prstGeom>
+          <a:noFill/>
+        </p:spPr>
+        <p:txBody>
+          <a:bodyPr wrap="square" lIns="0" rIns="0" tIns="0" bIns="0" anchor="ctr">
+            <a:spAutoFit/>
+          </a:bodyPr>
+          <a:lstStyle/>
+          <a:p>
+            <a:pPr algn="l"/>
+            <a:r>
+              <a:rPr sz="1600" b="0">
+                <a:solidFill>
+                  <a:srgbClr val="F0F3F7"/>
+                </a:solidFill>
+                <a:latin typeface="Calibri"/>
+              </a:rPr>
+              <a:t>Live eBay competition</a:t>
+            </a:r>
+          </a:p>
+        </p:txBody>
+      </p:sp>
+      <p:sp>
+        <p:nvSpPr>
+          <p:cNvPr id="18" name="TextBox 17"/>
+          <p:cNvSpPr txBox="1"/>
+          <p:nvPr/>
+        </p:nvSpPr>
+        <p:spPr>
+          <a:xfrm>
+            <a:off x="5029200" y="4526280"/>
+            <a:ext cx="1463040" cy="594360"/>
+          </a:xfrm>
+          <a:prstGeom prst="rect">
+            <a:avLst/>
+          </a:prstGeom>
+          <a:noFill/>
+        </p:spPr>
+        <p:txBody>
+          <a:bodyPr wrap="square" lIns="0" rIns="0" tIns="0" bIns="0" anchor="ctr">
+            <a:spAutoFit/>
+          </a:bodyPr>
+          <a:lstStyle/>
+          <a:p>
+            <a:pPr algn="r"/>
+            <a:r>
+              <a:rPr sz="1600" b="1">
+                <a:solidFill>
+                  <a:srgbClr val="C8A355"/>
+                </a:solidFill>
+                <a:latin typeface="Calibri"/>
+              </a:rPr>
+              <a:t>15 pts</a:t>
+            </a:r>
+          </a:p>
+        </p:txBody>
+      </p:sp>
+      <p:sp>
+        <p:nvSpPr>
+          <p:cNvPr id="19" name="Rounded Rectangle 18"/>
+          <p:cNvSpPr/>
+          <p:nvPr/>
+        </p:nvSpPr>
+        <p:spPr>
+          <a:xfrm>
+            <a:off x="7040880" y="1691640"/>
+            <a:ext cx="4754880" cy="3931920"/>
           </a:xfrm>
           <a:prstGeom prst="roundRect">
             <a:avLst/>
@@ -7528,94 +10240,24 @@
       </p:sp>
       <p:sp>
         <p:nvSpPr>
-          <p:cNvPr id="9" name="TextBox 8"/>
-          <p:cNvSpPr txBox="1"/>
-          <p:nvPr/>
-        </p:nvSpPr>
-        <p:spPr>
-          <a:xfrm>
-            <a:off x="6675120" y="1737360"/>
-            <a:ext cx="4754880" cy="502920"/>
-          </a:xfrm>
-          <a:prstGeom prst="rect">
-            <a:avLst/>
-          </a:prstGeom>
-          <a:noFill/>
-        </p:spPr>
-        <p:txBody>
-          <a:bodyPr wrap="square" lIns="0" rIns="0" tIns="0" bIns="0" anchor="t">
-            <a:spAutoFit/>
-          </a:bodyPr>
-          <a:lstStyle/>
-          <a:p>
-            <a:pPr algn="l"/>
-            <a:r>
-              <a:rPr sz="2200" b="1">
-                <a:solidFill>
-                  <a:srgbClr val="F0F3F7"/>
-                </a:solidFill>
-                <a:latin typeface="Calibri"/>
-              </a:rPr>
-              <a:t>GPT-4o</a:t>
-            </a:r>
-          </a:p>
-        </p:txBody>
-      </p:sp>
-      <p:sp>
-        <p:nvSpPr>
-          <p:cNvPr id="10" name="TextBox 9"/>
-          <p:cNvSpPr txBox="1"/>
-          <p:nvPr/>
-        </p:nvSpPr>
-        <p:spPr>
-          <a:xfrm>
-            <a:off x="6675120" y="2240280"/>
-            <a:ext cx="4754880" cy="365760"/>
-          </a:xfrm>
-          <a:prstGeom prst="rect">
-            <a:avLst/>
-          </a:prstGeom>
-          <a:noFill/>
-        </p:spPr>
-        <p:txBody>
-          <a:bodyPr wrap="square" lIns="0" rIns="0" tIns="0" bIns="0" anchor="t">
-            <a:spAutoFit/>
-          </a:bodyPr>
-          <a:lstStyle/>
-          <a:p>
-            <a:pPr algn="l"/>
-            <a:r>
-              <a:rPr sz="1200" b="0">
-                <a:solidFill>
-                  <a:srgbClr val="7A8494"/>
-                </a:solidFill>
-                <a:latin typeface="Calibri"/>
-              </a:rPr>
-              <a:t>OpenAI</a:t>
-            </a:r>
-          </a:p>
-        </p:txBody>
-      </p:sp>
-      <p:sp>
-        <p:nvSpPr>
-          <p:cNvPr id="11" name="Rounded Rectangle 10"/>
+          <p:cNvPr id="20" name="Rounded Rectangle 19"/>
           <p:cNvSpPr/>
           <p:nvPr/>
         </p:nvSpPr>
         <p:spPr>
           <a:xfrm>
-            <a:off x="822960" y="2880360"/>
-            <a:ext cx="5303520" cy="1143000"/>
+            <a:off x="7223760" y="1874519"/>
+            <a:ext cx="1371600" cy="411480"/>
           </a:xfrm>
           <a:prstGeom prst="roundRect">
             <a:avLst/>
           </a:prstGeom>
           <a:solidFill>
-            <a:srgbClr val="121E2F"/>
+            <a:srgbClr val="08101C"/>
           </a:solidFill>
           <a:ln w="12700">
             <a:solidFill>
-              <a:srgbClr val="C8A355"/>
+              <a:srgbClr val="30D158"/>
             </a:solidFill>
           </a:ln>
           <a:effectLst/>
@@ -7642,14 +10284,14 @@
       </p:sp>
       <p:sp>
         <p:nvSpPr>
-          <p:cNvPr id="12" name="TextBox 11"/>
+          <p:cNvPr id="21" name="TextBox 20"/>
           <p:cNvSpPr txBox="1"/>
           <p:nvPr/>
         </p:nvSpPr>
         <p:spPr>
           <a:xfrm>
-            <a:off x="1097280" y="3063240"/>
-            <a:ext cx="4754880" cy="502920"/>
+            <a:off x="7223760" y="1874519"/>
+            <a:ext cx="1371600" cy="411480"/>
           </a:xfrm>
           <a:prstGeom prst="rect">
             <a:avLst/>
@@ -7657,79 +10299,44 @@
           <a:noFill/>
         </p:spPr>
         <p:txBody>
-          <a:bodyPr wrap="square" lIns="0" rIns="0" tIns="0" bIns="0" anchor="t">
+          <a:bodyPr wrap="square" lIns="0" rIns="0" tIns="0" bIns="0" anchor="ctr">
             <a:spAutoFit/>
           </a:bodyPr>
           <a:lstStyle/>
           <a:p>
-            <a:pPr algn="l"/>
-            <a:r>
-              <a:rPr sz="2200" b="1">
-                <a:solidFill>
-                  <a:srgbClr val="F0F3F7"/>
-                </a:solidFill>
-                <a:latin typeface="Calibri"/>
-              </a:rPr>
-              <a:t>GEMINI 2.0 FLASH</a:t>
-            </a:r>
-          </a:p>
-        </p:txBody>
-      </p:sp>
-      <p:sp>
-        <p:nvSpPr>
-          <p:cNvPr id="13" name="TextBox 12"/>
-          <p:cNvSpPr txBox="1"/>
-          <p:nvPr/>
-        </p:nvSpPr>
-        <p:spPr>
-          <a:xfrm>
-            <a:off x="1097280" y="3566160"/>
-            <a:ext cx="4754880" cy="365760"/>
-          </a:xfrm>
-          <a:prstGeom prst="rect">
-            <a:avLst/>
-          </a:prstGeom>
-          <a:noFill/>
-        </p:spPr>
-        <p:txBody>
-          <a:bodyPr wrap="square" lIns="0" rIns="0" tIns="0" bIns="0" anchor="t">
-            <a:spAutoFit/>
-          </a:bodyPr>
-          <a:lstStyle/>
-          <a:p>
-            <a:pPr algn="l"/>
-            <a:r>
-              <a:rPr sz="1200" b="0">
-                <a:solidFill>
-                  <a:srgbClr val="7A8494"/>
-                </a:solidFill>
-                <a:latin typeface="Calibri"/>
-              </a:rPr>
-              <a:t>Google</a:t>
-            </a:r>
-          </a:p>
-        </p:txBody>
-      </p:sp>
-      <p:sp>
-        <p:nvSpPr>
-          <p:cNvPr id="14" name="Rounded Rectangle 13"/>
+            <a:pPr algn="ctr"/>
+            <a:r>
+              <a:rPr sz="1100" b="1">
+                <a:solidFill>
+                  <a:srgbClr val="30D158"/>
+                </a:solidFill>
+                <a:latin typeface="Calibri"/>
+              </a:rPr>
+              <a:t>HIGH 70+</a:t>
+            </a:r>
+          </a:p>
+        </p:txBody>
+      </p:sp>
+      <p:sp>
+        <p:nvSpPr>
+          <p:cNvPr id="22" name="Rounded Rectangle 21"/>
           <p:cNvSpPr/>
           <p:nvPr/>
         </p:nvSpPr>
         <p:spPr>
           <a:xfrm>
-            <a:off x="6400800" y="2880360"/>
-            <a:ext cx="5303520" cy="1143000"/>
+            <a:off x="8686800" y="1874519"/>
+            <a:ext cx="1371600" cy="411480"/>
           </a:xfrm>
           <a:prstGeom prst="roundRect">
             <a:avLst/>
           </a:prstGeom>
           <a:solidFill>
-            <a:srgbClr val="121E2F"/>
+            <a:srgbClr val="08101C"/>
           </a:solidFill>
           <a:ln w="12700">
             <a:solidFill>
-              <a:srgbClr val="4A9EFF"/>
+              <a:srgbClr val="FFB330"/>
             </a:solidFill>
           </a:ln>
           <a:effectLst/>
@@ -7756,14 +10363,163 @@
       </p:sp>
       <p:sp>
         <p:nvSpPr>
-          <p:cNvPr id="15" name="TextBox 14"/>
+          <p:cNvPr id="23" name="TextBox 22"/>
           <p:cNvSpPr txBox="1"/>
           <p:nvPr/>
         </p:nvSpPr>
         <p:spPr>
           <a:xfrm>
-            <a:off x="6675120" y="3063240"/>
-            <a:ext cx="4754880" cy="502920"/>
+            <a:off x="8686800" y="1874519"/>
+            <a:ext cx="1371600" cy="411480"/>
+          </a:xfrm>
+          <a:prstGeom prst="rect">
+            <a:avLst/>
+          </a:prstGeom>
+          <a:noFill/>
+        </p:spPr>
+        <p:txBody>
+          <a:bodyPr wrap="square" lIns="0" rIns="0" tIns="0" bIns="0" anchor="ctr">
+            <a:spAutoFit/>
+          </a:bodyPr>
+          <a:lstStyle/>
+          <a:p>
+            <a:pPr algn="ctr"/>
+            <a:r>
+              <a:rPr sz="1100" b="1">
+                <a:solidFill>
+                  <a:srgbClr val="FFB330"/>
+                </a:solidFill>
+                <a:latin typeface="Calibri"/>
+              </a:rPr>
+              <a:t>MED 40–69</a:t>
+            </a:r>
+          </a:p>
+        </p:txBody>
+      </p:sp>
+      <p:sp>
+        <p:nvSpPr>
+          <p:cNvPr id="24" name="Rounded Rectangle 23"/>
+          <p:cNvSpPr/>
+          <p:nvPr/>
+        </p:nvSpPr>
+        <p:spPr>
+          <a:xfrm>
+            <a:off x="10149840" y="1874519"/>
+            <a:ext cx="1371600" cy="411480"/>
+          </a:xfrm>
+          <a:prstGeom prst="roundRect">
+            <a:avLst/>
+          </a:prstGeom>
+          <a:solidFill>
+            <a:srgbClr val="08101C"/>
+          </a:solidFill>
+          <a:ln w="12700">
+            <a:solidFill>
+              <a:srgbClr val="FF5A5A"/>
+            </a:solidFill>
+          </a:ln>
+          <a:effectLst/>
+        </p:spPr>
+        <p:style>
+          <a:lnRef idx="1">
+            <a:schemeClr val="accent1"/>
+          </a:lnRef>
+          <a:fillRef idx="3">
+            <a:schemeClr val="accent1"/>
+          </a:fillRef>
+          <a:effectRef idx="2">
+            <a:schemeClr val="accent1"/>
+          </a:effectRef>
+          <a:fontRef idx="minor">
+            <a:schemeClr val="lt1"/>
+          </a:fontRef>
+        </p:style>
+        <p:txBody>
+          <a:bodyPr rtlCol="0" anchor="ctr"/>
+          <a:lstStyle/>
+          <a:p/>
+        </p:txBody>
+      </p:sp>
+      <p:sp>
+        <p:nvSpPr>
+          <p:cNvPr id="25" name="TextBox 24"/>
+          <p:cNvSpPr txBox="1"/>
+          <p:nvPr/>
+        </p:nvSpPr>
+        <p:spPr>
+          <a:xfrm>
+            <a:off x="10149840" y="1874519"/>
+            <a:ext cx="1371600" cy="411480"/>
+          </a:xfrm>
+          <a:prstGeom prst="rect">
+            <a:avLst/>
+          </a:prstGeom>
+          <a:noFill/>
+        </p:spPr>
+        <p:txBody>
+          <a:bodyPr wrap="square" lIns="0" rIns="0" tIns="0" bIns="0" anchor="ctr">
+            <a:spAutoFit/>
+          </a:bodyPr>
+          <a:lstStyle/>
+          <a:p>
+            <a:pPr algn="ctr"/>
+            <a:r>
+              <a:rPr sz="1100" b="1">
+                <a:solidFill>
+                  <a:srgbClr val="FF5A5A"/>
+                </a:solidFill>
+                <a:latin typeface="Calibri"/>
+              </a:rPr>
+              <a:t>LOW &lt;40</a:t>
+            </a:r>
+          </a:p>
+        </p:txBody>
+      </p:sp>
+      <p:sp>
+        <p:nvSpPr>
+          <p:cNvPr id="26" name="TextBox 25"/>
+          <p:cNvSpPr txBox="1"/>
+          <p:nvPr/>
+        </p:nvSpPr>
+        <p:spPr>
+          <a:xfrm>
+            <a:off x="7223760" y="2514600"/>
+            <a:ext cx="4480560" cy="1097280"/>
+          </a:xfrm>
+          <a:prstGeom prst="rect">
+            <a:avLst/>
+          </a:prstGeom>
+          <a:noFill/>
+        </p:spPr>
+        <p:txBody>
+          <a:bodyPr wrap="square" lIns="0" rIns="0" tIns="0" bIns="0" anchor="ctr">
+            <a:spAutoFit/>
+          </a:bodyPr>
+          <a:lstStyle/>
+          <a:p>
+            <a:pPr algn="ctr"/>
+            <a:r>
+              <a:rPr sz="7600" b="1">
+                <a:solidFill>
+                  <a:srgbClr val="30D158"/>
+                </a:solidFill>
+                <a:latin typeface="Calibri"/>
+              </a:rPr>
+              <a:t>85 / 100</a:t>
+            </a:r>
+          </a:p>
+        </p:txBody>
+      </p:sp>
+      <p:sp>
+        <p:nvSpPr>
+          <p:cNvPr id="27" name="TextBox 26"/>
+          <p:cNvSpPr txBox="1"/>
+          <p:nvPr/>
+        </p:nvSpPr>
+        <p:spPr>
+          <a:xfrm>
+            <a:off x="7223760" y="3611880"/>
+            <a:ext cx="4480560" cy="365760"/>
           </a:xfrm>
           <a:prstGeom prst="rect">
             <a:avLst/>
@@ -7776,29 +10532,29 @@
           </a:bodyPr>
           <a:lstStyle/>
           <a:p>
-            <a:pPr algn="l"/>
-            <a:r>
-              <a:rPr sz="2200" b="1">
-                <a:solidFill>
-                  <a:srgbClr val="F0F3F7"/>
-                </a:solidFill>
-                <a:latin typeface="Calibri"/>
-              </a:rPr>
-              <a:t>GROK 3</a:t>
-            </a:r>
-          </a:p>
-        </p:txBody>
-      </p:sp>
-      <p:sp>
-        <p:nvSpPr>
-          <p:cNvPr id="16" name="TextBox 15"/>
+            <a:pPr algn="ctr"/>
+            <a:r>
+              <a:rPr sz="1400" b="0">
+                <a:solidFill>
+                  <a:srgbClr val="7A8494"/>
+                </a:solidFill>
+                <a:latin typeface="Calibri"/>
+              </a:rPr>
+              <a:t>HIGH confidence</a:t>
+            </a:r>
+          </a:p>
+        </p:txBody>
+      </p:sp>
+      <p:sp>
+        <p:nvSpPr>
+          <p:cNvPr id="28" name="TextBox 27"/>
           <p:cNvSpPr txBox="1"/>
           <p:nvPr/>
         </p:nvSpPr>
         <p:spPr>
           <a:xfrm>
-            <a:off x="6675120" y="3566160"/>
-            <a:ext cx="4754880" cy="365760"/>
+            <a:off x="7223760" y="4160520"/>
+            <a:ext cx="4480560" cy="1371600"/>
           </a:xfrm>
           <a:prstGeom prst="rect">
             <a:avLst/>
@@ -7811,29 +10567,81 @@
           </a:bodyPr>
           <a:lstStyle/>
           <a:p>
-            <a:pPr algn="l"/>
+            <a:pPr algn="l">
+              <a:lnSpc>
+                <a:spcPct val="130000"/>
+              </a:lnSpc>
+            </a:pPr>
+            <a:r>
+              <a:rPr sz="1100" b="1">
+                <a:solidFill>
+                  <a:srgbClr val="7A8494"/>
+                </a:solidFill>
+                <a:latin typeface="Calibri"/>
+              </a:rPr>
+              <a:t>reasoning_chain:</a:t>
+            </a:r>
+          </a:p>
+          <a:p>
+            <a:pPr algn="l">
+              <a:lnSpc>
+                <a:spcPct val="130000"/>
+              </a:lnSpc>
+            </a:pPr>
             <a:r>
               <a:rPr sz="1200" b="0">
                 <a:solidFill>
-                  <a:srgbClr val="7A8494"/>
-                </a:solidFill>
-                <a:latin typeface="Calibri"/>
-              </a:rPr>
-              <a:t>xAI</a:t>
-            </a:r>
-          </a:p>
-        </p:txBody>
-      </p:sp>
-      <p:sp>
-        <p:nvSpPr>
-          <p:cNvPr id="17" name="TextBox 16"/>
+                  <a:srgbClr val="F0F3F7"/>
+                </a:solidFill>
+                <a:latin typeface="Calibri"/>
+              </a:rPr>
+              <a:t>•  18 comps, p75 = $385</a:t>
+            </a:r>
+          </a:p>
+          <a:p>
+            <a:pPr algn="l">
+              <a:lnSpc>
+                <a:spcPct val="130000"/>
+              </a:lnSpc>
+            </a:pPr>
+            <a:r>
+              <a:rPr sz="1200" b="0">
+                <a:solidFill>
+                  <a:srgbClr val="F0F3F7"/>
+                </a:solidFill>
+                <a:latin typeface="Calibri"/>
+              </a:rPr>
+              <a:t>•  4-LLM σ = $14 (tight)</a:t>
+            </a:r>
+          </a:p>
+          <a:p>
+            <a:pPr algn="l">
+              <a:lnSpc>
+                <a:spcPct val="130000"/>
+              </a:lnSpc>
+            </a:pPr>
+            <a:r>
+              <a:rPr sz="1200" b="0">
+                <a:solidFill>
+                  <a:srgbClr val="F0F3F7"/>
+                </a:solidFill>
+                <a:latin typeface="Calibri"/>
+              </a:rPr>
+              <a:t>•  12-mo trend flat ±3%</a:t>
+            </a:r>
+          </a:p>
+        </p:txBody>
+      </p:sp>
+      <p:sp>
+        <p:nvSpPr>
+          <p:cNvPr id="29" name="TextBox 28"/>
           <p:cNvSpPr txBox="1"/>
           <p:nvPr/>
         </p:nvSpPr>
         <p:spPr>
           <a:xfrm>
-            <a:off x="822960" y="4480560"/>
-            <a:ext cx="10972800" cy="1645920"/>
+            <a:off x="822960" y="5852160"/>
+            <a:ext cx="10515600" cy="457200"/>
           </a:xfrm>
           <a:prstGeom prst="rect">
             <a:avLst/>
@@ -7846,109 +10654,22 @@
           </a:bodyPr>
           <a:lstStyle/>
           <a:p>
-            <a:pPr algn="l">
-              <a:lnSpc>
-                <a:spcPct val="135000"/>
-              </a:lnSpc>
-            </a:pPr>
+            <a:pPr algn="ctr"/>
             <a:r>
               <a:rPr sz="1400" b="0">
                 <a:solidFill>
-                  <a:srgbClr val="F0F3F7"/>
-                </a:solidFill>
-                <a:latin typeface="Calibri"/>
-              </a:rPr>
-              <a:t>•  Same prompt to each: title, artist, your price, comp stats, recent sales, supply count</a:t>
-            </a:r>
-          </a:p>
-          <a:p>
-            <a:pPr algn="l">
-              <a:lnSpc>
-                <a:spcPct val="135000"/>
-              </a:lnSpc>
-            </a:pPr>
-            <a:r>
-              <a:rPr sz="1400" b="0">
-                <a:solidFill>
-                  <a:srgbClr val="F0F3F7"/>
-                </a:solidFill>
-                <a:latin typeface="Calibri"/>
-              </a:rPr>
-              <a:t>•  Fans out in parallel (5–10s wall clock)</a:t>
-            </a:r>
-          </a:p>
-          <a:p>
-            <a:pPr algn="l">
-              <a:lnSpc>
-                <a:spcPct val="135000"/>
-              </a:lnSpc>
-            </a:pPr>
-            <a:r>
-              <a:rPr sz="1400" b="0">
-                <a:solidFill>
-                  <a:srgbClr val="F0F3F7"/>
-                </a:solidFill>
-                <a:latin typeface="Calibri"/>
-              </a:rPr>
-              <a:t>•  Cached per (listing_id, comp_median bucket) — invalidates only when comp_median shifts ≥$10</a:t>
-            </a:r>
-          </a:p>
-          <a:p>
-            <a:pPr algn="l">
-              <a:lnSpc>
-                <a:spcPct val="135000"/>
-              </a:lnSpc>
-            </a:pPr>
-            <a:r>
-              <a:rPr sz="1400" b="0">
-                <a:solidFill>
-                  <a:srgbClr val="F0F3F7"/>
-                </a:solidFill>
-                <a:latin typeface="Calibri"/>
-              </a:rPr>
-              <a:t>•  Consensus = median of valid prices</a:t>
-            </a:r>
-          </a:p>
-        </p:txBody>
-      </p:sp>
-      <p:sp>
-        <p:nvSpPr>
-          <p:cNvPr id="18" name="TextBox 17"/>
-          <p:cNvSpPr txBox="1"/>
-          <p:nvPr/>
-        </p:nvSpPr>
-        <p:spPr>
-          <a:xfrm>
-            <a:off x="822960" y="6172200"/>
-            <a:ext cx="10515600" cy="365760"/>
-          </a:xfrm>
-          <a:prstGeom prst="rect">
-            <a:avLst/>
-          </a:prstGeom>
-          <a:noFill/>
-        </p:spPr>
-        <p:txBody>
-          <a:bodyPr wrap="square" lIns="0" rIns="0" tIns="0" bIns="0" anchor="t">
-            <a:spAutoFit/>
-          </a:bodyPr>
-          <a:lstStyle/>
-          <a:p>
-            <a:pPr algn="ctr"/>
-            <a:r>
-              <a:rPr sz="1500" b="1">
-                <a:solidFill>
                   <a:srgbClr val="C8A355"/>
                 </a:solidFill>
                 <a:latin typeface="Calibri"/>
               </a:rPr>
-              <a:t>~$0.01–0.02 per item  ·  cached until comps move</a:t>
-            </a:r>
-          </a:p>
-        </p:txBody>
-      </p:sp>
-      <p:sp>
-        <p:nvSpPr>
-          <p:cNvPr id="19" name="TextBox 18"/>
+              <a:t>Every review exposes a reasoning_chain — click "Why?" to see every ingredient</a:t>
+            </a:r>
+          </a:p>
+        </p:txBody>
+      </p:sp>
+      <p:sp>
+        <p:nvSpPr>
+          <p:cNvPr id="30" name="TextBox 29"/>
           <p:cNvSpPr txBox="1"/>
           <p:nvPr/>
         </p:nvSpPr>
@@ -8129,8 +10850,8 @@
         </p:nvSpPr>
         <p:spPr>
           <a:xfrm>
-            <a:off x="822960" y="1737360"/>
-            <a:ext cx="6766560" cy="4389120"/>
+            <a:off x="822960" y="1691640"/>
+            <a:ext cx="7040880" cy="4389120"/>
           </a:xfrm>
           <a:prstGeom prst="rect">
             <a:avLst/>
@@ -8145,11 +10866,11 @@
           <a:p>
             <a:pPr algn="l">
               <a:lnSpc>
-                <a:spcPct val="155000"/>
+                <a:spcPct val="145000"/>
               </a:lnSpc>
             </a:pPr>
             <a:r>
-              <a:rPr sz="1800" b="0">
+              <a:rPr sz="1700" b="0">
                 <a:solidFill>
                   <a:srgbClr val="F0F3F7"/>
                 </a:solidFill>
@@ -8161,27 +10882,27 @@
           <a:p>
             <a:pPr algn="l">
               <a:lnSpc>
-                <a:spcPct val="155000"/>
+                <a:spcPct val="145000"/>
               </a:lnSpc>
             </a:pPr>
             <a:r>
-              <a:rPr sz="1800" b="0">
+              <a:rPr sz="1700" b="0">
                 <a:solidFill>
                   <a:srgbClr val="F0F3F7"/>
                 </a:solidFill>
                 <a:latin typeface="Calibri"/>
               </a:rPr>
-              <a:t>•  Two tabs per card: Comps (histogram + year trend + recent sales) · LLM Consensus (4 model cards + Match button)</a:t>
+              <a:t>•  Three tabs per card: Comps · LLM Consensus · Train Comps (NEW)</a:t>
             </a:r>
           </a:p>
           <a:p>
             <a:pPr algn="l">
               <a:lnSpc>
-                <a:spcPct val="155000"/>
+                <a:spcPct val="145000"/>
               </a:lnSpc>
             </a:pPr>
             <a:r>
-              <a:rPr sz="1800" b="0">
+              <a:rPr sz="1700" b="0">
                 <a:solidFill>
                   <a:srgbClr val="F0F3F7"/>
                 </a:solidFill>
@@ -8193,17 +10914,33 @@
           <a:p>
             <a:pPr algn="l">
               <a:lnSpc>
-                <a:spcPct val="155000"/>
+                <a:spcPct val="145000"/>
               </a:lnSpc>
             </a:pPr>
             <a:r>
-              <a:rPr sz="1800" b="0">
+              <a:rPr sz="1700" b="0">
                 <a:solidFill>
                   <a:srgbClr val="F0F3F7"/>
                 </a:solidFill>
                 <a:latin typeface="Calibri"/>
               </a:rPr>
-              <a:t>•  "Match Consensus" auto-pushes the price to eBay in one click</a:t>
+              <a:t>•  "Match Consensus" auto-pushes price to eBay in one click</a:t>
+            </a:r>
+          </a:p>
+          <a:p>
+            <a:pPr algn="l">
+              <a:lnSpc>
+                <a:spcPct val="145000"/>
+              </a:lnSpc>
+            </a:pPr>
+            <a:r>
+              <a:rPr sz="1700" b="0">
+                <a:solidFill>
+                  <a:srgbClr val="F0F3F7"/>
+                </a:solidFill>
+                <a:latin typeface="Calibri"/>
+              </a:rPr>
+              <a:t>•  Train Comps tab: swipe individual comps to curate the dataset</a:t>
             </a:r>
           </a:p>
         </p:txBody>
@@ -8216,8 +10953,8 @@
         </p:nvSpPr>
         <p:spPr>
           <a:xfrm>
-            <a:off x="8229600" y="1645920"/>
-            <a:ext cx="3291840" cy="4572000"/>
+            <a:off x="8229600" y="1600200"/>
+            <a:ext cx="3291840" cy="4754880"/>
           </a:xfrm>
           <a:prstGeom prst="roundRect">
             <a:avLst/>
@@ -8260,8 +10997,8 @@
         </p:nvSpPr>
         <p:spPr>
           <a:xfrm>
-            <a:off x="8412480" y="1874520"/>
-            <a:ext cx="2926080" cy="1005840"/>
+            <a:off x="8412480" y="1783080"/>
+            <a:ext cx="2926080" cy="777240"/>
           </a:xfrm>
           <a:prstGeom prst="roundRect">
             <a:avLst/>
@@ -8302,8 +11039,8 @@
         </p:nvSpPr>
         <p:spPr>
           <a:xfrm>
-            <a:off x="8412480" y="1874520"/>
-            <a:ext cx="2926080" cy="1005840"/>
+            <a:off x="8412480" y="1783080"/>
+            <a:ext cx="2926080" cy="777240"/>
           </a:xfrm>
           <a:prstGeom prst="rect">
             <a:avLst/>
@@ -8318,7 +11055,7 @@
           <a:p>
             <a:pPr algn="ctr"/>
             <a:r>
-              <a:rPr sz="1200" b="1">
+              <a:rPr sz="1100" b="1">
                 <a:solidFill>
                   <a:srgbClr val="F0F3F7"/>
                 </a:solidFill>
@@ -8330,7 +11067,7 @@
           <a:p>
             <a:pPr algn="ctr"/>
             <a:r>
-              <a:rPr sz="1200" b="1">
+              <a:rPr sz="1100" b="1">
                 <a:solidFill>
                   <a:srgbClr val="F0F3F7"/>
                 </a:solidFill>
@@ -8349,8 +11086,85 @@
         </p:nvSpPr>
         <p:spPr>
           <a:xfrm>
-            <a:off x="8412480" y="3063240"/>
-            <a:ext cx="2926080" cy="2103120"/>
+            <a:off x="8412480" y="2697480"/>
+            <a:ext cx="2926080" cy="457200"/>
+          </a:xfrm>
+          <a:prstGeom prst="roundRect">
+            <a:avLst/>
+          </a:prstGeom>
+          <a:solidFill>
+            <a:srgbClr val="08101C"/>
+          </a:solidFill>
+          <a:ln>
+            <a:noFill/>
+          </a:ln>
+          <a:effectLst/>
+        </p:spPr>
+        <p:style>
+          <a:lnRef idx="1">
+            <a:schemeClr val="accent1"/>
+          </a:lnRef>
+          <a:fillRef idx="3">
+            <a:schemeClr val="accent1"/>
+          </a:fillRef>
+          <a:effectRef idx="2">
+            <a:schemeClr val="accent1"/>
+          </a:effectRef>
+          <a:fontRef idx="minor">
+            <a:schemeClr val="lt1"/>
+          </a:fontRef>
+        </p:style>
+        <p:txBody>
+          <a:bodyPr rtlCol="0" anchor="ctr"/>
+          <a:lstStyle/>
+          <a:p/>
+        </p:txBody>
+      </p:sp>
+      <p:sp>
+        <p:nvSpPr>
+          <p:cNvPr id="10" name="TextBox 9"/>
+          <p:cNvSpPr txBox="1"/>
+          <p:nvPr/>
+        </p:nvSpPr>
+        <p:spPr>
+          <a:xfrm>
+            <a:off x="8412480" y="2697480"/>
+            <a:ext cx="2926080" cy="457200"/>
+          </a:xfrm>
+          <a:prstGeom prst="rect">
+            <a:avLst/>
+          </a:prstGeom>
+          <a:noFill/>
+        </p:spPr>
+        <p:txBody>
+          <a:bodyPr wrap="square" lIns="0" rIns="0" tIns="0" bIns="0" anchor="ctr">
+            <a:spAutoFit/>
+          </a:bodyPr>
+          <a:lstStyle/>
+          <a:p>
+            <a:pPr algn="ctr"/>
+            <a:r>
+              <a:rPr sz="1000" b="1">
+                <a:solidFill>
+                  <a:srgbClr val="C8A355"/>
+                </a:solidFill>
+                <a:latin typeface="Calibri"/>
+              </a:rPr>
+              <a:t>TABS  ·  Comps | LLM | Train</a:t>
+            </a:r>
+          </a:p>
+        </p:txBody>
+      </p:sp>
+      <p:sp>
+        <p:nvSpPr>
+          <p:cNvPr id="11" name="Rounded Rectangle 10"/>
+          <p:cNvSpPr/>
+          <p:nvPr/>
+        </p:nvSpPr>
+        <p:spPr>
+          <a:xfrm>
+            <a:off x="8412480" y="3291840"/>
+            <a:ext cx="2926080" cy="2194560"/>
           </a:xfrm>
           <a:prstGeom prst="roundRect">
             <a:avLst/>
@@ -8385,14 +11199,14 @@
       </p:sp>
       <p:sp>
         <p:nvSpPr>
-          <p:cNvPr id="10" name="TextBox 9"/>
+          <p:cNvPr id="12" name="TextBox 11"/>
           <p:cNvSpPr txBox="1"/>
           <p:nvPr/>
         </p:nvSpPr>
         <p:spPr>
           <a:xfrm>
-            <a:off x="8412480" y="3063240"/>
-            <a:ext cx="2926080" cy="2103120"/>
+            <a:off x="8412480" y="3291840"/>
+            <a:ext cx="2926080" cy="2194560"/>
           </a:xfrm>
           <a:prstGeom prst="rect">
             <a:avLst/>
@@ -8407,39 +11221,63 @@
           <a:p>
             <a:pPr algn="ctr"/>
             <a:r>
-              <a:rPr sz="1200" b="1">
-                <a:solidFill>
-                  <a:srgbClr val="C8A355"/>
-                </a:solidFill>
-                <a:latin typeface="Calibri"/>
-              </a:rPr>
-              <a:t>TABS</a:t>
+              <a:rPr sz="1000" b="1">
+                <a:solidFill>
+                  <a:srgbClr val="F0F3F7"/>
+                </a:solidFill>
+                <a:latin typeface="Calibri"/>
+              </a:rPr>
+              <a:t>BODY</a:t>
             </a:r>
           </a:p>
           <a:p>
             <a:pPr algn="ctr"/>
             <a:r>
-              <a:rPr sz="1200" b="1">
-                <a:solidFill>
-                  <a:srgbClr val="C8A355"/>
-                </a:solidFill>
-                <a:latin typeface="Calibri"/>
-              </a:rPr>
-              <a:t>Comps · LLM Consensus</a:t>
-            </a:r>
-          </a:p>
-        </p:txBody>
-      </p:sp>
-      <p:sp>
-        <p:nvSpPr>
-          <p:cNvPr id="11" name="Rounded Rectangle 10"/>
+              <a:rPr sz="1000" b="1">
+                <a:solidFill>
+                  <a:srgbClr val="F0F3F7"/>
+                </a:solidFill>
+                <a:latin typeface="Calibri"/>
+              </a:rPr>
+              <a:t>histogram · year trend</a:t>
+            </a:r>
+          </a:p>
+          <a:p>
+            <a:pPr algn="ctr"/>
+            <a:r>
+              <a:rPr sz="1000" b="1">
+                <a:solidFill>
+                  <a:srgbClr val="F0F3F7"/>
+                </a:solidFill>
+                <a:latin typeface="Calibri"/>
+              </a:rPr>
+              <a:t>4 LLM range cards</a:t>
+            </a:r>
+          </a:p>
+          <a:p>
+            <a:pPr algn="ctr"/>
+            <a:r>
+              <a:rPr sz="1000" b="1">
+                <a:solidFill>
+                  <a:srgbClr val="F0F3F7"/>
+                </a:solidFill>
+                <a:latin typeface="Calibri"/>
+              </a:rPr>
+              <a:t>comp curation stack</a:t>
+            </a:r>
+          </a:p>
+        </p:txBody>
+      </p:sp>
+      <p:sp>
+        <p:nvSpPr>
+          <p:cNvPr id="13" name="Rounded Rectangle 12"/>
           <p:cNvSpPr/>
           <p:nvPr/>
         </p:nvSpPr>
         <p:spPr>
           <a:xfrm>
-            <a:off x="8412480" y="5349240"/>
-            <a:ext cx="2926080" cy="640080"/>
+            <a:off x="8412480" y="5623560"/>
+            <a:ext cx="2926080" cy="594360"/>
           </a:xfrm>
           <a:prstGeom prst="roundRect">
             <a:avLst/>
@@ -8474,14 +11312,14 @@
       </p:sp>
       <p:sp>
         <p:nvSpPr>
-          <p:cNvPr id="12" name="TextBox 11"/>
+          <p:cNvPr id="14" name="TextBox 13"/>
           <p:cNvSpPr txBox="1"/>
           <p:nvPr/>
         </p:nvSpPr>
         <p:spPr>
           <a:xfrm>
-            <a:off x="8412480" y="5349240"/>
-            <a:ext cx="2926080" cy="640080"/>
+            <a:off x="8412480" y="5623560"/>
+            <a:ext cx="2926080" cy="594360"/>
           </a:xfrm>
           <a:prstGeom prst="rect">
             <a:avLst/>
@@ -8496,7 +11334,7 @@
           <a:p>
             <a:pPr algn="ctr"/>
             <a:r>
-              <a:rPr sz="1200" b="1">
+              <a:rPr sz="1100" b="1">
                 <a:solidFill>
                   <a:srgbClr val="30D158"/>
                 </a:solidFill>
@@ -8509,7 +11347,7 @@
       </p:sp>
       <p:sp>
         <p:nvSpPr>
-          <p:cNvPr id="13" name="TextBox 12"/>
+          <p:cNvPr id="15" name="TextBox 14"/>
           <p:cNvSpPr txBox="1"/>
           <p:nvPr/>
         </p:nvSpPr>
@@ -8619,7 +11457,7 @@
             <a:avLst/>
           </a:prstGeom>
           <a:solidFill>
-            <a:srgbClr val="C8A355"/>
+            <a:srgbClr val="30D158"/>
           </a:solidFill>
           <a:ln>
             <a:noFill/>
@@ -8677,27 +11515,62 @@
                 </a:solidFill>
                 <a:latin typeface="Calibri"/>
               </a:rPr>
-              <a:t>Under the hood</a:t>
-            </a:r>
-          </a:p>
-        </p:txBody>
-      </p:sp>
-      <p:sp>
-        <p:nvSpPr>
-          <p:cNvPr id="5" name="Rounded Rectangle 4"/>
+              <a:t>Top pricing upsides, ranked</a:t>
+            </a:r>
+          </a:p>
+        </p:txBody>
+      </p:sp>
+      <p:sp>
+        <p:nvSpPr>
+          <p:cNvPr id="5" name="TextBox 4"/>
+          <p:cNvSpPr txBox="1"/>
+          <p:nvPr/>
+        </p:nvSpPr>
+        <p:spPr>
+          <a:xfrm>
+            <a:off x="822960" y="1645920"/>
+            <a:ext cx="10515600" cy="457200"/>
+          </a:xfrm>
+          <a:prstGeom prst="rect">
+            <a:avLst/>
+          </a:prstGeom>
+          <a:noFill/>
+        </p:spPr>
+        <p:txBody>
+          <a:bodyPr wrap="square" lIns="0" rIns="0" tIns="0" bIns="0" anchor="t">
+            <a:spAutoFit/>
+          </a:bodyPr>
+          <a:lstStyle/>
+          <a:p>
+            <a:pPr algn="l"/>
+            <a:r>
+              <a:rPr sz="1600" b="0">
+                <a:solidFill>
+                  <a:srgbClr val="7A8494"/>
+                </a:solidFill>
+                <a:latin typeface="Calibri"/>
+              </a:rPr>
+              <a:t>GET /api/opportunities — top 10 underpriced items, ready to reprice</a:t>
+            </a:r>
+          </a:p>
+        </p:txBody>
+      </p:sp>
+      <p:sp>
+        <p:nvSpPr>
+          <p:cNvPr id="6" name="Rounded Rectangle 5"/>
           <p:cNvSpPr/>
           <p:nvPr/>
         </p:nvSpPr>
         <p:spPr>
           <a:xfrm>
-            <a:off x="4632807" y="3108960"/>
-            <a:ext cx="2926080" cy="1371600"/>
+            <a:off x="822960" y="2286000"/>
+            <a:ext cx="10515600" cy="914400"/>
           </a:xfrm>
           <a:prstGeom prst="roundRect">
             <a:avLst/>
           </a:prstGeom>
           <a:solidFill>
-            <a:srgbClr val="121E2F"/>
+            <a:srgbClr val="08101C"/>
           </a:solidFill>
           <a:ln w="12700">
             <a:solidFill>
@@ -8728,14 +11601,14 @@
       </p:sp>
       <p:sp>
         <p:nvSpPr>
-          <p:cNvPr id="6" name="TextBox 5"/>
+          <p:cNvPr id="7" name="TextBox 6"/>
           <p:cNvSpPr txBox="1"/>
           <p:nvPr/>
         </p:nvSpPr>
         <p:spPr>
           <a:xfrm>
-            <a:off x="4632807" y="3108960"/>
-            <a:ext cx="2926080" cy="1371600"/>
+            <a:off x="822960" y="2286000"/>
+            <a:ext cx="10515600" cy="914400"/>
           </a:xfrm>
           <a:prstGeom prst="rect">
             <a:avLst/>
@@ -8750,50 +11623,107 @@
           <a:p>
             <a:pPr algn="ctr"/>
             <a:r>
-              <a:rPr sz="1600" b="1">
+              <a:rPr sz="1800" b="1">
+                <a:solidFill>
+                  <a:srgbClr val="30D158"/>
+                </a:solidFill>
+                <a:latin typeface="Consolas"/>
+              </a:rPr>
+              <a:t>rank = (comp_median − your_price) × (1 + comp_count / 20) × confidence</a:t>
+            </a:r>
+          </a:p>
+        </p:txBody>
+      </p:sp>
+      <p:sp>
+        <p:nvSpPr>
+          <p:cNvPr id="8" name="TextBox 7"/>
+          <p:cNvSpPr txBox="1"/>
+          <p:nvPr/>
+        </p:nvSpPr>
+        <p:spPr>
+          <a:xfrm>
+            <a:off x="822960" y="3520440"/>
+            <a:ext cx="10515600" cy="1828800"/>
+          </a:xfrm>
+          <a:prstGeom prst="rect">
+            <a:avLst/>
+          </a:prstGeom>
+          <a:noFill/>
+        </p:spPr>
+        <p:txBody>
+          <a:bodyPr wrap="square" lIns="0" rIns="0" tIns="0" bIns="0" anchor="t">
+            <a:spAutoFit/>
+          </a:bodyPr>
+          <a:lstStyle/>
+          <a:p>
+            <a:pPr algn="l">
+              <a:lnSpc>
+                <a:spcPct val="140000"/>
+              </a:lnSpc>
+            </a:pPr>
+            <a:r>
+              <a:rPr sz="1600" b="0">
                 <a:solidFill>
                   <a:srgbClr val="F0F3F7"/>
                 </a:solidFill>
                 <a:latin typeface="Calibri"/>
               </a:rPr>
-              <a:t>Flask app</a:t>
-            </a:r>
-          </a:p>
-          <a:p>
-            <a:pPr algn="ctr"/>
-            <a:r>
-              <a:rPr sz="1600" b="1">
+              <a:t>•  Ranks every listing by weighted upside × comp density × confidence</a:t>
+            </a:r>
+          </a:p>
+          <a:p>
+            <a:pPr algn="l">
+              <a:lnSpc>
+                <a:spcPct val="140000"/>
+              </a:lnSpc>
+            </a:pPr>
+            <a:r>
+              <a:rPr sz="1600" b="0">
                 <a:solidFill>
                   <a:srgbClr val="F0F3F7"/>
                 </a:solidFill>
                 <a:latin typeface="Calibri"/>
               </a:rPr>
-              <a:t>app.py (14k lines)</a:t>
-            </a:r>
-          </a:p>
-        </p:txBody>
-      </p:sp>
-      <p:sp>
-        <p:nvSpPr>
-          <p:cNvPr id="7" name="Rounded Rectangle 6"/>
+              <a:t>•  One-click deep link straight into Swipe Mode on the opportunity item</a:t>
+            </a:r>
+          </a:p>
+          <a:p>
+            <a:pPr algn="l">
+              <a:lnSpc>
+                <a:spcPct val="140000"/>
+              </a:lnSpc>
+            </a:pPr>
+            <a:r>
+              <a:rPr sz="1600" b="0">
+                <a:solidFill>
+                  <a:srgbClr val="F0F3F7"/>
+                </a:solidFill>
+                <a:latin typeface="Calibri"/>
+              </a:rPr>
+              <a:t>•  Filter by artist, min confidence, min upside %</a:t>
+            </a:r>
+          </a:p>
+        </p:txBody>
+      </p:sp>
+      <p:sp>
+        <p:nvSpPr>
+          <p:cNvPr id="9" name="Rounded Rectangle 8"/>
           <p:cNvSpPr/>
           <p:nvPr/>
         </p:nvSpPr>
         <p:spPr>
           <a:xfrm>
-            <a:off x="457200" y="1554480"/>
-            <a:ext cx="2286000" cy="1005840"/>
+            <a:off x="822960" y="5532120"/>
+            <a:ext cx="10515600" cy="868680"/>
           </a:xfrm>
           <a:prstGeom prst="roundRect">
             <a:avLst/>
           </a:prstGeom>
           <a:solidFill>
-            <a:srgbClr val="121E2F"/>
+            <a:srgbClr val="15243A"/>
           </a:solidFill>
-          <a:ln w="12700">
-            <a:solidFill>
-              <a:srgbClr val="C8A355"/>
-            </a:solidFill>
+          <a:ln>
+            <a:noFill/>
           </a:ln>
           <a:effectLst/>
         </p:spPr>
@@ -8819,14 +11749,14 @@
       </p:sp>
       <p:sp>
         <p:nvSpPr>
-          <p:cNvPr id="8" name="TextBox 7"/>
+          <p:cNvPr id="10" name="TextBox 9"/>
           <p:cNvSpPr txBox="1"/>
           <p:nvPr/>
         </p:nvSpPr>
         <p:spPr>
           <a:xfrm>
-            <a:off x="457200" y="1554480"/>
-            <a:ext cx="2286000" cy="1005840"/>
+            <a:off x="822960" y="5532120"/>
+            <a:ext cx="10515600" cy="868680"/>
           </a:xfrm>
           <a:prstGeom prst="rect">
             <a:avLst/>
@@ -8841,854 +11771,20 @@
           <a:p>
             <a:pPr algn="ctr"/>
             <a:r>
-              <a:rPr sz="1300" b="1">
-                <a:solidFill>
-                  <a:srgbClr val="F0F3F7"/>
-                </a:solidFill>
-                <a:latin typeface="Calibri"/>
-              </a:rPr>
-              <a:t>eBay Trading API</a:t>
-            </a:r>
-          </a:p>
-        </p:txBody>
-      </p:sp>
-      <p:sp>
-        <p:nvSpPr>
-          <p:cNvPr id="9" name="Right Arrow 8"/>
-          <p:cNvSpPr/>
-          <p:nvPr/>
-        </p:nvSpPr>
-        <p:spPr>
-          <a:xfrm>
-            <a:off x="2788920" y="1965960"/>
-            <a:ext cx="1813887" cy="201168"/>
-          </a:xfrm>
-          <a:prstGeom prst="rightArrow">
-            <a:avLst/>
-          </a:prstGeom>
-          <a:solidFill>
-            <a:srgbClr val="C8A355"/>
-          </a:solidFill>
-          <a:ln>
-            <a:noFill/>
-          </a:ln>
-        </p:spPr>
-        <p:style>
-          <a:lnRef idx="1">
-            <a:schemeClr val="accent1"/>
-          </a:lnRef>
-          <a:fillRef idx="3">
-            <a:schemeClr val="accent1"/>
-          </a:fillRef>
-          <a:effectRef idx="2">
-            <a:schemeClr val="accent1"/>
-          </a:effectRef>
-          <a:fontRef idx="minor">
-            <a:schemeClr val="lt1"/>
-          </a:fontRef>
-        </p:style>
-        <p:txBody>
-          <a:bodyPr rtlCol="0" anchor="ctr"/>
-          <a:lstStyle/>
-          <a:p>
-            <a:pPr algn="ctr"/>
-          </a:p>
-        </p:txBody>
-      </p:sp>
-      <p:sp>
-        <p:nvSpPr>
-          <p:cNvPr id="10" name="Rounded Rectangle 9"/>
-          <p:cNvSpPr/>
-          <p:nvPr/>
-        </p:nvSpPr>
-        <p:spPr>
-          <a:xfrm>
-            <a:off x="457200" y="3017520"/>
-            <a:ext cx="2286000" cy="1005840"/>
-          </a:xfrm>
-          <a:prstGeom prst="roundRect">
-            <a:avLst/>
-          </a:prstGeom>
-          <a:solidFill>
-            <a:srgbClr val="121E2F"/>
-          </a:solidFill>
-          <a:ln w="12700">
-            <a:solidFill>
-              <a:srgbClr val="C8A355"/>
-            </a:solidFill>
-          </a:ln>
-          <a:effectLst/>
-        </p:spPr>
-        <p:style>
-          <a:lnRef idx="1">
-            <a:schemeClr val="accent1"/>
-          </a:lnRef>
-          <a:fillRef idx="3">
-            <a:schemeClr val="accent1"/>
-          </a:fillRef>
-          <a:effectRef idx="2">
-            <a:schemeClr val="accent1"/>
-          </a:effectRef>
-          <a:fontRef idx="minor">
-            <a:schemeClr val="lt1"/>
-          </a:fontRef>
-        </p:style>
-        <p:txBody>
-          <a:bodyPr rtlCol="0" anchor="ctr"/>
-          <a:lstStyle/>
-          <a:p/>
+              <a:rPr sz="2000" b="1">
+                <a:solidFill>
+                  <a:srgbClr val="C8A355"/>
+                </a:solidFill>
+                <a:latin typeface="Calibri"/>
+              </a:rPr>
+              <a:t>Stop clicking 200 listings. Start with the 10 that matter.</a:t>
+            </a:r>
+          </a:p>
         </p:txBody>
       </p:sp>
       <p:sp>
         <p:nvSpPr>
           <p:cNvPr id="11" name="TextBox 10"/>
-          <p:cNvSpPr txBox="1"/>
-          <p:nvPr/>
-        </p:nvSpPr>
-        <p:spPr>
-          <a:xfrm>
-            <a:off x="457200" y="3017520"/>
-            <a:ext cx="2286000" cy="1005840"/>
-          </a:xfrm>
-          <a:prstGeom prst="rect">
-            <a:avLst/>
-          </a:prstGeom>
-          <a:noFill/>
-        </p:spPr>
-        <p:txBody>
-          <a:bodyPr wrap="square" lIns="0" rIns="0" tIns="0" bIns="0" anchor="ctr">
-            <a:spAutoFit/>
-          </a:bodyPr>
-          <a:lstStyle/>
-          <a:p>
-            <a:pPr algn="ctr"/>
-            <a:r>
-              <a:rPr sz="1300" b="1">
-                <a:solidFill>
-                  <a:srgbClr val="F0F3F7"/>
-                </a:solidFill>
-                <a:latin typeface="Calibri"/>
-              </a:rPr>
-              <a:t>Google Sheets</a:t>
-            </a:r>
-          </a:p>
-          <a:p>
-            <a:pPr algn="ctr"/>
-            <a:r>
-              <a:rPr sz="1300" b="1">
-                <a:solidFill>
-                  <a:srgbClr val="F0F3F7"/>
-                </a:solidFill>
-                <a:latin typeface="Calibri"/>
-              </a:rPr>
-              <a:t>(pricing rules)</a:t>
-            </a:r>
-          </a:p>
-        </p:txBody>
-      </p:sp>
-      <p:sp>
-        <p:nvSpPr>
-          <p:cNvPr id="12" name="Right Arrow 11"/>
-          <p:cNvSpPr/>
-          <p:nvPr/>
-        </p:nvSpPr>
-        <p:spPr>
-          <a:xfrm>
-            <a:off x="2788920" y="3429000"/>
-            <a:ext cx="1813887" cy="201168"/>
-          </a:xfrm>
-          <a:prstGeom prst="rightArrow">
-            <a:avLst/>
-          </a:prstGeom>
-          <a:solidFill>
-            <a:srgbClr val="C8A355"/>
-          </a:solidFill>
-          <a:ln>
-            <a:noFill/>
-          </a:ln>
-        </p:spPr>
-        <p:style>
-          <a:lnRef idx="1">
-            <a:schemeClr val="accent1"/>
-          </a:lnRef>
-          <a:fillRef idx="3">
-            <a:schemeClr val="accent1"/>
-          </a:fillRef>
-          <a:effectRef idx="2">
-            <a:schemeClr val="accent1"/>
-          </a:effectRef>
-          <a:fontRef idx="minor">
-            <a:schemeClr val="lt1"/>
-          </a:fontRef>
-        </p:style>
-        <p:txBody>
-          <a:bodyPr rtlCol="0" anchor="ctr"/>
-          <a:lstStyle/>
-          <a:p>
-            <a:pPr algn="ctr"/>
-          </a:p>
-        </p:txBody>
-      </p:sp>
-      <p:sp>
-        <p:nvSpPr>
-          <p:cNvPr id="13" name="Rounded Rectangle 12"/>
-          <p:cNvSpPr/>
-          <p:nvPr/>
-        </p:nvSpPr>
-        <p:spPr>
-          <a:xfrm>
-            <a:off x="457200" y="4480560"/>
-            <a:ext cx="2286000" cy="1005840"/>
-          </a:xfrm>
-          <a:prstGeom prst="roundRect">
-            <a:avLst/>
-          </a:prstGeom>
-          <a:solidFill>
-            <a:srgbClr val="121E2F"/>
-          </a:solidFill>
-          <a:ln w="12700">
-            <a:solidFill>
-              <a:srgbClr val="C8A355"/>
-            </a:solidFill>
-          </a:ln>
-          <a:effectLst/>
-        </p:spPr>
-        <p:style>
-          <a:lnRef idx="1">
-            <a:schemeClr val="accent1"/>
-          </a:lnRef>
-          <a:fillRef idx="3">
-            <a:schemeClr val="accent1"/>
-          </a:fillRef>
-          <a:effectRef idx="2">
-            <a:schemeClr val="accent1"/>
-          </a:effectRef>
-          <a:fontRef idx="minor">
-            <a:schemeClr val="lt1"/>
-          </a:fontRef>
-        </p:style>
-        <p:txBody>
-          <a:bodyPr rtlCol="0" anchor="ctr"/>
-          <a:lstStyle/>
-          <a:p/>
-        </p:txBody>
-      </p:sp>
-      <p:sp>
-        <p:nvSpPr>
-          <p:cNvPr id="14" name="TextBox 13"/>
-          <p:cNvSpPr txBox="1"/>
-          <p:nvPr/>
-        </p:nvSpPr>
-        <p:spPr>
-          <a:xfrm>
-            <a:off x="457200" y="4480560"/>
-            <a:ext cx="2286000" cy="1005840"/>
-          </a:xfrm>
-          <a:prstGeom prst="rect">
-            <a:avLst/>
-          </a:prstGeom>
-          <a:noFill/>
-        </p:spPr>
-        <p:txBody>
-          <a:bodyPr wrap="square" lIns="0" rIns="0" tIns="0" bIns="0" anchor="ctr">
-            <a:spAutoFit/>
-          </a:bodyPr>
-          <a:lstStyle/>
-          <a:p>
-            <a:pPr algn="ctr"/>
-            <a:r>
-              <a:rPr sz="1300" b="1">
-                <a:solidFill>
-                  <a:srgbClr val="F0F3F7"/>
-                </a:solidFill>
-                <a:latin typeface="Calibri"/>
-              </a:rPr>
-              <a:t>54k comp DB</a:t>
-            </a:r>
-          </a:p>
-          <a:p>
-            <a:pPr algn="ctr"/>
-            <a:r>
-              <a:rPr sz="1300" b="1">
-                <a:solidFill>
-                  <a:srgbClr val="F0F3F7"/>
-                </a:solidFill>
-                <a:latin typeface="Calibri"/>
-              </a:rPr>
-              <a:t>(data/*.json)</a:t>
-            </a:r>
-          </a:p>
-        </p:txBody>
-      </p:sp>
-      <p:sp>
-        <p:nvSpPr>
-          <p:cNvPr id="15" name="Right Arrow 14"/>
-          <p:cNvSpPr/>
-          <p:nvPr/>
-        </p:nvSpPr>
-        <p:spPr>
-          <a:xfrm>
-            <a:off x="2788920" y="4892040"/>
-            <a:ext cx="1813887" cy="201168"/>
-          </a:xfrm>
-          <a:prstGeom prst="rightArrow">
-            <a:avLst/>
-          </a:prstGeom>
-          <a:solidFill>
-            <a:srgbClr val="C8A355"/>
-          </a:solidFill>
-          <a:ln>
-            <a:noFill/>
-          </a:ln>
-        </p:spPr>
-        <p:style>
-          <a:lnRef idx="1">
-            <a:schemeClr val="accent1"/>
-          </a:lnRef>
-          <a:fillRef idx="3">
-            <a:schemeClr val="accent1"/>
-          </a:fillRef>
-          <a:effectRef idx="2">
-            <a:schemeClr val="accent1"/>
-          </a:effectRef>
-          <a:fontRef idx="minor">
-            <a:schemeClr val="lt1"/>
-          </a:fontRef>
-        </p:style>
-        <p:txBody>
-          <a:bodyPr rtlCol="0" anchor="ctr"/>
-          <a:lstStyle/>
-          <a:p>
-            <a:pPr algn="ctr"/>
-          </a:p>
-        </p:txBody>
-      </p:sp>
-      <p:sp>
-        <p:nvSpPr>
-          <p:cNvPr id="16" name="Rounded Rectangle 15"/>
-          <p:cNvSpPr/>
-          <p:nvPr/>
-        </p:nvSpPr>
-        <p:spPr>
-          <a:xfrm>
-            <a:off x="9418320" y="1417320"/>
-            <a:ext cx="2286000" cy="822960"/>
-          </a:xfrm>
-          <a:prstGeom prst="roundRect">
-            <a:avLst/>
-          </a:prstGeom>
-          <a:solidFill>
-            <a:srgbClr val="121E2F"/>
-          </a:solidFill>
-          <a:ln w="12700">
-            <a:solidFill>
-              <a:srgbClr val="30D158"/>
-            </a:solidFill>
-          </a:ln>
-          <a:effectLst/>
-        </p:spPr>
-        <p:style>
-          <a:lnRef idx="1">
-            <a:schemeClr val="accent1"/>
-          </a:lnRef>
-          <a:fillRef idx="3">
-            <a:schemeClr val="accent1"/>
-          </a:fillRef>
-          <a:effectRef idx="2">
-            <a:schemeClr val="accent1"/>
-          </a:effectRef>
-          <a:fontRef idx="minor">
-            <a:schemeClr val="lt1"/>
-          </a:fontRef>
-        </p:style>
-        <p:txBody>
-          <a:bodyPr rtlCol="0" anchor="ctr"/>
-          <a:lstStyle/>
-          <a:p/>
-        </p:txBody>
-      </p:sp>
-      <p:sp>
-        <p:nvSpPr>
-          <p:cNvPr id="17" name="TextBox 16"/>
-          <p:cNvSpPr txBox="1"/>
-          <p:nvPr/>
-        </p:nvSpPr>
-        <p:spPr>
-          <a:xfrm>
-            <a:off x="9418320" y="1417320"/>
-            <a:ext cx="2286000" cy="822960"/>
-          </a:xfrm>
-          <a:prstGeom prst="rect">
-            <a:avLst/>
-          </a:prstGeom>
-          <a:noFill/>
-        </p:spPr>
-        <p:txBody>
-          <a:bodyPr wrap="square" lIns="0" rIns="0" tIns="0" bIns="0" anchor="ctr">
-            <a:spAutoFit/>
-          </a:bodyPr>
-          <a:lstStyle/>
-          <a:p>
-            <a:pPr algn="ctr"/>
-            <a:r>
-              <a:rPr sz="1300" b="1">
-                <a:solidFill>
-                  <a:srgbClr val="F0F3F7"/>
-                </a:solidFill>
-                <a:latin typeface="Calibri"/>
-              </a:rPr>
-              <a:t>Claude API</a:t>
-            </a:r>
-          </a:p>
-        </p:txBody>
-      </p:sp>
-      <p:sp>
-        <p:nvSpPr>
-          <p:cNvPr id="18" name="Right Arrow 17"/>
-          <p:cNvSpPr/>
-          <p:nvPr/>
-        </p:nvSpPr>
-        <p:spPr>
-          <a:xfrm>
-            <a:off x="7588887" y="1737360"/>
-            <a:ext cx="1799432" cy="201168"/>
-          </a:xfrm>
-          <a:prstGeom prst="rightArrow">
-            <a:avLst/>
-          </a:prstGeom>
-          <a:solidFill>
-            <a:srgbClr val="30D158"/>
-          </a:solidFill>
-          <a:ln>
-            <a:noFill/>
-          </a:ln>
-        </p:spPr>
-        <p:style>
-          <a:lnRef idx="1">
-            <a:schemeClr val="accent1"/>
-          </a:lnRef>
-          <a:fillRef idx="3">
-            <a:schemeClr val="accent1"/>
-          </a:fillRef>
-          <a:effectRef idx="2">
-            <a:schemeClr val="accent1"/>
-          </a:effectRef>
-          <a:fontRef idx="minor">
-            <a:schemeClr val="lt1"/>
-          </a:fontRef>
-        </p:style>
-        <p:txBody>
-          <a:bodyPr rtlCol="0" anchor="ctr"/>
-          <a:lstStyle/>
-          <a:p>
-            <a:pPr algn="ctr"/>
-          </a:p>
-        </p:txBody>
-      </p:sp>
-      <p:sp>
-        <p:nvSpPr>
-          <p:cNvPr id="19" name="Rounded Rectangle 18"/>
-          <p:cNvSpPr/>
-          <p:nvPr/>
-        </p:nvSpPr>
-        <p:spPr>
-          <a:xfrm>
-            <a:off x="9418320" y="2606040"/>
-            <a:ext cx="2286000" cy="822960"/>
-          </a:xfrm>
-          <a:prstGeom prst="roundRect">
-            <a:avLst/>
-          </a:prstGeom>
-          <a:solidFill>
-            <a:srgbClr val="121E2F"/>
-          </a:solidFill>
-          <a:ln w="12700">
-            <a:solidFill>
-              <a:srgbClr val="30D158"/>
-            </a:solidFill>
-          </a:ln>
-          <a:effectLst/>
-        </p:spPr>
-        <p:style>
-          <a:lnRef idx="1">
-            <a:schemeClr val="accent1"/>
-          </a:lnRef>
-          <a:fillRef idx="3">
-            <a:schemeClr val="accent1"/>
-          </a:fillRef>
-          <a:effectRef idx="2">
-            <a:schemeClr val="accent1"/>
-          </a:effectRef>
-          <a:fontRef idx="minor">
-            <a:schemeClr val="lt1"/>
-          </a:fontRef>
-        </p:style>
-        <p:txBody>
-          <a:bodyPr rtlCol="0" anchor="ctr"/>
-          <a:lstStyle/>
-          <a:p/>
-        </p:txBody>
-      </p:sp>
-      <p:sp>
-        <p:nvSpPr>
-          <p:cNvPr id="20" name="TextBox 19"/>
-          <p:cNvSpPr txBox="1"/>
-          <p:nvPr/>
-        </p:nvSpPr>
-        <p:spPr>
-          <a:xfrm>
-            <a:off x="9418320" y="2606040"/>
-            <a:ext cx="2286000" cy="822960"/>
-          </a:xfrm>
-          <a:prstGeom prst="rect">
-            <a:avLst/>
-          </a:prstGeom>
-          <a:noFill/>
-        </p:spPr>
-        <p:txBody>
-          <a:bodyPr wrap="square" lIns="0" rIns="0" tIns="0" bIns="0" anchor="ctr">
-            <a:spAutoFit/>
-          </a:bodyPr>
-          <a:lstStyle/>
-          <a:p>
-            <a:pPr algn="ctr"/>
-            <a:r>
-              <a:rPr sz="1300" b="1">
-                <a:solidFill>
-                  <a:srgbClr val="F0F3F7"/>
-                </a:solidFill>
-                <a:latin typeface="Calibri"/>
-              </a:rPr>
-              <a:t>OpenAI API</a:t>
-            </a:r>
-          </a:p>
-        </p:txBody>
-      </p:sp>
-      <p:sp>
-        <p:nvSpPr>
-          <p:cNvPr id="21" name="Right Arrow 20"/>
-          <p:cNvSpPr/>
-          <p:nvPr/>
-        </p:nvSpPr>
-        <p:spPr>
-          <a:xfrm>
-            <a:off x="7588887" y="2926080"/>
-            <a:ext cx="1799432" cy="201168"/>
-          </a:xfrm>
-          <a:prstGeom prst="rightArrow">
-            <a:avLst/>
-          </a:prstGeom>
-          <a:solidFill>
-            <a:srgbClr val="30D158"/>
-          </a:solidFill>
-          <a:ln>
-            <a:noFill/>
-          </a:ln>
-        </p:spPr>
-        <p:style>
-          <a:lnRef idx="1">
-            <a:schemeClr val="accent1"/>
-          </a:lnRef>
-          <a:fillRef idx="3">
-            <a:schemeClr val="accent1"/>
-          </a:fillRef>
-          <a:effectRef idx="2">
-            <a:schemeClr val="accent1"/>
-          </a:effectRef>
-          <a:fontRef idx="minor">
-            <a:schemeClr val="lt1"/>
-          </a:fontRef>
-        </p:style>
-        <p:txBody>
-          <a:bodyPr rtlCol="0" anchor="ctr"/>
-          <a:lstStyle/>
-          <a:p>
-            <a:pPr algn="ctr"/>
-          </a:p>
-        </p:txBody>
-      </p:sp>
-      <p:sp>
-        <p:nvSpPr>
-          <p:cNvPr id="22" name="Rounded Rectangle 21"/>
-          <p:cNvSpPr/>
-          <p:nvPr/>
-        </p:nvSpPr>
-        <p:spPr>
-          <a:xfrm>
-            <a:off x="9418320" y="3794760"/>
-            <a:ext cx="2286000" cy="822960"/>
-          </a:xfrm>
-          <a:prstGeom prst="roundRect">
-            <a:avLst/>
-          </a:prstGeom>
-          <a:solidFill>
-            <a:srgbClr val="121E2F"/>
-          </a:solidFill>
-          <a:ln w="12700">
-            <a:solidFill>
-              <a:srgbClr val="30D158"/>
-            </a:solidFill>
-          </a:ln>
-          <a:effectLst/>
-        </p:spPr>
-        <p:style>
-          <a:lnRef idx="1">
-            <a:schemeClr val="accent1"/>
-          </a:lnRef>
-          <a:fillRef idx="3">
-            <a:schemeClr val="accent1"/>
-          </a:fillRef>
-          <a:effectRef idx="2">
-            <a:schemeClr val="accent1"/>
-          </a:effectRef>
-          <a:fontRef idx="minor">
-            <a:schemeClr val="lt1"/>
-          </a:fontRef>
-        </p:style>
-        <p:txBody>
-          <a:bodyPr rtlCol="0" anchor="ctr"/>
-          <a:lstStyle/>
-          <a:p/>
-        </p:txBody>
-      </p:sp>
-      <p:sp>
-        <p:nvSpPr>
-          <p:cNvPr id="23" name="TextBox 22"/>
-          <p:cNvSpPr txBox="1"/>
-          <p:nvPr/>
-        </p:nvSpPr>
-        <p:spPr>
-          <a:xfrm>
-            <a:off x="9418320" y="3794760"/>
-            <a:ext cx="2286000" cy="822960"/>
-          </a:xfrm>
-          <a:prstGeom prst="rect">
-            <a:avLst/>
-          </a:prstGeom>
-          <a:noFill/>
-        </p:spPr>
-        <p:txBody>
-          <a:bodyPr wrap="square" lIns="0" rIns="0" tIns="0" bIns="0" anchor="ctr">
-            <a:spAutoFit/>
-          </a:bodyPr>
-          <a:lstStyle/>
-          <a:p>
-            <a:pPr algn="ctr"/>
-            <a:r>
-              <a:rPr sz="1300" b="1">
-                <a:solidFill>
-                  <a:srgbClr val="F0F3F7"/>
-                </a:solidFill>
-                <a:latin typeface="Calibri"/>
-              </a:rPr>
-              <a:t>Gemini API</a:t>
-            </a:r>
-          </a:p>
-        </p:txBody>
-      </p:sp>
-      <p:sp>
-        <p:nvSpPr>
-          <p:cNvPr id="24" name="Right Arrow 23"/>
-          <p:cNvSpPr/>
-          <p:nvPr/>
-        </p:nvSpPr>
-        <p:spPr>
-          <a:xfrm>
-            <a:off x="7588887" y="4114800"/>
-            <a:ext cx="1799432" cy="201168"/>
-          </a:xfrm>
-          <a:prstGeom prst="rightArrow">
-            <a:avLst/>
-          </a:prstGeom>
-          <a:solidFill>
-            <a:srgbClr val="30D158"/>
-          </a:solidFill>
-          <a:ln>
-            <a:noFill/>
-          </a:ln>
-        </p:spPr>
-        <p:style>
-          <a:lnRef idx="1">
-            <a:schemeClr val="accent1"/>
-          </a:lnRef>
-          <a:fillRef idx="3">
-            <a:schemeClr val="accent1"/>
-          </a:fillRef>
-          <a:effectRef idx="2">
-            <a:schemeClr val="accent1"/>
-          </a:effectRef>
-          <a:fontRef idx="minor">
-            <a:schemeClr val="lt1"/>
-          </a:fontRef>
-        </p:style>
-        <p:txBody>
-          <a:bodyPr rtlCol="0" anchor="ctr"/>
-          <a:lstStyle/>
-          <a:p>
-            <a:pPr algn="ctr"/>
-          </a:p>
-        </p:txBody>
-      </p:sp>
-      <p:sp>
-        <p:nvSpPr>
-          <p:cNvPr id="25" name="Rounded Rectangle 24"/>
-          <p:cNvSpPr/>
-          <p:nvPr/>
-        </p:nvSpPr>
-        <p:spPr>
-          <a:xfrm>
-            <a:off x="9418320" y="4983480"/>
-            <a:ext cx="2286000" cy="822960"/>
-          </a:xfrm>
-          <a:prstGeom prst="roundRect">
-            <a:avLst/>
-          </a:prstGeom>
-          <a:solidFill>
-            <a:srgbClr val="121E2F"/>
-          </a:solidFill>
-          <a:ln w="12700">
-            <a:solidFill>
-              <a:srgbClr val="30D158"/>
-            </a:solidFill>
-          </a:ln>
-          <a:effectLst/>
-        </p:spPr>
-        <p:style>
-          <a:lnRef idx="1">
-            <a:schemeClr val="accent1"/>
-          </a:lnRef>
-          <a:fillRef idx="3">
-            <a:schemeClr val="accent1"/>
-          </a:fillRef>
-          <a:effectRef idx="2">
-            <a:schemeClr val="accent1"/>
-          </a:effectRef>
-          <a:fontRef idx="minor">
-            <a:schemeClr val="lt1"/>
-          </a:fontRef>
-        </p:style>
-        <p:txBody>
-          <a:bodyPr rtlCol="0" anchor="ctr"/>
-          <a:lstStyle/>
-          <a:p/>
-        </p:txBody>
-      </p:sp>
-      <p:sp>
-        <p:nvSpPr>
-          <p:cNvPr id="26" name="TextBox 25"/>
-          <p:cNvSpPr txBox="1"/>
-          <p:nvPr/>
-        </p:nvSpPr>
-        <p:spPr>
-          <a:xfrm>
-            <a:off x="9418320" y="4983480"/>
-            <a:ext cx="2286000" cy="822960"/>
-          </a:xfrm>
-          <a:prstGeom prst="rect">
-            <a:avLst/>
-          </a:prstGeom>
-          <a:noFill/>
-        </p:spPr>
-        <p:txBody>
-          <a:bodyPr wrap="square" lIns="0" rIns="0" tIns="0" bIns="0" anchor="ctr">
-            <a:spAutoFit/>
-          </a:bodyPr>
-          <a:lstStyle/>
-          <a:p>
-            <a:pPr algn="ctr"/>
-            <a:r>
-              <a:rPr sz="1300" b="1">
-                <a:solidFill>
-                  <a:srgbClr val="F0F3F7"/>
-                </a:solidFill>
-                <a:latin typeface="Calibri"/>
-              </a:rPr>
-              <a:t>Grok API</a:t>
-            </a:r>
-          </a:p>
-        </p:txBody>
-      </p:sp>
-      <p:sp>
-        <p:nvSpPr>
-          <p:cNvPr id="27" name="Right Arrow 26"/>
-          <p:cNvSpPr/>
-          <p:nvPr/>
-        </p:nvSpPr>
-        <p:spPr>
-          <a:xfrm>
-            <a:off x="7588887" y="5303520"/>
-            <a:ext cx="1799432" cy="201168"/>
-          </a:xfrm>
-          <a:prstGeom prst="rightArrow">
-            <a:avLst/>
-          </a:prstGeom>
-          <a:solidFill>
-            <a:srgbClr val="30D158"/>
-          </a:solidFill>
-          <a:ln>
-            <a:noFill/>
-          </a:ln>
-        </p:spPr>
-        <p:style>
-          <a:lnRef idx="1">
-            <a:schemeClr val="accent1"/>
-          </a:lnRef>
-          <a:fillRef idx="3">
-            <a:schemeClr val="accent1"/>
-          </a:fillRef>
-          <a:effectRef idx="2">
-            <a:schemeClr val="accent1"/>
-          </a:effectRef>
-          <a:fontRef idx="minor">
-            <a:schemeClr val="lt1"/>
-          </a:fontRef>
-        </p:style>
-        <p:txBody>
-          <a:bodyPr rtlCol="0" anchor="ctr"/>
-          <a:lstStyle/>
-          <a:p>
-            <a:pPr algn="ctr"/>
-          </a:p>
-        </p:txBody>
-      </p:sp>
-      <p:sp>
-        <p:nvSpPr>
-          <p:cNvPr id="28" name="TextBox 27"/>
-          <p:cNvSpPr txBox="1"/>
-          <p:nvPr/>
-        </p:nvSpPr>
-        <p:spPr>
-          <a:xfrm>
-            <a:off x="822960" y="6126480"/>
-            <a:ext cx="10515600" cy="365760"/>
-          </a:xfrm>
-          <a:prstGeom prst="rect">
-            <a:avLst/>
-          </a:prstGeom>
-          <a:noFill/>
-        </p:spPr>
-        <p:txBody>
-          <a:bodyPr wrap="square" lIns="0" rIns="0" tIns="0" bIns="0" anchor="t">
-            <a:spAutoFit/>
-          </a:bodyPr>
-          <a:lstStyle/>
-          <a:p>
-            <a:pPr algn="ctr"/>
-            <a:r>
-              <a:rPr sz="1300" b="0">
-                <a:solidFill>
-                  <a:srgbClr val="7A8494"/>
-                </a:solidFill>
-                <a:latin typeface="Calibri"/>
-              </a:rPr>
-              <a:t>Deployment: Railway (Procfile → python app.py)  ·  Persistence: JSON files + Google Sheets</a:t>
-            </a:r>
-          </a:p>
-        </p:txBody>
-      </p:sp>
-      <p:sp>
-        <p:nvSpPr>
-          <p:cNvPr id="29" name="TextBox 28"/>
           <p:cNvSpPr txBox="1"/>
           <p:nvPr/>
         </p:nvSpPr>
@@ -9798,7 +11894,7 @@
             <a:avLst/>
           </a:prstGeom>
           <a:solidFill>
-            <a:srgbClr val="30D158"/>
+            <a:srgbClr val="4A9EFF"/>
           </a:solidFill>
           <a:ln>
             <a:noFill/>
@@ -9856,7 +11952,7 @@
                 </a:solidFill>
                 <a:latin typeface="Calibri"/>
               </a:rPr>
-              <a:t>Where we are</a:t>
+              <a:t>One click, many prices</a:t>
             </a:r>
           </a:p>
         </p:txBody>
@@ -9869,8 +11965,190 @@
         </p:nvSpPr>
         <p:spPr>
           <a:xfrm>
-            <a:off x="472287" y="2011680"/>
-            <a:ext cx="2606040" cy="2743200"/>
+            <a:off x="457200" y="1691640"/>
+            <a:ext cx="5440680" cy="4114800"/>
+          </a:xfrm>
+          <a:prstGeom prst="roundRect">
+            <a:avLst/>
+          </a:prstGeom>
+          <a:solidFill>
+            <a:srgbClr val="121E2F"/>
+          </a:solidFill>
+          <a:ln w="12700">
+            <a:solidFill>
+              <a:srgbClr val="4A9EFF"/>
+            </a:solidFill>
+          </a:ln>
+          <a:effectLst/>
+        </p:spPr>
+        <p:style>
+          <a:lnRef idx="1">
+            <a:schemeClr val="accent1"/>
+          </a:lnRef>
+          <a:fillRef idx="3">
+            <a:schemeClr val="accent1"/>
+          </a:fillRef>
+          <a:effectRef idx="2">
+            <a:schemeClr val="accent1"/>
+          </a:effectRef>
+          <a:fontRef idx="minor">
+            <a:schemeClr val="lt1"/>
+          </a:fontRef>
+        </p:style>
+        <p:txBody>
+          <a:bodyPr rtlCol="0" anchor="ctr"/>
+          <a:lstStyle/>
+          <a:p/>
+        </p:txBody>
+      </p:sp>
+      <p:sp>
+        <p:nvSpPr>
+          <p:cNvPr id="6" name="TextBox 5"/>
+          <p:cNvSpPr txBox="1"/>
+          <p:nvPr/>
+        </p:nvSpPr>
+        <p:spPr>
+          <a:xfrm>
+            <a:off x="685800" y="1920240"/>
+            <a:ext cx="5440680" cy="457200"/>
+          </a:xfrm>
+          <a:prstGeom prst="rect">
+            <a:avLst/>
+          </a:prstGeom>
+          <a:noFill/>
+        </p:spPr>
+        <p:txBody>
+          <a:bodyPr wrap="square" lIns="0" rIns="0" tIns="0" bIns="0" anchor="t">
+            <a:spAutoFit/>
+          </a:bodyPr>
+          <a:lstStyle/>
+          <a:p>
+            <a:pPr algn="l"/>
+            <a:r>
+              <a:rPr sz="1500" b="1">
+                <a:solidFill>
+                  <a:srgbClr val="4A9EFF"/>
+                </a:solidFill>
+                <a:latin typeface="Calibri"/>
+              </a:rPr>
+              <a:t>BULK REPRICE MODAL</a:t>
+            </a:r>
+          </a:p>
+        </p:txBody>
+      </p:sp>
+      <p:sp>
+        <p:nvSpPr>
+          <p:cNvPr id="7" name="TextBox 6"/>
+          <p:cNvSpPr txBox="1"/>
+          <p:nvPr/>
+        </p:nvSpPr>
+        <p:spPr>
+          <a:xfrm>
+            <a:off x="685800" y="2468880"/>
+            <a:ext cx="5074920" cy="3200400"/>
+          </a:xfrm>
+          <a:prstGeom prst="rect">
+            <a:avLst/>
+          </a:prstGeom>
+          <a:noFill/>
+        </p:spPr>
+        <p:txBody>
+          <a:bodyPr wrap="square" lIns="0" rIns="0" tIns="0" bIns="0" anchor="t">
+            <a:spAutoFit/>
+          </a:bodyPr>
+          <a:lstStyle/>
+          <a:p>
+            <a:pPr algn="l">
+              <a:lnSpc>
+                <a:spcPct val="145000"/>
+              </a:lnSpc>
+            </a:pPr>
+            <a:r>
+              <a:rPr sz="1400" b="0">
+                <a:solidFill>
+                  <a:srgbClr val="F0F3F7"/>
+                </a:solidFill>
+                <a:latin typeface="Calibri"/>
+              </a:rPr>
+              <a:t>•  Filter: min upside %, min comp count, artist</a:t>
+            </a:r>
+          </a:p>
+          <a:p>
+            <a:pPr algn="l">
+              <a:lnSpc>
+                <a:spcPct val="145000"/>
+              </a:lnSpc>
+            </a:pPr>
+            <a:r>
+              <a:rPr sz="1400" b="0">
+                <a:solidFill>
+                  <a:srgbClr val="F0F3F7"/>
+                </a:solidFill>
+                <a:latin typeface="Calibri"/>
+              </a:rPr>
+              <a:t>•  Checkbox table → select-many → apply-many</a:t>
+            </a:r>
+          </a:p>
+          <a:p>
+            <a:pPr algn="l">
+              <a:lnSpc>
+                <a:spcPct val="145000"/>
+              </a:lnSpc>
+            </a:pPr>
+            <a:r>
+              <a:rPr sz="1400" b="0">
+                <a:solidFill>
+                  <a:srgbClr val="F0F3F7"/>
+                </a:solidFill>
+                <a:latin typeface="Calibri"/>
+              </a:rPr>
+              <a:t>•  NEW: "Re-query LLMs" checkbox forces fresh consensus</a:t>
+            </a:r>
+          </a:p>
+          <a:p>
+            <a:pPr algn="l">
+              <a:lnSpc>
+                <a:spcPct val="145000"/>
+              </a:lnSpc>
+            </a:pPr>
+            <a:r>
+              <a:rPr sz="1400" b="0">
+                <a:solidFill>
+                  <a:srgbClr val="F0F3F7"/>
+                </a:solidFill>
+                <a:latin typeface="Calibri"/>
+              </a:rPr>
+              <a:t>•  Source tag logged per change (manual, bulk_consensus, match_median)</a:t>
+            </a:r>
+          </a:p>
+          <a:p>
+            <a:pPr algn="l">
+              <a:lnSpc>
+                <a:spcPct val="145000"/>
+              </a:lnSpc>
+            </a:pPr>
+            <a:r>
+              <a:rPr sz="1400" b="0">
+                <a:solidFill>
+                  <a:srgbClr val="F0F3F7"/>
+                </a:solidFill>
+                <a:latin typeface="Calibri"/>
+              </a:rPr>
+              <a:t>•  Every change writes to the pricing track record</a:t>
+            </a:r>
+          </a:p>
+        </p:txBody>
+      </p:sp>
+      <p:sp>
+        <p:nvSpPr>
+          <p:cNvPr id="8" name="Rounded Rectangle 7"/>
+          <p:cNvSpPr/>
+          <p:nvPr/>
+        </p:nvSpPr>
+        <p:spPr>
+          <a:xfrm>
+            <a:off x="6263640" y="1691640"/>
+            <a:ext cx="5440680" cy="4114800"/>
           </a:xfrm>
           <a:prstGeom prst="roundRect">
             <a:avLst/>
@@ -9907,49 +12185,14 @@
       </p:sp>
       <p:sp>
         <p:nvSpPr>
-          <p:cNvPr id="6" name="TextBox 5"/>
+          <p:cNvPr id="9" name="TextBox 8"/>
           <p:cNvSpPr txBox="1"/>
           <p:nvPr/>
         </p:nvSpPr>
         <p:spPr>
           <a:xfrm>
-            <a:off x="472287" y="2331720"/>
-            <a:ext cx="2606040" cy="1371600"/>
-          </a:xfrm>
-          <a:prstGeom prst="rect">
-            <a:avLst/>
-          </a:prstGeom>
-          <a:noFill/>
-        </p:spPr>
-        <p:txBody>
-          <a:bodyPr wrap="square" lIns="0" rIns="0" tIns="0" bIns="0" anchor="ctr">
-            <a:spAutoFit/>
-          </a:bodyPr>
-          <a:lstStyle/>
-          <a:p>
-            <a:pPr algn="ctr"/>
-            <a:r>
-              <a:rPr sz="5400" b="1">
-                <a:solidFill>
-                  <a:srgbClr val="C8A355"/>
-                </a:solidFill>
-                <a:latin typeface="Calibri"/>
-              </a:rPr>
-              <a:t>54,000+</a:t>
-            </a:r>
-          </a:p>
-        </p:txBody>
-      </p:sp>
-      <p:sp>
-        <p:nvSpPr>
-          <p:cNvPr id="7" name="TextBox 6"/>
-          <p:cNvSpPr txBox="1"/>
-          <p:nvPr/>
-        </p:nvSpPr>
-        <p:spPr>
-          <a:xfrm>
-            <a:off x="655167" y="3794760"/>
-            <a:ext cx="2240280" cy="914400"/>
+            <a:off x="6492240" y="1920240"/>
+            <a:ext cx="5440680" cy="457200"/>
           </a:xfrm>
           <a:prstGeom prst="rect">
             <a:avLst/>
@@ -9962,94 +12205,15 @@
           </a:bodyPr>
           <a:lstStyle/>
           <a:p>
-            <a:pPr algn="ctr"/>
-            <a:r>
-              <a:rPr sz="1400" b="0">
-                <a:solidFill>
-                  <a:srgbClr val="F0F3F7"/>
-                </a:solidFill>
-                <a:latin typeface="Calibri"/>
-              </a:rPr>
-              <a:t>records in comp DB</a:t>
-            </a:r>
-          </a:p>
-        </p:txBody>
-      </p:sp>
-      <p:sp>
-        <p:nvSpPr>
-          <p:cNvPr id="8" name="Rounded Rectangle 7"/>
-          <p:cNvSpPr/>
-          <p:nvPr/>
-        </p:nvSpPr>
-        <p:spPr>
-          <a:xfrm>
-            <a:off x="3352647" y="2011680"/>
-            <a:ext cx="2606040" cy="2743200"/>
-          </a:xfrm>
-          <a:prstGeom prst="roundRect">
-            <a:avLst/>
-          </a:prstGeom>
-          <a:solidFill>
-            <a:srgbClr val="121E2F"/>
-          </a:solidFill>
-          <a:ln w="12700">
-            <a:solidFill>
-              <a:srgbClr val="4A9EFF"/>
-            </a:solidFill>
-          </a:ln>
-          <a:effectLst/>
-        </p:spPr>
-        <p:style>
-          <a:lnRef idx="1">
-            <a:schemeClr val="accent1"/>
-          </a:lnRef>
-          <a:fillRef idx="3">
-            <a:schemeClr val="accent1"/>
-          </a:fillRef>
-          <a:effectRef idx="2">
-            <a:schemeClr val="accent1"/>
-          </a:effectRef>
-          <a:fontRef idx="minor">
-            <a:schemeClr val="lt1"/>
-          </a:fontRef>
-        </p:style>
-        <p:txBody>
-          <a:bodyPr rtlCol="0" anchor="ctr"/>
-          <a:lstStyle/>
-          <a:p/>
-        </p:txBody>
-      </p:sp>
-      <p:sp>
-        <p:nvSpPr>
-          <p:cNvPr id="9" name="TextBox 8"/>
-          <p:cNvSpPr txBox="1"/>
-          <p:nvPr/>
-        </p:nvSpPr>
-        <p:spPr>
-          <a:xfrm>
-            <a:off x="3352647" y="2331720"/>
-            <a:ext cx="2606040" cy="1371600"/>
-          </a:xfrm>
-          <a:prstGeom prst="rect">
-            <a:avLst/>
-          </a:prstGeom>
-          <a:noFill/>
-        </p:spPr>
-        <p:txBody>
-          <a:bodyPr wrap="square" lIns="0" rIns="0" tIns="0" bIns="0" anchor="ctr">
-            <a:spAutoFit/>
-          </a:bodyPr>
-          <a:lstStyle/>
-          <a:p>
-            <a:pPr algn="ctr"/>
-            <a:r>
-              <a:rPr sz="5400" b="1">
-                <a:solidFill>
-                  <a:srgbClr val="4A9EFF"/>
-                </a:solidFill>
-                <a:latin typeface="Calibri"/>
-              </a:rPr>
-              <a:t>~200</a:t>
+            <a:pPr algn="l"/>
+            <a:r>
+              <a:rPr sz="1500" b="1">
+                <a:solidFill>
+                  <a:srgbClr val="C8A355"/>
+                </a:solidFill>
+                <a:latin typeface="Calibri"/>
+              </a:rPr>
+              <a:t>DRIFT ALERTS</a:t>
             </a:r>
           </a:p>
         </p:txBody>
@@ -10062,8 +12226,8 @@
         </p:nvSpPr>
         <p:spPr>
           <a:xfrm>
-            <a:off x="3535527" y="3794760"/>
-            <a:ext cx="2240280" cy="914400"/>
+            <a:off x="6492240" y="2468880"/>
+            <a:ext cx="5074920" cy="3200400"/>
           </a:xfrm>
           <a:prstGeom prst="rect">
             <a:avLst/>
@@ -10076,7 +12240,11 @@
           </a:bodyPr>
           <a:lstStyle/>
           <a:p>
-            <a:pPr algn="ctr"/>
+            <a:pPr algn="l">
+              <a:lnSpc>
+                <a:spcPct val="145000"/>
+              </a:lnSpc>
+            </a:pPr>
             <a:r>
               <a:rPr sz="1400" b="0">
                 <a:solidFill>
@@ -10084,100 +12252,85 @@
                 </a:solidFill>
                 <a:latin typeface="Calibri"/>
               </a:rPr>
-              <a:t>active eBay listings managed</a:t>
-            </a:r>
-          </a:p>
-        </p:txBody>
-      </p:sp>
-      <p:sp>
-        <p:nvSpPr>
-          <p:cNvPr id="11" name="Rounded Rectangle 10"/>
-          <p:cNvSpPr/>
-          <p:nvPr/>
-        </p:nvSpPr>
-        <p:spPr>
-          <a:xfrm>
-            <a:off x="6233007" y="2011680"/>
-            <a:ext cx="2606040" cy="2743200"/>
-          </a:xfrm>
-          <a:prstGeom prst="roundRect">
-            <a:avLst/>
-          </a:prstGeom>
-          <a:solidFill>
-            <a:srgbClr val="121E2F"/>
-          </a:solidFill>
-          <a:ln w="12700">
-            <a:solidFill>
-              <a:srgbClr val="30D158"/>
-            </a:solidFill>
-          </a:ln>
-          <a:effectLst/>
-        </p:spPr>
-        <p:style>
-          <a:lnRef idx="1">
-            <a:schemeClr val="accent1"/>
-          </a:lnRef>
-          <a:fillRef idx="3">
-            <a:schemeClr val="accent1"/>
-          </a:fillRef>
-          <a:effectRef idx="2">
-            <a:schemeClr val="accent1"/>
-          </a:effectRef>
-          <a:fontRef idx="minor">
-            <a:schemeClr val="lt1"/>
-          </a:fontRef>
-        </p:style>
-        <p:txBody>
-          <a:bodyPr rtlCol="0" anchor="ctr"/>
-          <a:lstStyle/>
-          <a:p/>
-        </p:txBody>
-      </p:sp>
-      <p:sp>
-        <p:nvSpPr>
-          <p:cNvPr id="12" name="TextBox 11"/>
+              <a:t>•  /api/drift-alerts surfaces comp-vs-listed gaps</a:t>
+            </a:r>
+          </a:p>
+          <a:p>
+            <a:pPr algn="l">
+              <a:lnSpc>
+                <a:spcPct val="145000"/>
+              </a:lnSpc>
+            </a:pPr>
+            <a:r>
+              <a:rPr sz="1400" b="0">
+                <a:solidFill>
+                  <a:srgbClr val="F0F3F7"/>
+                </a:solidFill>
+                <a:latin typeface="Calibri"/>
+              </a:rPr>
+              <a:t>•  Trigger: comp_median drifts ≥10% from your listed price</a:t>
+            </a:r>
+          </a:p>
+          <a:p>
+            <a:pPr algn="l">
+              <a:lnSpc>
+                <a:spcPct val="145000"/>
+              </a:lnSpc>
+            </a:pPr>
+            <a:r>
+              <a:rPr sz="1400" b="0">
+                <a:solidFill>
+                  <a:srgbClr val="F0F3F7"/>
+                </a:solidFill>
+                <a:latin typeface="Calibri"/>
+              </a:rPr>
+              <a:t>•  Catches missed windows around key-date events</a:t>
+            </a:r>
+          </a:p>
+          <a:p>
+            <a:pPr algn="l">
+              <a:lnSpc>
+                <a:spcPct val="145000"/>
+              </a:lnSpc>
+            </a:pPr>
+            <a:r>
+              <a:rPr sz="1400" b="0">
+                <a:solidFill>
+                  <a:srgbClr val="F0F3F7"/>
+                </a:solidFill>
+                <a:latin typeface="Calibri"/>
+              </a:rPr>
+              <a:t>•  Deep-links into Swipe Mode for one-click reprice</a:t>
+            </a:r>
+          </a:p>
+          <a:p>
+            <a:pPr algn="l">
+              <a:lnSpc>
+                <a:spcPct val="145000"/>
+              </a:lnSpc>
+            </a:pPr>
+            <a:r>
+              <a:rPr sz="1400" b="0">
+                <a:solidFill>
+                  <a:srgbClr val="F0F3F7"/>
+                </a:solidFill>
+                <a:latin typeface="Calibri"/>
+              </a:rPr>
+              <a:t>•  Morning heads-up on what moved overnight</a:t>
+            </a:r>
+          </a:p>
+        </p:txBody>
+      </p:sp>
+      <p:sp>
+        <p:nvSpPr>
+          <p:cNvPr id="11" name="TextBox 10"/>
           <p:cNvSpPr txBox="1"/>
           <p:nvPr/>
         </p:nvSpPr>
         <p:spPr>
           <a:xfrm>
-            <a:off x="6233007" y="2331720"/>
-            <a:ext cx="2606040" cy="1371600"/>
-          </a:xfrm>
-          <a:prstGeom prst="rect">
-            <a:avLst/>
-          </a:prstGeom>
-          <a:noFill/>
-        </p:spPr>
-        <p:txBody>
-          <a:bodyPr wrap="square" lIns="0" rIns="0" tIns="0" bIns="0" anchor="ctr">
-            <a:spAutoFit/>
-          </a:bodyPr>
-          <a:lstStyle/>
-          <a:p>
-            <a:pPr algn="ctr"/>
-            <a:r>
-              <a:rPr sz="5400" b="1">
-                <a:solidFill>
-                  <a:srgbClr val="30D158"/>
-                </a:solidFill>
-                <a:latin typeface="Calibri"/>
-              </a:rPr>
-              <a:t>2 of 4</a:t>
-            </a:r>
-          </a:p>
-        </p:txBody>
-      </p:sp>
-      <p:sp>
-        <p:nvSpPr>
-          <p:cNvPr id="13" name="TextBox 12"/>
-          <p:cNvSpPr txBox="1"/>
-          <p:nvPr/>
-        </p:nvSpPr>
-        <p:spPr>
-          <a:xfrm>
-            <a:off x="6415887" y="3794760"/>
-            <a:ext cx="2240280" cy="914400"/>
+            <a:off x="822960" y="5989320"/>
+            <a:ext cx="10515600" cy="411480"/>
           </a:xfrm>
           <a:prstGeom prst="rect">
             <a:avLst/>
@@ -10192,216 +12345,20 @@
           <a:p>
             <a:pPr algn="ctr"/>
             <a:r>
-              <a:rPr sz="1400" b="0">
-                <a:solidFill>
-                  <a:srgbClr val="F0F3F7"/>
-                </a:solidFill>
-                <a:latin typeface="Calibri"/>
-              </a:rPr>
-              <a:t>LLMs live</a:t>
-            </a:r>
-          </a:p>
-          <a:p>
-            <a:pPr algn="ctr"/>
-            <a:r>
-              <a:rPr sz="1400" b="0">
-                <a:solidFill>
-                  <a:srgbClr val="F0F3F7"/>
-                </a:solidFill>
-                <a:latin typeface="Calibri"/>
-              </a:rPr>
-              <a:t>Claude + Grok · OpenAI/Gemini pending billing</a:t>
-            </a:r>
-          </a:p>
-        </p:txBody>
-      </p:sp>
-      <p:sp>
-        <p:nvSpPr>
-          <p:cNvPr id="14" name="Rounded Rectangle 13"/>
-          <p:cNvSpPr/>
-          <p:nvPr/>
-        </p:nvSpPr>
-        <p:spPr>
-          <a:xfrm>
-            <a:off x="9113367" y="2011680"/>
-            <a:ext cx="2606040" cy="2743200"/>
-          </a:xfrm>
-          <a:prstGeom prst="roundRect">
-            <a:avLst/>
-          </a:prstGeom>
-          <a:solidFill>
-            <a:srgbClr val="121E2F"/>
-          </a:solidFill>
-          <a:ln w="12700">
-            <a:solidFill>
-              <a:srgbClr val="4A9EFF"/>
-            </a:solidFill>
-          </a:ln>
-          <a:effectLst/>
-        </p:spPr>
-        <p:style>
-          <a:lnRef idx="1">
-            <a:schemeClr val="accent1"/>
-          </a:lnRef>
-          <a:fillRef idx="3">
-            <a:schemeClr val="accent1"/>
-          </a:fillRef>
-          <a:effectRef idx="2">
-            <a:schemeClr val="accent1"/>
-          </a:effectRef>
-          <a:fontRef idx="minor">
-            <a:schemeClr val="lt1"/>
-          </a:fontRef>
-        </p:style>
-        <p:txBody>
-          <a:bodyPr rtlCol="0" anchor="ctr"/>
-          <a:lstStyle/>
-          <a:p/>
-        </p:txBody>
-      </p:sp>
-      <p:sp>
-        <p:nvSpPr>
-          <p:cNvPr id="15" name="TextBox 14"/>
-          <p:cNvSpPr txBox="1"/>
-          <p:nvPr/>
-        </p:nvSpPr>
-        <p:spPr>
-          <a:xfrm>
-            <a:off x="9113367" y="2331720"/>
-            <a:ext cx="2606040" cy="1371600"/>
-          </a:xfrm>
-          <a:prstGeom prst="rect">
-            <a:avLst/>
-          </a:prstGeom>
-          <a:noFill/>
-        </p:spPr>
-        <p:txBody>
-          <a:bodyPr wrap="square" lIns="0" rIns="0" tIns="0" bIns="0" anchor="ctr">
-            <a:spAutoFit/>
-          </a:bodyPr>
-          <a:lstStyle/>
-          <a:p>
-            <a:pPr algn="ctr"/>
-            <a:r>
-              <a:rPr sz="5400" b="1">
-                <a:solidFill>
-                  <a:srgbClr val="4A9EFF"/>
-                </a:solidFill>
-                <a:latin typeface="Calibri"/>
-              </a:rPr>
-              <a:t>&lt;2s</a:t>
-            </a:r>
-          </a:p>
-        </p:txBody>
-      </p:sp>
-      <p:sp>
-        <p:nvSpPr>
-          <p:cNvPr id="16" name="TextBox 15"/>
-          <p:cNvSpPr txBox="1"/>
-          <p:nvPr/>
-        </p:nvSpPr>
-        <p:spPr>
-          <a:xfrm>
-            <a:off x="9296247" y="3794760"/>
-            <a:ext cx="2240280" cy="914400"/>
-          </a:xfrm>
-          <a:prstGeom prst="rect">
-            <a:avLst/>
-          </a:prstGeom>
-          <a:noFill/>
-        </p:spPr>
-        <p:txBody>
-          <a:bodyPr wrap="square" lIns="0" rIns="0" tIns="0" bIns="0" anchor="t">
-            <a:spAutoFit/>
-          </a:bodyPr>
-          <a:lstStyle/>
-          <a:p>
-            <a:pPr algn="ctr"/>
-            <a:r>
-              <a:rPr sz="1400" b="0">
-                <a:solidFill>
-                  <a:srgbClr val="F0F3F7"/>
-                </a:solidFill>
-                <a:latin typeface="Calibri"/>
-              </a:rPr>
-              <a:t>wall clock, 4-LLM fan-out</a:t>
-            </a:r>
-          </a:p>
-        </p:txBody>
-      </p:sp>
-      <p:sp>
-        <p:nvSpPr>
-          <p:cNvPr id="17" name="TextBox 16"/>
-          <p:cNvSpPr txBox="1"/>
-          <p:nvPr/>
-        </p:nvSpPr>
-        <p:spPr>
-          <a:xfrm>
-            <a:off x="822960" y="5303520"/>
-            <a:ext cx="10515600" cy="457200"/>
-          </a:xfrm>
-          <a:prstGeom prst="rect">
-            <a:avLst/>
-          </a:prstGeom>
-          <a:noFill/>
-        </p:spPr>
-        <p:txBody>
-          <a:bodyPr wrap="square" lIns="0" rIns="0" tIns="0" bIns="0" anchor="t">
-            <a:spAutoFit/>
-          </a:bodyPr>
-          <a:lstStyle/>
-          <a:p>
-            <a:pPr algn="ctr"/>
-            <a:r>
-              <a:rPr sz="1600" b="1">
-                <a:solidFill>
-                  <a:srgbClr val="C8A355"/>
-                </a:solidFill>
-                <a:latin typeface="Calibri"/>
-              </a:rPr>
-              <a:t>Deployed live at web-production-15df7.up.railway.app</a:t>
-            </a:r>
-          </a:p>
-        </p:txBody>
-      </p:sp>
-      <p:sp>
-        <p:nvSpPr>
-          <p:cNvPr id="18" name="TextBox 17"/>
-          <p:cNvSpPr txBox="1"/>
-          <p:nvPr/>
-        </p:nvSpPr>
-        <p:spPr>
-          <a:xfrm>
-            <a:off x="822960" y="5760720"/>
-            <a:ext cx="10515600" cy="365760"/>
-          </a:xfrm>
-          <a:prstGeom prst="rect">
-            <a:avLst/>
-          </a:prstGeom>
-          <a:noFill/>
-        </p:spPr>
-        <p:txBody>
-          <a:bodyPr wrap="square" lIns="0" rIns="0" tIns="0" bIns="0" anchor="t">
-            <a:spAutoFit/>
-          </a:bodyPr>
-          <a:lstStyle/>
-          <a:p>
-            <a:pPr algn="ctr"/>
-            <a:r>
-              <a:rPr sz="1300" b="0">
-                <a:solidFill>
-                  <a:srgbClr val="7A8494"/>
-                </a:solidFill>
-                <a:latin typeface="Calibri"/>
-              </a:rPr>
-              <a:t>Railway auto-deploy from GitHub main</a:t>
-            </a:r>
-          </a:p>
-        </p:txBody>
-      </p:sp>
-      <p:sp>
-        <p:nvSpPr>
-          <p:cNvPr id="19" name="TextBox 18"/>
+              <a:rPr sz="1400" b="1">
+                <a:solidFill>
+                  <a:srgbClr val="30D158"/>
+                </a:solidFill>
+                <a:latin typeface="Calibri"/>
+              </a:rPr>
+              <a:t>Your pricing track record: every change, timestamped, sourced, reversible</a:t>
+            </a:r>
+          </a:p>
+        </p:txBody>
+      </p:sp>
+      <p:sp>
+        <p:nvSpPr>
+          <p:cNvPr id="12" name="TextBox 11"/>
           <p:cNvSpPr txBox="1"/>
           <p:nvPr/>
         </p:nvSpPr>
